--- a/NYMBL-DOCRAG.pptx
+++ b/NYMBL-DOCRAG.pptx
@@ -16,6 +16,8 @@
     <p:sldId id="264" r:id="rId14"/>
     <p:sldId id="265" r:id="rId15"/>
     <p:sldId id="266" r:id="rId16"/>
+    <p:sldId id="268" r:id="rId21"/>
+    <p:sldId id="269" r:id="rId22"/>
     <p:sldId id="267" r:id="rId17"/>
   </p:sldIdLst>
   <p:sldSz cx="18288000" cy="10287000"/>
@@ -7435,6 +7437,2373 @@
 </p:sld>
 </file>
 
+<file path=ppt/slides/slide13.xml><?xml version="1.0" encoding="utf-8"?>
+<p:sld xmlns:a="http://schemas.openxmlformats.org/drawingml/2006/main" xmlns:p="http://schemas.openxmlformats.org/presentationml/2006/main" xmlns:r="http://schemas.openxmlformats.org/officeDocument/2006/relationships">
+  <p:cSld>
+    <p:bg>
+      <p:bgPr>
+        <a:solidFill>
+          <a:srgbClr val="FFFFFF"/>
+        </a:solidFill>
+        <a:effectLst/>
+      </p:bgPr>
+    </p:bg>
+    <p:spTree>
+      <p:nvGrpSpPr>
+        <p:cNvPr id="1" name=""/>
+        <p:cNvGrpSpPr/>
+        <p:nvPr/>
+      </p:nvGrpSpPr>
+      <p:grpSpPr/>
+      <p:sp>
+        <p:nvSpPr>
+          <p:cNvPr id="2" name="TextBox 1"/>
+          <p:cNvSpPr txBox="1"/>
+          <p:nvPr/>
+        </p:nvSpPr>
+        <p:spPr>
+          <a:xfrm>
+            <a:off x="914400" y="484632"/>
+            <a:ext cx="16285463" cy="429768"/>
+          </a:xfrm>
+          <a:prstGeom prst="rect">
+            <a:avLst/>
+          </a:prstGeom>
+          <a:noFill/>
+        </p:spPr>
+        <p:txBody>
+          <a:bodyPr wrap="square">
+            <a:spAutoFit/>
+          </a:bodyPr>
+          <a:lstStyle/>
+          <a:p>
+            <a:pPr algn="l"/>
+            <a:r>
+              <a:rPr sz="1400" b="1" i="0">
+                <a:solidFill>
+                  <a:srgbClr val="7C3AED"/>
+                </a:solidFill>
+              </a:rPr>
+              <a:t>LIMITATIONS</a:t>
+            </a:r>
+          </a:p>
+        </p:txBody>
+      </p:sp>
+      <p:sp>
+        <p:nvSpPr>
+          <p:cNvPr id="3" name="TextBox 2"/>
+          <p:cNvSpPr txBox="1"/>
+          <p:nvPr/>
+        </p:nvSpPr>
+        <p:spPr>
+          <a:xfrm>
+            <a:off x="914400" y="987552"/>
+            <a:ext cx="16285463" cy="502920"/>
+          </a:xfrm>
+          <a:prstGeom prst="rect">
+            <a:avLst/>
+          </a:prstGeom>
+          <a:noFill/>
+        </p:spPr>
+        <p:txBody>
+          <a:bodyPr wrap="square">
+            <a:spAutoFit/>
+          </a:bodyPr>
+          <a:lstStyle/>
+          <a:p>
+            <a:pPr algn="l"/>
+            <a:r>
+              <a:rPr sz="2800" b="1" i="0">
+                <a:solidFill>
+                  <a:srgbClr val="4C1D95"/>
+                </a:solidFill>
+              </a:rPr>
+              <a:t>Current scope — known constraints</a:t>
+            </a:r>
+          </a:p>
+        </p:txBody>
+      </p:sp>
+      <p:sp>
+        <p:nvSpPr>
+          <p:cNvPr id="4" name="Rectangle 3"/>
+          <p:cNvSpPr/>
+          <p:nvPr/>
+        </p:nvSpPr>
+        <p:spPr>
+          <a:xfrm>
+            <a:off x="822960" y="1856231"/>
+            <a:ext cx="16651224" cy="54864"/>
+          </a:xfrm>
+          <a:prstGeom prst="rect">
+            <a:avLst/>
+          </a:prstGeom>
+          <a:solidFill>
+            <a:srgbClr val="EF4444"/>
+          </a:solidFill>
+          <a:ln>
+            <a:noFill/>
+          </a:ln>
+        </p:spPr>
+        <p:style>
+          <a:lnRef idx="1">
+            <a:schemeClr val="accent1"/>
+          </a:lnRef>
+          <a:fillRef idx="3">
+            <a:schemeClr val="accent1"/>
+          </a:fillRef>
+          <a:effectRef idx="2">
+            <a:schemeClr val="accent1"/>
+          </a:effectRef>
+          <a:fontRef idx="minor">
+            <a:schemeClr val="lt1"/>
+          </a:fontRef>
+        </p:style>
+        <p:txBody>
+          <a:bodyPr rtlCol="0" anchor="ctr"/>
+          <a:lstStyle/>
+          <a:p>
+            <a:pPr algn="ctr"/>
+          </a:p>
+        </p:txBody>
+      </p:sp>
+      <p:sp>
+        <p:nvSpPr>
+          <p:cNvPr id="5" name="Rectangle 4"/>
+          <p:cNvSpPr/>
+          <p:nvPr/>
+        </p:nvSpPr>
+        <p:spPr>
+          <a:xfrm>
+            <a:off x="402336" y="2185416"/>
+            <a:ext cx="5303520" cy="3447288"/>
+          </a:xfrm>
+          <a:prstGeom prst="rect">
+            <a:avLst/>
+          </a:prstGeom>
+          <a:solidFill>
+            <a:srgbClr val="FFFFFF"/>
+          </a:solidFill>
+          <a:ln w="6350">
+            <a:solidFill>
+              <a:srgbClr val="E2E8F0"/>
+            </a:solidFill>
+          </a:ln>
+        </p:spPr>
+        <p:style>
+          <a:lnRef idx="1">
+            <a:schemeClr val="accent1"/>
+          </a:lnRef>
+          <a:fillRef idx="3">
+            <a:schemeClr val="accent1"/>
+          </a:fillRef>
+          <a:effectRef idx="2">
+            <a:schemeClr val="accent1"/>
+          </a:effectRef>
+          <a:fontRef idx="minor">
+            <a:schemeClr val="lt1"/>
+          </a:fontRef>
+        </p:style>
+        <p:txBody>
+          <a:bodyPr rtlCol="0" anchor="ctr"/>
+          <a:lstStyle/>
+          <a:p>
+            <a:pPr algn="ctr"/>
+          </a:p>
+        </p:txBody>
+      </p:sp>
+      <p:sp>
+        <p:nvSpPr>
+          <p:cNvPr id="6" name="Rectangle 5"/>
+          <p:cNvSpPr/>
+          <p:nvPr/>
+        </p:nvSpPr>
+        <p:spPr>
+          <a:xfrm>
+            <a:off x="402336" y="2185416"/>
+            <a:ext cx="5303520" cy="64008"/>
+          </a:xfrm>
+          <a:prstGeom prst="rect">
+            <a:avLst/>
+          </a:prstGeom>
+          <a:solidFill>
+            <a:srgbClr val="EF4444"/>
+          </a:solidFill>
+          <a:ln>
+            <a:noFill/>
+          </a:ln>
+        </p:spPr>
+        <p:style>
+          <a:lnRef idx="1">
+            <a:schemeClr val="accent1"/>
+          </a:lnRef>
+          <a:fillRef idx="3">
+            <a:schemeClr val="accent1"/>
+          </a:fillRef>
+          <a:effectRef idx="2">
+            <a:schemeClr val="accent1"/>
+          </a:effectRef>
+          <a:fontRef idx="minor">
+            <a:schemeClr val="lt1"/>
+          </a:fontRef>
+        </p:style>
+        <p:txBody>
+          <a:bodyPr rtlCol="0" anchor="ctr"/>
+          <a:lstStyle/>
+          <a:p>
+            <a:pPr algn="ctr"/>
+          </a:p>
+        </p:txBody>
+      </p:sp>
+      <p:sp>
+        <p:nvSpPr>
+          <p:cNvPr id="7" name="TextBox 6"/>
+          <p:cNvSpPr txBox="1"/>
+          <p:nvPr/>
+        </p:nvSpPr>
+        <p:spPr>
+          <a:xfrm>
+            <a:off x="704088" y="2359152"/>
+            <a:ext cx="4892040" cy="466344"/>
+          </a:xfrm>
+          <a:prstGeom prst="rect">
+            <a:avLst/>
+          </a:prstGeom>
+          <a:noFill/>
+        </p:spPr>
+        <p:txBody>
+          <a:bodyPr wrap="square">
+            <a:spAutoFit/>
+          </a:bodyPr>
+          <a:lstStyle/>
+          <a:p>
+            <a:pPr algn="l"/>
+            <a:r>
+              <a:rPr sz="1500" b="1" i="0">
+                <a:solidFill>
+                  <a:srgbClr val="4C1D95"/>
+                </a:solidFill>
+              </a:rPr>
+              <a:t>🚫  Single Document Only</a:t>
+            </a:r>
+          </a:p>
+        </p:txBody>
+      </p:sp>
+      <p:sp>
+        <p:nvSpPr>
+          <p:cNvPr id="8" name="TextBox 7"/>
+          <p:cNvSpPr txBox="1"/>
+          <p:nvPr/>
+        </p:nvSpPr>
+        <p:spPr>
+          <a:xfrm>
+            <a:off x="704088" y="2962656"/>
+            <a:ext cx="4892040" cy="2414016"/>
+          </a:xfrm>
+          <a:prstGeom prst="rect">
+            <a:avLst/>
+          </a:prstGeom>
+          <a:noFill/>
+        </p:spPr>
+        <p:txBody>
+          <a:bodyPr wrap="square">
+            <a:spAutoFit/>
+          </a:bodyPr>
+          <a:lstStyle/>
+          <a:p>
+            <a:pPr algn="l"/>
+            <a:r>
+              <a:rPr sz="1250" b="0" i="0">
+                <a:solidFill>
+                  <a:srgbClr val="7C3AED"/>
+                </a:solidFill>
+              </a:rPr>
+              <a:t>One PDF at a time. Uploading a new document wipes the previous one — no multi-doc library or cross-document queries.</a:t>
+            </a:r>
+          </a:p>
+        </p:txBody>
+      </p:sp>
+      <p:sp>
+        <p:nvSpPr>
+          <p:cNvPr id="9" name="Rectangle 8"/>
+          <p:cNvSpPr/>
+          <p:nvPr/>
+        </p:nvSpPr>
+        <p:spPr>
+          <a:xfrm>
+            <a:off x="6117336" y="2185416"/>
+            <a:ext cx="5303520" cy="3447288"/>
+          </a:xfrm>
+          <a:prstGeom prst="rect">
+            <a:avLst/>
+          </a:prstGeom>
+          <a:solidFill>
+            <a:srgbClr val="FFFFFF"/>
+          </a:solidFill>
+          <a:ln w="6350">
+            <a:solidFill>
+              <a:srgbClr val="E2E8F0"/>
+            </a:solidFill>
+          </a:ln>
+        </p:spPr>
+        <p:style>
+          <a:lnRef idx="1">
+            <a:schemeClr val="accent1"/>
+          </a:lnRef>
+          <a:fillRef idx="3">
+            <a:schemeClr val="accent1"/>
+          </a:fillRef>
+          <a:effectRef idx="2">
+            <a:schemeClr val="accent1"/>
+          </a:effectRef>
+          <a:fontRef idx="minor">
+            <a:schemeClr val="lt1"/>
+          </a:fontRef>
+        </p:style>
+        <p:txBody>
+          <a:bodyPr rtlCol="0" anchor="ctr"/>
+          <a:lstStyle/>
+          <a:p>
+            <a:pPr algn="ctr"/>
+          </a:p>
+        </p:txBody>
+      </p:sp>
+      <p:sp>
+        <p:nvSpPr>
+          <p:cNvPr id="10" name="Rectangle 9"/>
+          <p:cNvSpPr/>
+          <p:nvPr/>
+        </p:nvSpPr>
+        <p:spPr>
+          <a:xfrm>
+            <a:off x="6117336" y="2185416"/>
+            <a:ext cx="5303520" cy="64008"/>
+          </a:xfrm>
+          <a:prstGeom prst="rect">
+            <a:avLst/>
+          </a:prstGeom>
+          <a:solidFill>
+            <a:srgbClr val="EF4444"/>
+          </a:solidFill>
+          <a:ln>
+            <a:noFill/>
+          </a:ln>
+        </p:spPr>
+        <p:style>
+          <a:lnRef idx="1">
+            <a:schemeClr val="accent1"/>
+          </a:lnRef>
+          <a:fillRef idx="3">
+            <a:schemeClr val="accent1"/>
+          </a:fillRef>
+          <a:effectRef idx="2">
+            <a:schemeClr val="accent1"/>
+          </a:effectRef>
+          <a:fontRef idx="minor">
+            <a:schemeClr val="lt1"/>
+          </a:fontRef>
+        </p:style>
+        <p:txBody>
+          <a:bodyPr rtlCol="0" anchor="ctr"/>
+          <a:lstStyle/>
+          <a:p>
+            <a:pPr algn="ctr"/>
+          </a:p>
+        </p:txBody>
+      </p:sp>
+      <p:sp>
+        <p:nvSpPr>
+          <p:cNvPr id="11" name="TextBox 10"/>
+          <p:cNvSpPr txBox="1"/>
+          <p:nvPr/>
+        </p:nvSpPr>
+        <p:spPr>
+          <a:xfrm>
+            <a:off x="6419088" y="2359152"/>
+            <a:ext cx="4892040" cy="466344"/>
+          </a:xfrm>
+          <a:prstGeom prst="rect">
+            <a:avLst/>
+          </a:prstGeom>
+          <a:noFill/>
+        </p:spPr>
+        <p:txBody>
+          <a:bodyPr wrap="square">
+            <a:spAutoFit/>
+          </a:bodyPr>
+          <a:lstStyle/>
+          <a:p>
+            <a:pPr algn="l"/>
+            <a:r>
+              <a:rPr sz="1500" b="1" i="0">
+                <a:solidFill>
+                  <a:srgbClr val="4C1D95"/>
+                </a:solidFill>
+              </a:rPr>
+              <a:t>🔍  No Scanned PDF / OCR</a:t>
+            </a:r>
+          </a:p>
+        </p:txBody>
+      </p:sp>
+      <p:sp>
+        <p:nvSpPr>
+          <p:cNvPr id="12" name="TextBox 11"/>
+          <p:cNvSpPr txBox="1"/>
+          <p:nvPr/>
+        </p:nvSpPr>
+        <p:spPr>
+          <a:xfrm>
+            <a:off x="6419088" y="2962656"/>
+            <a:ext cx="4892040" cy="2414016"/>
+          </a:xfrm>
+          <a:prstGeom prst="rect">
+            <a:avLst/>
+          </a:prstGeom>
+          <a:noFill/>
+        </p:spPr>
+        <p:txBody>
+          <a:bodyPr wrap="square">
+            <a:spAutoFit/>
+          </a:bodyPr>
+          <a:lstStyle/>
+          <a:p>
+            <a:pPr algn="l"/>
+            <a:r>
+              <a:rPr sz="1250" b="0" i="0">
+                <a:solidFill>
+                  <a:srgbClr val="7C3AED"/>
+                </a:solidFill>
+              </a:rPr>
+              <a:t>PyMuPDF extracts text from digital PDFs only. Image-based or scanned pages return empty text — no Tesseract / Vision fallback.</a:t>
+            </a:r>
+          </a:p>
+        </p:txBody>
+      </p:sp>
+      <p:sp>
+        <p:nvSpPr>
+          <p:cNvPr id="13" name="Rectangle 12"/>
+          <p:cNvSpPr/>
+          <p:nvPr/>
+        </p:nvSpPr>
+        <p:spPr>
+          <a:xfrm>
+            <a:off x="11832336" y="2185416"/>
+            <a:ext cx="5303520" cy="3447288"/>
+          </a:xfrm>
+          <a:prstGeom prst="rect">
+            <a:avLst/>
+          </a:prstGeom>
+          <a:solidFill>
+            <a:srgbClr val="FFFFFF"/>
+          </a:solidFill>
+          <a:ln w="6350">
+            <a:solidFill>
+              <a:srgbClr val="E2E8F0"/>
+            </a:solidFill>
+          </a:ln>
+        </p:spPr>
+        <p:style>
+          <a:lnRef idx="1">
+            <a:schemeClr val="accent1"/>
+          </a:lnRef>
+          <a:fillRef idx="3">
+            <a:schemeClr val="accent1"/>
+          </a:fillRef>
+          <a:effectRef idx="2">
+            <a:schemeClr val="accent1"/>
+          </a:effectRef>
+          <a:fontRef idx="minor">
+            <a:schemeClr val="lt1"/>
+          </a:fontRef>
+        </p:style>
+        <p:txBody>
+          <a:bodyPr rtlCol="0" anchor="ctr"/>
+          <a:lstStyle/>
+          <a:p>
+            <a:pPr algn="ctr"/>
+          </a:p>
+        </p:txBody>
+      </p:sp>
+      <p:sp>
+        <p:nvSpPr>
+          <p:cNvPr id="14" name="Rectangle 13"/>
+          <p:cNvSpPr/>
+          <p:nvPr/>
+        </p:nvSpPr>
+        <p:spPr>
+          <a:xfrm>
+            <a:off x="11832336" y="2185416"/>
+            <a:ext cx="5303520" cy="64008"/>
+          </a:xfrm>
+          <a:prstGeom prst="rect">
+            <a:avLst/>
+          </a:prstGeom>
+          <a:solidFill>
+            <a:srgbClr val="EF4444"/>
+          </a:solidFill>
+          <a:ln>
+            <a:noFill/>
+          </a:ln>
+        </p:spPr>
+        <p:style>
+          <a:lnRef idx="1">
+            <a:schemeClr val="accent1"/>
+          </a:lnRef>
+          <a:fillRef idx="3">
+            <a:schemeClr val="accent1"/>
+          </a:fillRef>
+          <a:effectRef idx="2">
+            <a:schemeClr val="accent1"/>
+          </a:effectRef>
+          <a:fontRef idx="minor">
+            <a:schemeClr val="lt1"/>
+          </a:fontRef>
+        </p:style>
+        <p:txBody>
+          <a:bodyPr rtlCol="0" anchor="ctr"/>
+          <a:lstStyle/>
+          <a:p>
+            <a:pPr algn="ctr"/>
+          </a:p>
+        </p:txBody>
+      </p:sp>
+      <p:sp>
+        <p:nvSpPr>
+          <p:cNvPr id="15" name="TextBox 14"/>
+          <p:cNvSpPr txBox="1"/>
+          <p:nvPr/>
+        </p:nvSpPr>
+        <p:spPr>
+          <a:xfrm>
+            <a:off x="12134088" y="2359152"/>
+            <a:ext cx="4892040" cy="466344"/>
+          </a:xfrm>
+          <a:prstGeom prst="rect">
+            <a:avLst/>
+          </a:prstGeom>
+          <a:noFill/>
+        </p:spPr>
+        <p:txBody>
+          <a:bodyPr wrap="square">
+            <a:spAutoFit/>
+          </a:bodyPr>
+          <a:lstStyle/>
+          <a:p>
+            <a:pPr algn="l"/>
+            <a:r>
+              <a:rPr sz="1500" b="1" i="0">
+                <a:solidFill>
+                  <a:srgbClr val="4C1D95"/>
+                </a:solidFill>
+              </a:rPr>
+              <a:t>👤  No Auth / Multi-User</a:t>
+            </a:r>
+          </a:p>
+        </p:txBody>
+      </p:sp>
+      <p:sp>
+        <p:nvSpPr>
+          <p:cNvPr id="16" name="TextBox 15"/>
+          <p:cNvSpPr txBox="1"/>
+          <p:nvPr/>
+        </p:nvSpPr>
+        <p:spPr>
+          <a:xfrm>
+            <a:off x="12134088" y="2962656"/>
+            <a:ext cx="4892040" cy="2414016"/>
+          </a:xfrm>
+          <a:prstGeom prst="rect">
+            <a:avLst/>
+          </a:prstGeom>
+          <a:noFill/>
+        </p:spPr>
+        <p:txBody>
+          <a:bodyPr wrap="square">
+            <a:spAutoFit/>
+          </a:bodyPr>
+          <a:lstStyle/>
+          <a:p>
+            <a:pPr algn="l"/>
+            <a:r>
+              <a:rPr sz="1250" b="0" i="0">
+                <a:solidFill>
+                  <a:srgbClr val="7C3AED"/>
+                </a:solidFill>
+              </a:rPr>
+              <a:t>Single shared server state. No session isolation — concurrent users share the same document with no login or permission model.</a:t>
+            </a:r>
+          </a:p>
+        </p:txBody>
+      </p:sp>
+      <p:sp>
+        <p:nvSpPr>
+          <p:cNvPr id="17" name="Rectangle 16"/>
+          <p:cNvSpPr/>
+          <p:nvPr/>
+        </p:nvSpPr>
+        <p:spPr>
+          <a:xfrm>
+            <a:off x="402336" y="5806440"/>
+            <a:ext cx="5303520" cy="3447288"/>
+          </a:xfrm>
+          <a:prstGeom prst="rect">
+            <a:avLst/>
+          </a:prstGeom>
+          <a:solidFill>
+            <a:srgbClr val="FFFFFF"/>
+          </a:solidFill>
+          <a:ln w="6350">
+            <a:solidFill>
+              <a:srgbClr val="E2E8F0"/>
+            </a:solidFill>
+          </a:ln>
+        </p:spPr>
+        <p:style>
+          <a:lnRef idx="1">
+            <a:schemeClr val="accent1"/>
+          </a:lnRef>
+          <a:fillRef idx="3">
+            <a:schemeClr val="accent1"/>
+          </a:fillRef>
+          <a:effectRef idx="2">
+            <a:schemeClr val="accent1"/>
+          </a:effectRef>
+          <a:fontRef idx="minor">
+            <a:schemeClr val="lt1"/>
+          </a:fontRef>
+        </p:style>
+        <p:txBody>
+          <a:bodyPr rtlCol="0" anchor="ctr"/>
+          <a:lstStyle/>
+          <a:p>
+            <a:pPr algn="ctr"/>
+          </a:p>
+        </p:txBody>
+      </p:sp>
+      <p:sp>
+        <p:nvSpPr>
+          <p:cNvPr id="18" name="Rectangle 17"/>
+          <p:cNvSpPr/>
+          <p:nvPr/>
+        </p:nvSpPr>
+        <p:spPr>
+          <a:xfrm>
+            <a:off x="402336" y="5806440"/>
+            <a:ext cx="5303520" cy="64008"/>
+          </a:xfrm>
+          <a:prstGeom prst="rect">
+            <a:avLst/>
+          </a:prstGeom>
+          <a:solidFill>
+            <a:srgbClr val="F59E0B"/>
+          </a:solidFill>
+          <a:ln>
+            <a:noFill/>
+          </a:ln>
+        </p:spPr>
+        <p:style>
+          <a:lnRef idx="1">
+            <a:schemeClr val="accent1"/>
+          </a:lnRef>
+          <a:fillRef idx="3">
+            <a:schemeClr val="accent1"/>
+          </a:fillRef>
+          <a:effectRef idx="2">
+            <a:schemeClr val="accent1"/>
+          </a:effectRef>
+          <a:fontRef idx="minor">
+            <a:schemeClr val="lt1"/>
+          </a:fontRef>
+        </p:style>
+        <p:txBody>
+          <a:bodyPr rtlCol="0" anchor="ctr"/>
+          <a:lstStyle/>
+          <a:p>
+            <a:pPr algn="ctr"/>
+          </a:p>
+        </p:txBody>
+      </p:sp>
+      <p:sp>
+        <p:nvSpPr>
+          <p:cNvPr id="19" name="TextBox 18"/>
+          <p:cNvSpPr txBox="1"/>
+          <p:nvPr/>
+        </p:nvSpPr>
+        <p:spPr>
+          <a:xfrm>
+            <a:off x="704088" y="5980176"/>
+            <a:ext cx="4892040" cy="466344"/>
+          </a:xfrm>
+          <a:prstGeom prst="rect">
+            <a:avLst/>
+          </a:prstGeom>
+          <a:noFill/>
+        </p:spPr>
+        <p:txBody>
+          <a:bodyPr wrap="square">
+            <a:spAutoFit/>
+          </a:bodyPr>
+          <a:lstStyle/>
+          <a:p>
+            <a:pPr algn="l"/>
+            <a:r>
+              <a:rPr sz="1500" b="1" i="0">
+                <a:solidFill>
+                  <a:srgbClr val="4C1D95"/>
+                </a:solidFill>
+              </a:rPr>
+              <a:t>💬  No Persistent Chat History</a:t>
+            </a:r>
+          </a:p>
+        </p:txBody>
+      </p:sp>
+      <p:sp>
+        <p:nvSpPr>
+          <p:cNvPr id="20" name="TextBox 19"/>
+          <p:cNvSpPr txBox="1"/>
+          <p:nvPr/>
+        </p:nvSpPr>
+        <p:spPr>
+          <a:xfrm>
+            <a:off x="704088" y="6583679"/>
+            <a:ext cx="4892040" cy="2414016"/>
+          </a:xfrm>
+          <a:prstGeom prst="rect">
+            <a:avLst/>
+          </a:prstGeom>
+          <a:noFill/>
+        </p:spPr>
+        <p:txBody>
+          <a:bodyPr wrap="square">
+            <a:spAutoFit/>
+          </a:bodyPr>
+          <a:lstStyle/>
+          <a:p>
+            <a:pPr algn="l"/>
+            <a:r>
+              <a:rPr sz="1250" b="0" i="0">
+                <a:solidFill>
+                  <a:srgbClr val="7C3AED"/>
+                </a:solidFill>
+              </a:rPr>
+              <a:t>Conversation context resets on page reload. Follow-up questions cannot reference answers from a previous browsing session.</a:t>
+            </a:r>
+          </a:p>
+        </p:txBody>
+      </p:sp>
+      <p:sp>
+        <p:nvSpPr>
+          <p:cNvPr id="21" name="Rectangle 20"/>
+          <p:cNvSpPr/>
+          <p:nvPr/>
+        </p:nvSpPr>
+        <p:spPr>
+          <a:xfrm>
+            <a:off x="6117336" y="5806440"/>
+            <a:ext cx="5303520" cy="3447288"/>
+          </a:xfrm>
+          <a:prstGeom prst="rect">
+            <a:avLst/>
+          </a:prstGeom>
+          <a:solidFill>
+            <a:srgbClr val="FFFFFF"/>
+          </a:solidFill>
+          <a:ln w="6350">
+            <a:solidFill>
+              <a:srgbClr val="E2E8F0"/>
+            </a:solidFill>
+          </a:ln>
+        </p:spPr>
+        <p:style>
+          <a:lnRef idx="1">
+            <a:schemeClr val="accent1"/>
+          </a:lnRef>
+          <a:fillRef idx="3">
+            <a:schemeClr val="accent1"/>
+          </a:fillRef>
+          <a:effectRef idx="2">
+            <a:schemeClr val="accent1"/>
+          </a:effectRef>
+          <a:fontRef idx="minor">
+            <a:schemeClr val="lt1"/>
+          </a:fontRef>
+        </p:style>
+        <p:txBody>
+          <a:bodyPr rtlCol="0" anchor="ctr"/>
+          <a:lstStyle/>
+          <a:p>
+            <a:pPr algn="ctr"/>
+          </a:p>
+        </p:txBody>
+      </p:sp>
+      <p:sp>
+        <p:nvSpPr>
+          <p:cNvPr id="22" name="Rectangle 21"/>
+          <p:cNvSpPr/>
+          <p:nvPr/>
+        </p:nvSpPr>
+        <p:spPr>
+          <a:xfrm>
+            <a:off x="6117336" y="5806440"/>
+            <a:ext cx="5303520" cy="64008"/>
+          </a:xfrm>
+          <a:prstGeom prst="rect">
+            <a:avLst/>
+          </a:prstGeom>
+          <a:solidFill>
+            <a:srgbClr val="F59E0B"/>
+          </a:solidFill>
+          <a:ln>
+            <a:noFill/>
+          </a:ln>
+        </p:spPr>
+        <p:style>
+          <a:lnRef idx="1">
+            <a:schemeClr val="accent1"/>
+          </a:lnRef>
+          <a:fillRef idx="3">
+            <a:schemeClr val="accent1"/>
+          </a:fillRef>
+          <a:effectRef idx="2">
+            <a:schemeClr val="accent1"/>
+          </a:effectRef>
+          <a:fontRef idx="minor">
+            <a:schemeClr val="lt1"/>
+          </a:fontRef>
+        </p:style>
+        <p:txBody>
+          <a:bodyPr rtlCol="0" anchor="ctr"/>
+          <a:lstStyle/>
+          <a:p>
+            <a:pPr algn="ctr"/>
+          </a:p>
+        </p:txBody>
+      </p:sp>
+      <p:sp>
+        <p:nvSpPr>
+          <p:cNvPr id="23" name="TextBox 22"/>
+          <p:cNvSpPr txBox="1"/>
+          <p:nvPr/>
+        </p:nvSpPr>
+        <p:spPr>
+          <a:xfrm>
+            <a:off x="6419088" y="5980176"/>
+            <a:ext cx="4892040" cy="466344"/>
+          </a:xfrm>
+          <a:prstGeom prst="rect">
+            <a:avLst/>
+          </a:prstGeom>
+          <a:noFill/>
+        </p:spPr>
+        <p:txBody>
+          <a:bodyPr wrap="square">
+            <a:spAutoFit/>
+          </a:bodyPr>
+          <a:lstStyle/>
+          <a:p>
+            <a:pPr algn="l"/>
+            <a:r>
+              <a:rPr sz="1500" b="1" i="0">
+                <a:solidFill>
+                  <a:srgbClr val="4C1D95"/>
+                </a:solidFill>
+              </a:rPr>
+              <a:t>⚡  Gemini API Rate Limits</a:t>
+            </a:r>
+          </a:p>
+        </p:txBody>
+      </p:sp>
+      <p:sp>
+        <p:nvSpPr>
+          <p:cNvPr id="24" name="TextBox 23"/>
+          <p:cNvSpPr txBox="1"/>
+          <p:nvPr/>
+        </p:nvSpPr>
+        <p:spPr>
+          <a:xfrm>
+            <a:off x="6419088" y="6583679"/>
+            <a:ext cx="4892040" cy="2414016"/>
+          </a:xfrm>
+          <a:prstGeom prst="rect">
+            <a:avLst/>
+          </a:prstGeom>
+          <a:noFill/>
+        </p:spPr>
+        <p:txBody>
+          <a:bodyPr wrap="square">
+            <a:spAutoFit/>
+          </a:bodyPr>
+          <a:lstStyle/>
+          <a:p>
+            <a:pPr algn="l"/>
+            <a:r>
+              <a:rPr sz="1250" b="0" i="0">
+                <a:solidFill>
+                  <a:srgbClr val="7C3AED"/>
+                </a:solidFill>
+              </a:rPr>
+              <a:t>Concurrent embedding calls hit 429 limits on large documents. Exponential backoff adds latency for 100+ page PDFs.</a:t>
+            </a:r>
+          </a:p>
+        </p:txBody>
+      </p:sp>
+      <p:sp>
+        <p:nvSpPr>
+          <p:cNvPr id="25" name="Rectangle 24"/>
+          <p:cNvSpPr/>
+          <p:nvPr/>
+        </p:nvSpPr>
+        <p:spPr>
+          <a:xfrm>
+            <a:off x="11832336" y="5806440"/>
+            <a:ext cx="5303520" cy="3447288"/>
+          </a:xfrm>
+          <a:prstGeom prst="rect">
+            <a:avLst/>
+          </a:prstGeom>
+          <a:solidFill>
+            <a:srgbClr val="FFFFFF"/>
+          </a:solidFill>
+          <a:ln w="6350">
+            <a:solidFill>
+              <a:srgbClr val="E2E8F0"/>
+            </a:solidFill>
+          </a:ln>
+        </p:spPr>
+        <p:style>
+          <a:lnRef idx="1">
+            <a:schemeClr val="accent1"/>
+          </a:lnRef>
+          <a:fillRef idx="3">
+            <a:schemeClr val="accent1"/>
+          </a:fillRef>
+          <a:effectRef idx="2">
+            <a:schemeClr val="accent1"/>
+          </a:effectRef>
+          <a:fontRef idx="minor">
+            <a:schemeClr val="lt1"/>
+          </a:fontRef>
+        </p:style>
+        <p:txBody>
+          <a:bodyPr rtlCol="0" anchor="ctr"/>
+          <a:lstStyle/>
+          <a:p>
+            <a:pPr algn="ctr"/>
+          </a:p>
+        </p:txBody>
+      </p:sp>
+      <p:sp>
+        <p:nvSpPr>
+          <p:cNvPr id="26" name="Rectangle 25"/>
+          <p:cNvSpPr/>
+          <p:nvPr/>
+        </p:nvSpPr>
+        <p:spPr>
+          <a:xfrm>
+            <a:off x="11832336" y="5806440"/>
+            <a:ext cx="5303520" cy="64008"/>
+          </a:xfrm>
+          <a:prstGeom prst="rect">
+            <a:avLst/>
+          </a:prstGeom>
+          <a:solidFill>
+            <a:srgbClr val="F59E0B"/>
+          </a:solidFill>
+          <a:ln>
+            <a:noFill/>
+          </a:ln>
+        </p:spPr>
+        <p:style>
+          <a:lnRef idx="1">
+            <a:schemeClr val="accent1"/>
+          </a:lnRef>
+          <a:fillRef idx="3">
+            <a:schemeClr val="accent1"/>
+          </a:fillRef>
+          <a:effectRef idx="2">
+            <a:schemeClr val="accent1"/>
+          </a:effectRef>
+          <a:fontRef idx="minor">
+            <a:schemeClr val="lt1"/>
+          </a:fontRef>
+        </p:style>
+        <p:txBody>
+          <a:bodyPr rtlCol="0" anchor="ctr"/>
+          <a:lstStyle/>
+          <a:p>
+            <a:pPr algn="ctr"/>
+          </a:p>
+        </p:txBody>
+      </p:sp>
+      <p:sp>
+        <p:nvSpPr>
+          <p:cNvPr id="27" name="TextBox 26"/>
+          <p:cNvSpPr txBox="1"/>
+          <p:nvPr/>
+        </p:nvSpPr>
+        <p:spPr>
+          <a:xfrm>
+            <a:off x="12134088" y="5980176"/>
+            <a:ext cx="4892040" cy="466344"/>
+          </a:xfrm>
+          <a:prstGeom prst="rect">
+            <a:avLst/>
+          </a:prstGeom>
+          <a:noFill/>
+        </p:spPr>
+        <p:txBody>
+          <a:bodyPr wrap="square">
+            <a:spAutoFit/>
+          </a:bodyPr>
+          <a:lstStyle/>
+          <a:p>
+            <a:pPr algn="l"/>
+            <a:r>
+              <a:rPr sz="1500" b="1" i="0">
+                <a:solidFill>
+                  <a:srgbClr val="4C1D95"/>
+                </a:solidFill>
+              </a:rPr>
+              <a:t>🔤  PyMuPDF ≠ PDF.js Extraction</a:t>
+            </a:r>
+          </a:p>
+        </p:txBody>
+      </p:sp>
+      <p:sp>
+        <p:nvSpPr>
+          <p:cNvPr id="28" name="TextBox 27"/>
+          <p:cNvSpPr txBox="1"/>
+          <p:nvPr/>
+        </p:nvSpPr>
+        <p:spPr>
+          <a:xfrm>
+            <a:off x="12134088" y="6583679"/>
+            <a:ext cx="4892040" cy="2414016"/>
+          </a:xfrm>
+          <a:prstGeom prst="rect">
+            <a:avLst/>
+          </a:prstGeom>
+          <a:noFill/>
+        </p:spPr>
+        <p:txBody>
+          <a:bodyPr wrap="square">
+            <a:spAutoFit/>
+          </a:bodyPr>
+          <a:lstStyle/>
+          <a:p>
+            <a:pPr algn="l"/>
+            <a:r>
+              <a:rPr sz="1250" b="0" i="0">
+                <a:solidFill>
+                  <a:srgbClr val="7C3AED"/>
+                </a:solidFill>
+              </a:rPr>
+              <a:t>Math and symbols render differently at ingest (PyMuPDF) and in the viewer (PDF.js), requiring fuzzy word-anchor matching for highlighting.</a:t>
+            </a:r>
+          </a:p>
+        </p:txBody>
+      </p:sp>
+    </p:spTree>
+  </p:cSld>
+  <p:clrMapOvr>
+    <a:masterClrMapping/>
+  </p:clrMapOvr>
+</p:sld>
+</file>
+
+<file path=ppt/slides/slide14.xml><?xml version="1.0" encoding="utf-8"?>
+<p:sld xmlns:a="http://schemas.openxmlformats.org/drawingml/2006/main" xmlns:p="http://schemas.openxmlformats.org/presentationml/2006/main" xmlns:r="http://schemas.openxmlformats.org/officeDocument/2006/relationships">
+  <p:cSld>
+    <p:bg>
+      <p:bgPr>
+        <a:solidFill>
+          <a:srgbClr val="FFFFFF"/>
+        </a:solidFill>
+        <a:effectLst/>
+      </p:bgPr>
+    </p:bg>
+    <p:spTree>
+      <p:nvGrpSpPr>
+        <p:cNvPr id="1" name=""/>
+        <p:cNvGrpSpPr/>
+        <p:nvPr/>
+      </p:nvGrpSpPr>
+      <p:grpSpPr/>
+      <p:sp>
+        <p:nvSpPr>
+          <p:cNvPr id="2" name="TextBox 1"/>
+          <p:cNvSpPr txBox="1"/>
+          <p:nvPr/>
+        </p:nvSpPr>
+        <p:spPr>
+          <a:xfrm>
+            <a:off x="914400" y="484632"/>
+            <a:ext cx="16285463" cy="429768"/>
+          </a:xfrm>
+          <a:prstGeom prst="rect">
+            <a:avLst/>
+          </a:prstGeom>
+          <a:noFill/>
+        </p:spPr>
+        <p:txBody>
+          <a:bodyPr wrap="square">
+            <a:spAutoFit/>
+          </a:bodyPr>
+          <a:lstStyle/>
+          <a:p>
+            <a:pPr algn="l"/>
+            <a:r>
+              <a:rPr sz="1400" b="1" i="0">
+                <a:solidFill>
+                  <a:srgbClr val="7C3AED"/>
+                </a:solidFill>
+              </a:rPr>
+              <a:t>SYSTEM DESIGN</a:t>
+            </a:r>
+          </a:p>
+        </p:txBody>
+      </p:sp>
+      <p:sp>
+        <p:nvSpPr>
+          <p:cNvPr id="3" name="TextBox 2"/>
+          <p:cNvSpPr txBox="1"/>
+          <p:nvPr/>
+        </p:nvSpPr>
+        <p:spPr>
+          <a:xfrm>
+            <a:off x="914400" y="987552"/>
+            <a:ext cx="16285463" cy="502920"/>
+          </a:xfrm>
+          <a:prstGeom prst="rect">
+            <a:avLst/>
+          </a:prstGeom>
+          <a:noFill/>
+        </p:spPr>
+        <p:txBody>
+          <a:bodyPr wrap="square">
+            <a:spAutoFit/>
+          </a:bodyPr>
+          <a:lstStyle/>
+          <a:p>
+            <a:pPr algn="l"/>
+            <a:r>
+              <a:rPr sz="2800" b="1" i="0">
+                <a:solidFill>
+                  <a:srgbClr val="4C1D95"/>
+                </a:solidFill>
+              </a:rPr>
+              <a:t>Component architecture &amp; data flow</a:t>
+            </a:r>
+          </a:p>
+        </p:txBody>
+      </p:sp>
+      <p:sp>
+        <p:nvSpPr>
+          <p:cNvPr id="4" name="Rectangle 3"/>
+          <p:cNvSpPr/>
+          <p:nvPr/>
+        </p:nvSpPr>
+        <p:spPr>
+          <a:xfrm>
+            <a:off x="822960" y="1856231"/>
+            <a:ext cx="16651224" cy="54864"/>
+          </a:xfrm>
+          <a:prstGeom prst="rect">
+            <a:avLst/>
+          </a:prstGeom>
+          <a:solidFill>
+            <a:srgbClr val="7C3AED"/>
+          </a:solidFill>
+          <a:ln>
+            <a:noFill/>
+          </a:ln>
+        </p:spPr>
+        <p:style>
+          <a:lnRef idx="1">
+            <a:schemeClr val="accent1"/>
+          </a:lnRef>
+          <a:fillRef idx="3">
+            <a:schemeClr val="accent1"/>
+          </a:fillRef>
+          <a:effectRef idx="2">
+            <a:schemeClr val="accent1"/>
+          </a:effectRef>
+          <a:fontRef idx="minor">
+            <a:schemeClr val="lt1"/>
+          </a:fontRef>
+        </p:style>
+        <p:txBody>
+          <a:bodyPr rtlCol="0" anchor="ctr"/>
+          <a:lstStyle/>
+          <a:p>
+            <a:pPr algn="ctr"/>
+          </a:p>
+        </p:txBody>
+      </p:sp>
+      <p:sp>
+        <p:nvSpPr>
+          <p:cNvPr id="5" name="Rectangle 4"/>
+          <p:cNvSpPr/>
+          <p:nvPr/>
+        </p:nvSpPr>
+        <p:spPr>
+          <a:xfrm>
+            <a:off x="320040" y="3291840"/>
+            <a:ext cx="3474720" cy="3474720"/>
+          </a:xfrm>
+          <a:prstGeom prst="rect">
+            <a:avLst/>
+          </a:prstGeom>
+          <a:solidFill>
+            <a:srgbClr val="FFFFFF"/>
+          </a:solidFill>
+          <a:ln w="19050">
+            <a:solidFill>
+              <a:srgbClr val="7C3AED"/>
+            </a:solidFill>
+          </a:ln>
+        </p:spPr>
+        <p:style>
+          <a:lnRef idx="1">
+            <a:schemeClr val="accent1"/>
+          </a:lnRef>
+          <a:fillRef idx="3">
+            <a:schemeClr val="accent1"/>
+          </a:fillRef>
+          <a:effectRef idx="2">
+            <a:schemeClr val="accent1"/>
+          </a:effectRef>
+          <a:fontRef idx="minor">
+            <a:schemeClr val="lt1"/>
+          </a:fontRef>
+        </p:style>
+        <p:txBody>
+          <a:bodyPr rtlCol="0" anchor="ctr"/>
+          <a:lstStyle/>
+          <a:p>
+            <a:pPr algn="ctr"/>
+          </a:p>
+        </p:txBody>
+      </p:sp>
+      <p:sp>
+        <p:nvSpPr>
+          <p:cNvPr id="6" name="Rectangle 5"/>
+          <p:cNvSpPr/>
+          <p:nvPr/>
+        </p:nvSpPr>
+        <p:spPr>
+          <a:xfrm>
+            <a:off x="320040" y="3291840"/>
+            <a:ext cx="3474720" cy="54864"/>
+          </a:xfrm>
+          <a:prstGeom prst="rect">
+            <a:avLst/>
+          </a:prstGeom>
+          <a:solidFill>
+            <a:srgbClr val="7C3AED"/>
+          </a:solidFill>
+          <a:ln>
+            <a:noFill/>
+          </a:ln>
+        </p:spPr>
+        <p:style>
+          <a:lnRef idx="1">
+            <a:schemeClr val="accent1"/>
+          </a:lnRef>
+          <a:fillRef idx="3">
+            <a:schemeClr val="accent1"/>
+          </a:fillRef>
+          <a:effectRef idx="2">
+            <a:schemeClr val="accent1"/>
+          </a:effectRef>
+          <a:fontRef idx="minor">
+            <a:schemeClr val="lt1"/>
+          </a:fontRef>
+        </p:style>
+        <p:txBody>
+          <a:bodyPr rtlCol="0" anchor="ctr"/>
+          <a:lstStyle/>
+          <a:p>
+            <a:pPr algn="ctr"/>
+          </a:p>
+        </p:txBody>
+      </p:sp>
+      <p:sp>
+        <p:nvSpPr>
+          <p:cNvPr id="7" name="TextBox 6"/>
+          <p:cNvSpPr txBox="1"/>
+          <p:nvPr/>
+        </p:nvSpPr>
+        <p:spPr>
+          <a:xfrm>
+            <a:off x="548640" y="3456432"/>
+            <a:ext cx="3108960" cy="502920"/>
+          </a:xfrm>
+          <a:prstGeom prst="rect">
+            <a:avLst/>
+          </a:prstGeom>
+          <a:noFill/>
+        </p:spPr>
+        <p:txBody>
+          <a:bodyPr wrap="square">
+            <a:spAutoFit/>
+          </a:bodyPr>
+          <a:lstStyle/>
+          <a:p>
+            <a:pPr algn="l"/>
+            <a:r>
+              <a:rPr sz="2200" b="0" i="0">
+                <a:solidFill>
+                  <a:srgbClr val="4C1D95"/>
+                </a:solidFill>
+              </a:rPr>
+              <a:t>🌐</a:t>
+            </a:r>
+          </a:p>
+        </p:txBody>
+      </p:sp>
+      <p:sp>
+        <p:nvSpPr>
+          <p:cNvPr id="8" name="TextBox 7"/>
+          <p:cNvSpPr txBox="1"/>
+          <p:nvPr/>
+        </p:nvSpPr>
+        <p:spPr>
+          <a:xfrm>
+            <a:off x="548640" y="3977639"/>
+            <a:ext cx="3108960" cy="457200"/>
+          </a:xfrm>
+          <a:prstGeom prst="rect">
+            <a:avLst/>
+          </a:prstGeom>
+          <a:noFill/>
+        </p:spPr>
+        <p:txBody>
+          <a:bodyPr wrap="square">
+            <a:spAutoFit/>
+          </a:bodyPr>
+          <a:lstStyle/>
+          <a:p>
+            <a:pPr algn="l"/>
+            <a:r>
+              <a:rPr sz="1600" b="1" i="0">
+                <a:solidFill>
+                  <a:srgbClr val="4C1D95"/>
+                </a:solidFill>
+              </a:rPr>
+              <a:t>Browser</a:t>
+            </a:r>
+          </a:p>
+        </p:txBody>
+      </p:sp>
+      <p:sp>
+        <p:nvSpPr>
+          <p:cNvPr id="9" name="TextBox 8"/>
+          <p:cNvSpPr txBox="1"/>
+          <p:nvPr/>
+        </p:nvSpPr>
+        <p:spPr>
+          <a:xfrm>
+            <a:off x="548640" y="4480560"/>
+            <a:ext cx="3108960" cy="2103120"/>
+          </a:xfrm>
+          <a:prstGeom prst="rect">
+            <a:avLst/>
+          </a:prstGeom>
+          <a:noFill/>
+        </p:spPr>
+        <p:txBody>
+          <a:bodyPr wrap="square">
+            <a:spAutoFit/>
+          </a:bodyPr>
+          <a:lstStyle/>
+          <a:p>
+            <a:pPr algn="l"/>
+            <a:r>
+              <a:rPr sz="1150" b="0" i="0">
+                <a:solidFill>
+                  <a:srgbClr val="7C3AED"/>
+                </a:solidFill>
+              </a:rPr>
+              <a:t>index.html
+PDF.js viewer
+SSE streaming
+citation pills</a:t>
+            </a:r>
+          </a:p>
+        </p:txBody>
+      </p:sp>
+      <p:sp>
+        <p:nvSpPr>
+          <p:cNvPr id="10" name="Rectangle 9"/>
+          <p:cNvSpPr/>
+          <p:nvPr/>
+        </p:nvSpPr>
+        <p:spPr>
+          <a:xfrm>
+            <a:off x="7406640" y="2194560"/>
+            <a:ext cx="3474720" cy="5120640"/>
+          </a:xfrm>
+          <a:prstGeom prst="rect">
+            <a:avLst/>
+          </a:prstGeom>
+          <a:solidFill>
+            <a:srgbClr val="FFFFFF"/>
+          </a:solidFill>
+          <a:ln w="19050">
+            <a:solidFill>
+              <a:srgbClr val="059669"/>
+            </a:solidFill>
+          </a:ln>
+        </p:spPr>
+        <p:style>
+          <a:lnRef idx="1">
+            <a:schemeClr val="accent1"/>
+          </a:lnRef>
+          <a:fillRef idx="3">
+            <a:schemeClr val="accent1"/>
+          </a:fillRef>
+          <a:effectRef idx="2">
+            <a:schemeClr val="accent1"/>
+          </a:effectRef>
+          <a:fontRef idx="minor">
+            <a:schemeClr val="lt1"/>
+          </a:fontRef>
+        </p:style>
+        <p:txBody>
+          <a:bodyPr rtlCol="0" anchor="ctr"/>
+          <a:lstStyle/>
+          <a:p>
+            <a:pPr algn="ctr"/>
+          </a:p>
+        </p:txBody>
+      </p:sp>
+      <p:sp>
+        <p:nvSpPr>
+          <p:cNvPr id="11" name="Rectangle 10"/>
+          <p:cNvSpPr/>
+          <p:nvPr/>
+        </p:nvSpPr>
+        <p:spPr>
+          <a:xfrm>
+            <a:off x="7406640" y="2194560"/>
+            <a:ext cx="3474720" cy="54864"/>
+          </a:xfrm>
+          <a:prstGeom prst="rect">
+            <a:avLst/>
+          </a:prstGeom>
+          <a:solidFill>
+            <a:srgbClr val="059669"/>
+          </a:solidFill>
+          <a:ln>
+            <a:noFill/>
+          </a:ln>
+        </p:spPr>
+        <p:style>
+          <a:lnRef idx="1">
+            <a:schemeClr val="accent1"/>
+          </a:lnRef>
+          <a:fillRef idx="3">
+            <a:schemeClr val="accent1"/>
+          </a:fillRef>
+          <a:effectRef idx="2">
+            <a:schemeClr val="accent1"/>
+          </a:effectRef>
+          <a:fontRef idx="minor">
+            <a:schemeClr val="lt1"/>
+          </a:fontRef>
+        </p:style>
+        <p:txBody>
+          <a:bodyPr rtlCol="0" anchor="ctr"/>
+          <a:lstStyle/>
+          <a:p>
+            <a:pPr algn="ctr"/>
+          </a:p>
+        </p:txBody>
+      </p:sp>
+      <p:sp>
+        <p:nvSpPr>
+          <p:cNvPr id="12" name="TextBox 11"/>
+          <p:cNvSpPr txBox="1"/>
+          <p:nvPr/>
+        </p:nvSpPr>
+        <p:spPr>
+          <a:xfrm>
+            <a:off x="7635240" y="2359152"/>
+            <a:ext cx="3108960" cy="502920"/>
+          </a:xfrm>
+          <a:prstGeom prst="rect">
+            <a:avLst/>
+          </a:prstGeom>
+          <a:noFill/>
+        </p:spPr>
+        <p:txBody>
+          <a:bodyPr wrap="square">
+            <a:spAutoFit/>
+          </a:bodyPr>
+          <a:lstStyle/>
+          <a:p>
+            <a:pPr algn="l"/>
+            <a:r>
+              <a:rPr sz="2200" b="0" i="0">
+                <a:solidFill>
+                  <a:srgbClr val="4C1D95"/>
+                </a:solidFill>
+              </a:rPr>
+              <a:t>⚙️</a:t>
+            </a:r>
+          </a:p>
+        </p:txBody>
+      </p:sp>
+      <p:sp>
+        <p:nvSpPr>
+          <p:cNvPr id="13" name="TextBox 12"/>
+          <p:cNvSpPr txBox="1"/>
+          <p:nvPr/>
+        </p:nvSpPr>
+        <p:spPr>
+          <a:xfrm>
+            <a:off x="7635240" y="2880360"/>
+            <a:ext cx="3108960" cy="457200"/>
+          </a:xfrm>
+          <a:prstGeom prst="rect">
+            <a:avLst/>
+          </a:prstGeom>
+          <a:noFill/>
+        </p:spPr>
+        <p:txBody>
+          <a:bodyPr wrap="square">
+            <a:spAutoFit/>
+          </a:bodyPr>
+          <a:lstStyle/>
+          <a:p>
+            <a:pPr algn="l"/>
+            <a:r>
+              <a:rPr sz="1600" b="1" i="0">
+                <a:solidFill>
+                  <a:srgbClr val="4C1D95"/>
+                </a:solidFill>
+              </a:rPr>
+              <a:t>FastAPI</a:t>
+            </a:r>
+          </a:p>
+        </p:txBody>
+      </p:sp>
+      <p:sp>
+        <p:nvSpPr>
+          <p:cNvPr id="14" name="TextBox 13"/>
+          <p:cNvSpPr txBox="1"/>
+          <p:nvPr/>
+        </p:nvSpPr>
+        <p:spPr>
+          <a:xfrm>
+            <a:off x="7635240" y="3383280"/>
+            <a:ext cx="3108960" cy="3749039"/>
+          </a:xfrm>
+          <a:prstGeom prst="rect">
+            <a:avLst/>
+          </a:prstGeom>
+          <a:noFill/>
+        </p:spPr>
+        <p:txBody>
+          <a:bodyPr wrap="square">
+            <a:spAutoFit/>
+          </a:bodyPr>
+          <a:lstStyle/>
+          <a:p>
+            <a:pPr algn="l"/>
+            <a:r>
+              <a:rPr sz="1150" b="0" i="0">
+                <a:solidFill>
+                  <a:srgbClr val="7C3AED"/>
+                </a:solidFill>
+              </a:rPr>
+              <a:t>POST /ingest
+POST /query
+DELETE /doc
+GET /doc/info
+GET /health
+asyncpg · uvicorn</a:t>
+            </a:r>
+          </a:p>
+        </p:txBody>
+      </p:sp>
+      <p:sp>
+        <p:nvSpPr>
+          <p:cNvPr id="15" name="Rectangle 14"/>
+          <p:cNvSpPr/>
+          <p:nvPr/>
+        </p:nvSpPr>
+        <p:spPr>
+          <a:xfrm>
+            <a:off x="14493240" y="3291840"/>
+            <a:ext cx="3474720" cy="3474720"/>
+          </a:xfrm>
+          <a:prstGeom prst="rect">
+            <a:avLst/>
+          </a:prstGeom>
+          <a:solidFill>
+            <a:srgbClr val="FFFFFF"/>
+          </a:solidFill>
+          <a:ln w="19050">
+            <a:solidFill>
+              <a:srgbClr val="4285F4"/>
+            </a:solidFill>
+          </a:ln>
+        </p:spPr>
+        <p:style>
+          <a:lnRef idx="1">
+            <a:schemeClr val="accent1"/>
+          </a:lnRef>
+          <a:fillRef idx="3">
+            <a:schemeClr val="accent1"/>
+          </a:fillRef>
+          <a:effectRef idx="2">
+            <a:schemeClr val="accent1"/>
+          </a:effectRef>
+          <a:fontRef idx="minor">
+            <a:schemeClr val="lt1"/>
+          </a:fontRef>
+        </p:style>
+        <p:txBody>
+          <a:bodyPr rtlCol="0" anchor="ctr"/>
+          <a:lstStyle/>
+          <a:p>
+            <a:pPr algn="ctr"/>
+          </a:p>
+        </p:txBody>
+      </p:sp>
+      <p:sp>
+        <p:nvSpPr>
+          <p:cNvPr id="16" name="Rectangle 15"/>
+          <p:cNvSpPr/>
+          <p:nvPr/>
+        </p:nvSpPr>
+        <p:spPr>
+          <a:xfrm>
+            <a:off x="14493240" y="3291840"/>
+            <a:ext cx="3474720" cy="54864"/>
+          </a:xfrm>
+          <a:prstGeom prst="rect">
+            <a:avLst/>
+          </a:prstGeom>
+          <a:solidFill>
+            <a:srgbClr val="4285F4"/>
+          </a:solidFill>
+          <a:ln>
+            <a:noFill/>
+          </a:ln>
+        </p:spPr>
+        <p:style>
+          <a:lnRef idx="1">
+            <a:schemeClr val="accent1"/>
+          </a:lnRef>
+          <a:fillRef idx="3">
+            <a:schemeClr val="accent1"/>
+          </a:fillRef>
+          <a:effectRef idx="2">
+            <a:schemeClr val="accent1"/>
+          </a:effectRef>
+          <a:fontRef idx="minor">
+            <a:schemeClr val="lt1"/>
+          </a:fontRef>
+        </p:style>
+        <p:txBody>
+          <a:bodyPr rtlCol="0" anchor="ctr"/>
+          <a:lstStyle/>
+          <a:p>
+            <a:pPr algn="ctr"/>
+          </a:p>
+        </p:txBody>
+      </p:sp>
+      <p:sp>
+        <p:nvSpPr>
+          <p:cNvPr id="17" name="TextBox 16"/>
+          <p:cNvSpPr txBox="1"/>
+          <p:nvPr/>
+        </p:nvSpPr>
+        <p:spPr>
+          <a:xfrm>
+            <a:off x="14721840" y="3456432"/>
+            <a:ext cx="3108960" cy="502920"/>
+          </a:xfrm>
+          <a:prstGeom prst="rect">
+            <a:avLst/>
+          </a:prstGeom>
+          <a:noFill/>
+        </p:spPr>
+        <p:txBody>
+          <a:bodyPr wrap="square">
+            <a:spAutoFit/>
+          </a:bodyPr>
+          <a:lstStyle/>
+          <a:p>
+            <a:pPr algn="l"/>
+            <a:r>
+              <a:rPr sz="2200" b="0" i="0">
+                <a:solidFill>
+                  <a:srgbClr val="4C1D95"/>
+                </a:solidFill>
+              </a:rPr>
+              <a:t>🧠</a:t>
+            </a:r>
+          </a:p>
+        </p:txBody>
+      </p:sp>
+      <p:sp>
+        <p:nvSpPr>
+          <p:cNvPr id="18" name="TextBox 17"/>
+          <p:cNvSpPr txBox="1"/>
+          <p:nvPr/>
+        </p:nvSpPr>
+        <p:spPr>
+          <a:xfrm>
+            <a:off x="14721840" y="3977639"/>
+            <a:ext cx="3108960" cy="457200"/>
+          </a:xfrm>
+          <a:prstGeom prst="rect">
+            <a:avLst/>
+          </a:prstGeom>
+          <a:noFill/>
+        </p:spPr>
+        <p:txBody>
+          <a:bodyPr wrap="square">
+            <a:spAutoFit/>
+          </a:bodyPr>
+          <a:lstStyle/>
+          <a:p>
+            <a:pPr algn="l"/>
+            <a:r>
+              <a:rPr sz="1600" b="1" i="0">
+                <a:solidFill>
+                  <a:srgbClr val="4C1D95"/>
+                </a:solidFill>
+              </a:rPr>
+              <a:t>Gemini API</a:t>
+            </a:r>
+          </a:p>
+        </p:txBody>
+      </p:sp>
+      <p:sp>
+        <p:nvSpPr>
+          <p:cNvPr id="19" name="TextBox 18"/>
+          <p:cNvSpPr txBox="1"/>
+          <p:nvPr/>
+        </p:nvSpPr>
+        <p:spPr>
+          <a:xfrm>
+            <a:off x="14721840" y="4480560"/>
+            <a:ext cx="3108960" cy="2103120"/>
+          </a:xfrm>
+          <a:prstGeom prst="rect">
+            <a:avLst/>
+          </a:prstGeom>
+          <a:noFill/>
+        </p:spPr>
+        <p:txBody>
+          <a:bodyPr wrap="square">
+            <a:spAutoFit/>
+          </a:bodyPr>
+          <a:lstStyle/>
+          <a:p>
+            <a:pPr algn="l"/>
+            <a:r>
+              <a:rPr sz="1150" b="0" i="0">
+                <a:solidFill>
+                  <a:srgbClr val="7C3AED"/>
+                </a:solidFill>
+              </a:rPr>
+              <a:t>embedding-2 (768-dim)
+RETRIEVAL_DOCUMENT/QUERY
+2.5-flash rerank
+2.5-flash answer (SSE)</a:t>
+            </a:r>
+          </a:p>
+        </p:txBody>
+      </p:sp>
+      <p:sp>
+        <p:nvSpPr>
+          <p:cNvPr id="20" name="Rectangle 19"/>
+          <p:cNvSpPr/>
+          <p:nvPr/>
+        </p:nvSpPr>
+        <p:spPr>
+          <a:xfrm>
+            <a:off x="7406640" y="7863840"/>
+            <a:ext cx="3474720" cy="2103120"/>
+          </a:xfrm>
+          <a:prstGeom prst="rect">
+            <a:avLst/>
+          </a:prstGeom>
+          <a:solidFill>
+            <a:srgbClr val="FFFFFF"/>
+          </a:solidFill>
+          <a:ln w="19050">
+            <a:solidFill>
+              <a:srgbClr val="336791"/>
+            </a:solidFill>
+          </a:ln>
+        </p:spPr>
+        <p:style>
+          <a:lnRef idx="1">
+            <a:schemeClr val="accent1"/>
+          </a:lnRef>
+          <a:fillRef idx="3">
+            <a:schemeClr val="accent1"/>
+          </a:fillRef>
+          <a:effectRef idx="2">
+            <a:schemeClr val="accent1"/>
+          </a:effectRef>
+          <a:fontRef idx="minor">
+            <a:schemeClr val="lt1"/>
+          </a:fontRef>
+        </p:style>
+        <p:txBody>
+          <a:bodyPr rtlCol="0" anchor="ctr"/>
+          <a:lstStyle/>
+          <a:p>
+            <a:pPr algn="ctr"/>
+          </a:p>
+        </p:txBody>
+      </p:sp>
+      <p:sp>
+        <p:nvSpPr>
+          <p:cNvPr id="21" name="Rectangle 20"/>
+          <p:cNvSpPr/>
+          <p:nvPr/>
+        </p:nvSpPr>
+        <p:spPr>
+          <a:xfrm>
+            <a:off x="7406640" y="7863840"/>
+            <a:ext cx="3474720" cy="54864"/>
+          </a:xfrm>
+          <a:prstGeom prst="rect">
+            <a:avLst/>
+          </a:prstGeom>
+          <a:solidFill>
+            <a:srgbClr val="336791"/>
+          </a:solidFill>
+          <a:ln>
+            <a:noFill/>
+          </a:ln>
+        </p:spPr>
+        <p:style>
+          <a:lnRef idx="1">
+            <a:schemeClr val="accent1"/>
+          </a:lnRef>
+          <a:fillRef idx="3">
+            <a:schemeClr val="accent1"/>
+          </a:fillRef>
+          <a:effectRef idx="2">
+            <a:schemeClr val="accent1"/>
+          </a:effectRef>
+          <a:fontRef idx="minor">
+            <a:schemeClr val="lt1"/>
+          </a:fontRef>
+        </p:style>
+        <p:txBody>
+          <a:bodyPr rtlCol="0" anchor="ctr"/>
+          <a:lstStyle/>
+          <a:p>
+            <a:pPr algn="ctr"/>
+          </a:p>
+        </p:txBody>
+      </p:sp>
+      <p:sp>
+        <p:nvSpPr>
+          <p:cNvPr id="22" name="TextBox 21"/>
+          <p:cNvSpPr txBox="1"/>
+          <p:nvPr/>
+        </p:nvSpPr>
+        <p:spPr>
+          <a:xfrm>
+            <a:off x="7635240" y="8028431"/>
+            <a:ext cx="3108960" cy="502920"/>
+          </a:xfrm>
+          <a:prstGeom prst="rect">
+            <a:avLst/>
+          </a:prstGeom>
+          <a:noFill/>
+        </p:spPr>
+        <p:txBody>
+          <a:bodyPr wrap="square">
+            <a:spAutoFit/>
+          </a:bodyPr>
+          <a:lstStyle/>
+          <a:p>
+            <a:pPr algn="l"/>
+            <a:r>
+              <a:rPr sz="2200" b="0" i="0">
+                <a:solidFill>
+                  <a:srgbClr val="4C1D95"/>
+                </a:solidFill>
+              </a:rPr>
+              <a:t>🗄️</a:t>
+            </a:r>
+          </a:p>
+        </p:txBody>
+      </p:sp>
+      <p:sp>
+        <p:nvSpPr>
+          <p:cNvPr id="23" name="TextBox 22"/>
+          <p:cNvSpPr txBox="1"/>
+          <p:nvPr/>
+        </p:nvSpPr>
+        <p:spPr>
+          <a:xfrm>
+            <a:off x="7635240" y="8549640"/>
+            <a:ext cx="3108960" cy="457200"/>
+          </a:xfrm>
+          <a:prstGeom prst="rect">
+            <a:avLst/>
+          </a:prstGeom>
+          <a:noFill/>
+        </p:spPr>
+        <p:txBody>
+          <a:bodyPr wrap="square">
+            <a:spAutoFit/>
+          </a:bodyPr>
+          <a:lstStyle/>
+          <a:p>
+            <a:pPr algn="l"/>
+            <a:r>
+              <a:rPr sz="1600" b="1" i="0">
+                <a:solidFill>
+                  <a:srgbClr val="4C1D95"/>
+                </a:solidFill>
+              </a:rPr>
+              <a:t>PostgreSQL + pgvector</a:t>
+            </a:r>
+          </a:p>
+        </p:txBody>
+      </p:sp>
+      <p:sp>
+        <p:nvSpPr>
+          <p:cNvPr id="24" name="TextBox 23"/>
+          <p:cNvSpPr txBox="1"/>
+          <p:nvPr/>
+        </p:nvSpPr>
+        <p:spPr>
+          <a:xfrm>
+            <a:off x="7635240" y="9052560"/>
+            <a:ext cx="3108960" cy="731519"/>
+          </a:xfrm>
+          <a:prstGeom prst="rect">
+            <a:avLst/>
+          </a:prstGeom>
+          <a:noFill/>
+        </p:spPr>
+        <p:txBody>
+          <a:bodyPr wrap="square">
+            <a:spAutoFit/>
+          </a:bodyPr>
+          <a:lstStyle/>
+          <a:p>
+            <a:pPr algn="l"/>
+            <a:r>
+              <a:rPr sz="1150" b="0" i="0">
+                <a:solidFill>
+                  <a:srgbClr val="7C3AED"/>
+                </a:solidFill>
+              </a:rPr>
+              <a:t>chunks · doc_meta
+HNSW cosine · tsvector BM25
+RRF fusion</a:t>
+            </a:r>
+          </a:p>
+        </p:txBody>
+      </p:sp>
+      <p:cxnSp>
+        <p:nvCxnSpPr>
+          <p:cNvPr id="25" name="Connector 24"/>
+          <p:cNvCxnSpPr/>
+          <p:nvPr/>
+        </p:nvCxnSpPr>
+        <p:spPr>
+          <a:xfrm>
+            <a:off x="3794759" y="4297680"/>
+            <a:ext cx="3611881" cy="0"/>
+          </a:xfrm>
+          <a:prstGeom prst="line">
+            <a:avLst/>
+          </a:prstGeom>
+          <a:ln w="25400">
+            <a:solidFill>
+              <a:srgbClr val="7C3AED"/>
+            </a:solidFill>
+            <a:tailEnd type="arrow" w="med" len="med"/>
+          </a:ln>
+        </p:spPr>
+        <p:style>
+          <a:lnRef idx="2">
+            <a:schemeClr val="accent1"/>
+          </a:lnRef>
+          <a:fillRef idx="0">
+            <a:schemeClr val="accent1"/>
+          </a:fillRef>
+          <a:effectRef idx="1">
+            <a:schemeClr val="accent1"/>
+          </a:effectRef>
+          <a:fontRef idx="minor">
+            <a:schemeClr val="tx1"/>
+          </a:fontRef>
+        </p:style>
+      </p:cxnSp>
+      <p:sp>
+        <p:nvSpPr>
+          <p:cNvPr id="26" name="TextBox 25"/>
+          <p:cNvSpPr txBox="1"/>
+          <p:nvPr/>
+        </p:nvSpPr>
+        <p:spPr>
+          <a:xfrm>
+            <a:off x="3840479" y="3977640"/>
+            <a:ext cx="3520440" cy="292608"/>
+          </a:xfrm>
+          <a:prstGeom prst="rect">
+            <a:avLst/>
+          </a:prstGeom>
+          <a:noFill/>
+        </p:spPr>
+        <p:txBody>
+          <a:bodyPr wrap="square">
+            <a:spAutoFit/>
+          </a:bodyPr>
+          <a:lstStyle/>
+          <a:p>
+            <a:pPr algn="ctr"/>
+            <a:r>
+              <a:rPr sz="1000" b="0" i="1">
+                <a:solidFill>
+                  <a:srgbClr val="64748B"/>
+                </a:solidFill>
+              </a:rPr>
+              <a:t>upload PDF / query</a:t>
+            </a:r>
+          </a:p>
+        </p:txBody>
+      </p:sp>
+      <p:cxnSp>
+        <p:nvCxnSpPr>
+          <p:cNvPr id="27" name="Connector 26"/>
+          <p:cNvCxnSpPr/>
+          <p:nvPr/>
+        </p:nvCxnSpPr>
+        <p:spPr>
+          <a:xfrm flipH="1">
+            <a:off x="3794759" y="5486400"/>
+            <a:ext cx="3611881" cy="0"/>
+          </a:xfrm>
+          <a:prstGeom prst="line">
+            <a:avLst/>
+          </a:prstGeom>
+          <a:ln w="25400">
+            <a:solidFill>
+              <a:srgbClr val="059669"/>
+            </a:solidFill>
+            <a:tailEnd type="arrow" w="med" len="med"/>
+          </a:ln>
+        </p:spPr>
+        <p:style>
+          <a:lnRef idx="2">
+            <a:schemeClr val="accent1"/>
+          </a:lnRef>
+          <a:fillRef idx="0">
+            <a:schemeClr val="accent1"/>
+          </a:fillRef>
+          <a:effectRef idx="1">
+            <a:schemeClr val="accent1"/>
+          </a:effectRef>
+          <a:fontRef idx="minor">
+            <a:schemeClr val="tx1"/>
+          </a:fontRef>
+        </p:style>
+      </p:cxnSp>
+      <p:sp>
+        <p:nvSpPr>
+          <p:cNvPr id="28" name="TextBox 27"/>
+          <p:cNvSpPr txBox="1"/>
+          <p:nvPr/>
+        </p:nvSpPr>
+        <p:spPr>
+          <a:xfrm>
+            <a:off x="3840479" y="5559552"/>
+            <a:ext cx="3520440" cy="292608"/>
+          </a:xfrm>
+          <a:prstGeom prst="rect">
+            <a:avLst/>
+          </a:prstGeom>
+          <a:noFill/>
+        </p:spPr>
+        <p:txBody>
+          <a:bodyPr wrap="square">
+            <a:spAutoFit/>
+          </a:bodyPr>
+          <a:lstStyle/>
+          <a:p>
+            <a:pPr algn="ctr"/>
+            <a:r>
+              <a:rPr sz="1000" b="0" i="1">
+                <a:solidFill>
+                  <a:srgbClr val="64748B"/>
+                </a:solidFill>
+              </a:rPr>
+              <a:t>SSE stream</a:t>
+            </a:r>
+          </a:p>
+        </p:txBody>
+      </p:sp>
+      <p:cxnSp>
+        <p:nvCxnSpPr>
+          <p:cNvPr id="29" name="Connector 28"/>
+          <p:cNvCxnSpPr/>
+          <p:nvPr/>
+        </p:nvCxnSpPr>
+        <p:spPr>
+          <a:xfrm>
+            <a:off x="10881359" y="4297680"/>
+            <a:ext cx="3611881" cy="0"/>
+          </a:xfrm>
+          <a:prstGeom prst="line">
+            <a:avLst/>
+          </a:prstGeom>
+          <a:ln w="25400">
+            <a:solidFill>
+              <a:srgbClr val="4285F4"/>
+            </a:solidFill>
+            <a:tailEnd type="arrow" w="med" len="med"/>
+          </a:ln>
+        </p:spPr>
+        <p:style>
+          <a:lnRef idx="2">
+            <a:schemeClr val="accent1"/>
+          </a:lnRef>
+          <a:fillRef idx="0">
+            <a:schemeClr val="accent1"/>
+          </a:fillRef>
+          <a:effectRef idx="1">
+            <a:schemeClr val="accent1"/>
+          </a:effectRef>
+          <a:fontRef idx="minor">
+            <a:schemeClr val="tx1"/>
+          </a:fontRef>
+        </p:style>
+      </p:cxnSp>
+      <p:sp>
+        <p:nvSpPr>
+          <p:cNvPr id="30" name="TextBox 29"/>
+          <p:cNvSpPr txBox="1"/>
+          <p:nvPr/>
+        </p:nvSpPr>
+        <p:spPr>
+          <a:xfrm>
+            <a:off x="10927080" y="3977640"/>
+            <a:ext cx="3520440" cy="292608"/>
+          </a:xfrm>
+          <a:prstGeom prst="rect">
+            <a:avLst/>
+          </a:prstGeom>
+          <a:noFill/>
+        </p:spPr>
+        <p:txBody>
+          <a:bodyPr wrap="square">
+            <a:spAutoFit/>
+          </a:bodyPr>
+          <a:lstStyle/>
+          <a:p>
+            <a:pPr algn="ctr"/>
+            <a:r>
+              <a:rPr sz="1000" b="0" i="1">
+                <a:solidFill>
+                  <a:srgbClr val="64748B"/>
+                </a:solidFill>
+              </a:rPr>
+              <a:t>embed / rerank / answer</a:t>
+            </a:r>
+          </a:p>
+        </p:txBody>
+      </p:sp>
+      <p:cxnSp>
+        <p:nvCxnSpPr>
+          <p:cNvPr id="31" name="Connector 30"/>
+          <p:cNvCxnSpPr/>
+          <p:nvPr/>
+        </p:nvCxnSpPr>
+        <p:spPr>
+          <a:xfrm flipH="1">
+            <a:off x="10881359" y="5577840"/>
+            <a:ext cx="3611881" cy="0"/>
+          </a:xfrm>
+          <a:prstGeom prst="line">
+            <a:avLst/>
+          </a:prstGeom>
+          <a:ln w="25400">
+            <a:solidFill>
+              <a:srgbClr val="4285F4"/>
+            </a:solidFill>
+            <a:tailEnd type="arrow" w="med" len="med"/>
+          </a:ln>
+        </p:spPr>
+        <p:style>
+          <a:lnRef idx="2">
+            <a:schemeClr val="accent1"/>
+          </a:lnRef>
+          <a:fillRef idx="0">
+            <a:schemeClr val="accent1"/>
+          </a:fillRef>
+          <a:effectRef idx="1">
+            <a:schemeClr val="accent1"/>
+          </a:effectRef>
+          <a:fontRef idx="minor">
+            <a:schemeClr val="tx1"/>
+          </a:fontRef>
+        </p:style>
+      </p:cxnSp>
+      <p:sp>
+        <p:nvSpPr>
+          <p:cNvPr id="32" name="TextBox 31"/>
+          <p:cNvSpPr txBox="1"/>
+          <p:nvPr/>
+        </p:nvSpPr>
+        <p:spPr>
+          <a:xfrm>
+            <a:off x="10927080" y="5650992"/>
+            <a:ext cx="3520440" cy="292608"/>
+          </a:xfrm>
+          <a:prstGeom prst="rect">
+            <a:avLst/>
+          </a:prstGeom>
+          <a:noFill/>
+        </p:spPr>
+        <p:txBody>
+          <a:bodyPr wrap="square">
+            <a:spAutoFit/>
+          </a:bodyPr>
+          <a:lstStyle/>
+          <a:p>
+            <a:pPr algn="ctr"/>
+            <a:r>
+              <a:rPr sz="1000" b="0" i="1">
+                <a:solidFill>
+                  <a:srgbClr val="64748B"/>
+                </a:solidFill>
+              </a:rPr>
+              <a:t>vectors / rankings / tokens</a:t>
+            </a:r>
+          </a:p>
+        </p:txBody>
+      </p:sp>
+      <p:cxnSp>
+        <p:nvCxnSpPr>
+          <p:cNvPr id="33" name="Connector 32"/>
+          <p:cNvCxnSpPr/>
+          <p:nvPr/>
+        </p:nvCxnSpPr>
+        <p:spPr>
+          <a:xfrm>
+            <a:off x="9144000" y="7315200"/>
+            <a:ext cx="0" cy="548640"/>
+          </a:xfrm>
+          <a:prstGeom prst="line">
+            <a:avLst/>
+          </a:prstGeom>
+          <a:ln w="25400">
+            <a:solidFill>
+              <a:srgbClr val="336791"/>
+            </a:solidFill>
+            <a:tailEnd type="arrow" w="med" len="med"/>
+          </a:ln>
+        </p:spPr>
+        <p:style>
+          <a:lnRef idx="2">
+            <a:schemeClr val="accent1"/>
+          </a:lnRef>
+          <a:fillRef idx="0">
+            <a:schemeClr val="accent1"/>
+          </a:fillRef>
+          <a:effectRef idx="1">
+            <a:schemeClr val="accent1"/>
+          </a:effectRef>
+          <a:fontRef idx="minor">
+            <a:schemeClr val="tx1"/>
+          </a:fontRef>
+        </p:style>
+      </p:cxnSp>
+      <p:sp>
+        <p:nvSpPr>
+          <p:cNvPr id="34" name="TextBox 33"/>
+          <p:cNvSpPr txBox="1"/>
+          <p:nvPr/>
+        </p:nvSpPr>
+        <p:spPr>
+          <a:xfrm>
+            <a:off x="9235440" y="7424928"/>
+            <a:ext cx="2011680" cy="329184"/>
+          </a:xfrm>
+          <a:prstGeom prst="rect">
+            <a:avLst/>
+          </a:prstGeom>
+          <a:noFill/>
+        </p:spPr>
+        <p:txBody>
+          <a:bodyPr wrap="square">
+            <a:spAutoFit/>
+          </a:bodyPr>
+          <a:lstStyle/>
+          <a:p>
+            <a:pPr algn="l"/>
+            <a:r>
+              <a:rPr sz="1000" b="0" i="1">
+                <a:solidFill>
+                  <a:srgbClr val="64748B"/>
+                </a:solidFill>
+              </a:rPr>
+              <a:t>store &amp; retrieve</a:t>
+            </a:r>
+          </a:p>
+        </p:txBody>
+      </p:sp>
+      <p:sp>
+        <p:nvSpPr>
+          <p:cNvPr id="35" name="TextBox 34"/>
+          <p:cNvSpPr txBox="1"/>
+          <p:nvPr/>
+        </p:nvSpPr>
+        <p:spPr>
+          <a:xfrm>
+            <a:off x="457200" y="10058400"/>
+            <a:ext cx="17373600" cy="274320"/>
+          </a:xfrm>
+          <a:prstGeom prst="rect">
+            <a:avLst/>
+          </a:prstGeom>
+          <a:noFill/>
+        </p:spPr>
+        <p:txBody>
+          <a:bodyPr wrap="none">
+            <a:spAutoFit/>
+          </a:bodyPr>
+          <a:lstStyle/>
+          <a:p>
+            <a:pPr algn="l"/>
+            <a:r>
+              <a:rPr sz="900" b="0" i="0">
+                <a:solidFill>
+                  <a:srgbClr val="94A3B8"/>
+                </a:solidFill>
+              </a:rPr>
+              <a:t>Ingest flow: Browser → FastAPI → Gemini (embed) → Postgres (store)     Query flow: Browser → FastAPI → Postgres (hybrid search) → Gemini (rerank+answer) → Browser (SSE)</a:t>
+            </a:r>
+          </a:p>
+        </p:txBody>
+      </p:sp>
+    </p:spTree>
+  </p:cSld>
+  <p:clrMapOvr>
+    <a:masterClrMapping/>
+  </p:clrMapOvr>
+</p:sld>
+</file>
+
 <file path=ppt/slides/slide2.xml><?xml version="1.0" encoding="utf-8"?>
 <p:sld xmlns:p="http://schemas.openxmlformats.org/presentationml/2006/main" xmlns:a="http://schemas.openxmlformats.org/drawingml/2006/main">
   <p:cSld>

--- a/NYMBL-DOCRAG.pptx
+++ b/NYMBL-DOCRAG.pptx
@@ -6928,6 +6928,2370 @@
 </file>
 
 <file path=ppt/slides/slide12.xml><?xml version="1.0" encoding="utf-8"?>
+<p:sld xmlns:a="http://schemas.openxmlformats.org/drawingml/2006/main" xmlns:p="http://schemas.openxmlformats.org/presentationml/2006/main" xmlns:r="http://schemas.openxmlformats.org/officeDocument/2006/relationships">
+  <p:cSld>
+    <p:bg>
+      <p:bgPr>
+        <a:solidFill>
+          <a:srgbClr val="FFFFFF"/>
+        </a:solidFill>
+        <a:effectLst/>
+      </p:bgPr>
+    </p:bg>
+    <p:spTree>
+      <p:nvGrpSpPr>
+        <p:cNvPr id="1" name=""/>
+        <p:cNvGrpSpPr/>
+        <p:nvPr/>
+      </p:nvGrpSpPr>
+      <p:grpSpPr/>
+      <p:sp>
+        <p:nvSpPr>
+          <p:cNvPr id="2" name="TextBox 1"/>
+          <p:cNvSpPr txBox="1"/>
+          <p:nvPr/>
+        </p:nvSpPr>
+        <p:spPr>
+          <a:xfrm>
+            <a:off x="914400" y="484632"/>
+            <a:ext cx="16285463" cy="429768"/>
+          </a:xfrm>
+          <a:prstGeom prst="rect">
+            <a:avLst/>
+          </a:prstGeom>
+          <a:noFill/>
+        </p:spPr>
+        <p:txBody>
+          <a:bodyPr wrap="square">
+            <a:spAutoFit/>
+          </a:bodyPr>
+          <a:lstStyle/>
+          <a:p>
+            <a:pPr algn="l"/>
+            <a:r>
+              <a:rPr sz="1400" b="1" i="0">
+                <a:solidFill>
+                  <a:srgbClr val="7C3AED"/>
+                </a:solidFill>
+              </a:rPr>
+              <a:t>LIMITATIONS</a:t>
+            </a:r>
+          </a:p>
+        </p:txBody>
+      </p:sp>
+      <p:sp>
+        <p:nvSpPr>
+          <p:cNvPr id="3" name="TextBox 2"/>
+          <p:cNvSpPr txBox="1"/>
+          <p:nvPr/>
+        </p:nvSpPr>
+        <p:spPr>
+          <a:xfrm>
+            <a:off x="914400" y="987552"/>
+            <a:ext cx="16285463" cy="502920"/>
+          </a:xfrm>
+          <a:prstGeom prst="rect">
+            <a:avLst/>
+          </a:prstGeom>
+          <a:noFill/>
+        </p:spPr>
+        <p:txBody>
+          <a:bodyPr wrap="square">
+            <a:spAutoFit/>
+          </a:bodyPr>
+          <a:lstStyle/>
+          <a:p>
+            <a:pPr algn="l"/>
+            <a:r>
+              <a:rPr sz="2800" b="1" i="0">
+                <a:solidFill>
+                  <a:srgbClr val="4C1D95"/>
+                </a:solidFill>
+              </a:rPr>
+              <a:t>Current scope — known constraints</a:t>
+            </a:r>
+          </a:p>
+        </p:txBody>
+      </p:sp>
+      <p:sp>
+        <p:nvSpPr>
+          <p:cNvPr id="4" name="Rectangle 3"/>
+          <p:cNvSpPr/>
+          <p:nvPr/>
+        </p:nvSpPr>
+        <p:spPr>
+          <a:xfrm>
+            <a:off x="822960" y="1856231"/>
+            <a:ext cx="16651224" cy="54864"/>
+          </a:xfrm>
+          <a:prstGeom prst="rect">
+            <a:avLst/>
+          </a:prstGeom>
+          <a:solidFill>
+            <a:srgbClr val="EF4444"/>
+          </a:solidFill>
+          <a:ln>
+            <a:noFill/>
+          </a:ln>
+        </p:spPr>
+        <p:style>
+          <a:lnRef idx="1">
+            <a:schemeClr val="accent1"/>
+          </a:lnRef>
+          <a:fillRef idx="3">
+            <a:schemeClr val="accent1"/>
+          </a:fillRef>
+          <a:effectRef idx="2">
+            <a:schemeClr val="accent1"/>
+          </a:effectRef>
+          <a:fontRef idx="minor">
+            <a:schemeClr val="lt1"/>
+          </a:fontRef>
+        </p:style>
+        <p:txBody>
+          <a:bodyPr rtlCol="0" anchor="ctr"/>
+          <a:lstStyle/>
+          <a:p>
+            <a:pPr algn="ctr"/>
+          </a:p>
+        </p:txBody>
+      </p:sp>
+      <p:sp>
+        <p:nvSpPr>
+          <p:cNvPr id="5" name="Rectangle 4"/>
+          <p:cNvSpPr/>
+          <p:nvPr/>
+        </p:nvSpPr>
+        <p:spPr>
+          <a:xfrm>
+            <a:off x="402336" y="2185416"/>
+            <a:ext cx="5303520" cy="3447288"/>
+          </a:xfrm>
+          <a:prstGeom prst="rect">
+            <a:avLst/>
+          </a:prstGeom>
+          <a:solidFill>
+            <a:srgbClr val="FFFFFF"/>
+          </a:solidFill>
+          <a:ln w="6350">
+            <a:solidFill>
+              <a:srgbClr val="E2E8F0"/>
+            </a:solidFill>
+          </a:ln>
+        </p:spPr>
+        <p:style>
+          <a:lnRef idx="1">
+            <a:schemeClr val="accent1"/>
+          </a:lnRef>
+          <a:fillRef idx="3">
+            <a:schemeClr val="accent1"/>
+          </a:fillRef>
+          <a:effectRef idx="2">
+            <a:schemeClr val="accent1"/>
+          </a:effectRef>
+          <a:fontRef idx="minor">
+            <a:schemeClr val="lt1"/>
+          </a:fontRef>
+        </p:style>
+        <p:txBody>
+          <a:bodyPr rtlCol="0" anchor="ctr"/>
+          <a:lstStyle/>
+          <a:p>
+            <a:pPr algn="ctr"/>
+          </a:p>
+        </p:txBody>
+      </p:sp>
+      <p:sp>
+        <p:nvSpPr>
+          <p:cNvPr id="6" name="Rectangle 5"/>
+          <p:cNvSpPr/>
+          <p:nvPr/>
+        </p:nvSpPr>
+        <p:spPr>
+          <a:xfrm>
+            <a:off x="402336" y="2185416"/>
+            <a:ext cx="5303520" cy="64008"/>
+          </a:xfrm>
+          <a:prstGeom prst="rect">
+            <a:avLst/>
+          </a:prstGeom>
+          <a:solidFill>
+            <a:srgbClr val="EF4444"/>
+          </a:solidFill>
+          <a:ln>
+            <a:noFill/>
+          </a:ln>
+        </p:spPr>
+        <p:style>
+          <a:lnRef idx="1">
+            <a:schemeClr val="accent1"/>
+          </a:lnRef>
+          <a:fillRef idx="3">
+            <a:schemeClr val="accent1"/>
+          </a:fillRef>
+          <a:effectRef idx="2">
+            <a:schemeClr val="accent1"/>
+          </a:effectRef>
+          <a:fontRef idx="minor">
+            <a:schemeClr val="lt1"/>
+          </a:fontRef>
+        </p:style>
+        <p:txBody>
+          <a:bodyPr rtlCol="0" anchor="ctr"/>
+          <a:lstStyle/>
+          <a:p>
+            <a:pPr algn="ctr"/>
+          </a:p>
+        </p:txBody>
+      </p:sp>
+      <p:sp>
+        <p:nvSpPr>
+          <p:cNvPr id="7" name="TextBox 6"/>
+          <p:cNvSpPr txBox="1"/>
+          <p:nvPr/>
+        </p:nvSpPr>
+        <p:spPr>
+          <a:xfrm>
+            <a:off x="704088" y="2359152"/>
+            <a:ext cx="4892040" cy="466344"/>
+          </a:xfrm>
+          <a:prstGeom prst="rect">
+            <a:avLst/>
+          </a:prstGeom>
+          <a:noFill/>
+        </p:spPr>
+        <p:txBody>
+          <a:bodyPr wrap="square">
+            <a:spAutoFit/>
+          </a:bodyPr>
+          <a:lstStyle/>
+          <a:p>
+            <a:pPr algn="l"/>
+            <a:r>
+              <a:rPr sz="1500" b="1" i="0">
+                <a:solidFill>
+                  <a:srgbClr val="4C1D95"/>
+                </a:solidFill>
+              </a:rPr>
+              <a:t>🚫  Single Document Only</a:t>
+            </a:r>
+          </a:p>
+        </p:txBody>
+      </p:sp>
+      <p:sp>
+        <p:nvSpPr>
+          <p:cNvPr id="8" name="TextBox 7"/>
+          <p:cNvSpPr txBox="1"/>
+          <p:nvPr/>
+        </p:nvSpPr>
+        <p:spPr>
+          <a:xfrm>
+            <a:off x="704088" y="2962656"/>
+            <a:ext cx="4892040" cy="2414016"/>
+          </a:xfrm>
+          <a:prstGeom prst="rect">
+            <a:avLst/>
+          </a:prstGeom>
+          <a:noFill/>
+        </p:spPr>
+        <p:txBody>
+          <a:bodyPr wrap="square">
+            <a:spAutoFit/>
+          </a:bodyPr>
+          <a:lstStyle/>
+          <a:p>
+            <a:pPr algn="l"/>
+            <a:r>
+              <a:rPr sz="1250" b="0" i="0">
+                <a:solidFill>
+                  <a:srgbClr val="7C3AED"/>
+                </a:solidFill>
+              </a:rPr>
+              <a:t>One PDF at a time. Uploading a new document wipes the previous one — no multi-doc library or cross-document queries.</a:t>
+            </a:r>
+          </a:p>
+        </p:txBody>
+      </p:sp>
+      <p:sp>
+        <p:nvSpPr>
+          <p:cNvPr id="9" name="Rectangle 8"/>
+          <p:cNvSpPr/>
+          <p:nvPr/>
+        </p:nvSpPr>
+        <p:spPr>
+          <a:xfrm>
+            <a:off x="6117336" y="2185416"/>
+            <a:ext cx="5303520" cy="3447288"/>
+          </a:xfrm>
+          <a:prstGeom prst="rect">
+            <a:avLst/>
+          </a:prstGeom>
+          <a:solidFill>
+            <a:srgbClr val="FFFFFF"/>
+          </a:solidFill>
+          <a:ln w="6350">
+            <a:solidFill>
+              <a:srgbClr val="E2E8F0"/>
+            </a:solidFill>
+          </a:ln>
+        </p:spPr>
+        <p:style>
+          <a:lnRef idx="1">
+            <a:schemeClr val="accent1"/>
+          </a:lnRef>
+          <a:fillRef idx="3">
+            <a:schemeClr val="accent1"/>
+          </a:fillRef>
+          <a:effectRef idx="2">
+            <a:schemeClr val="accent1"/>
+          </a:effectRef>
+          <a:fontRef idx="minor">
+            <a:schemeClr val="lt1"/>
+          </a:fontRef>
+        </p:style>
+        <p:txBody>
+          <a:bodyPr rtlCol="0" anchor="ctr"/>
+          <a:lstStyle/>
+          <a:p>
+            <a:pPr algn="ctr"/>
+          </a:p>
+        </p:txBody>
+      </p:sp>
+      <p:sp>
+        <p:nvSpPr>
+          <p:cNvPr id="10" name="Rectangle 9"/>
+          <p:cNvSpPr/>
+          <p:nvPr/>
+        </p:nvSpPr>
+        <p:spPr>
+          <a:xfrm>
+            <a:off x="6117336" y="2185416"/>
+            <a:ext cx="5303520" cy="64008"/>
+          </a:xfrm>
+          <a:prstGeom prst="rect">
+            <a:avLst/>
+          </a:prstGeom>
+          <a:solidFill>
+            <a:srgbClr val="EF4444"/>
+          </a:solidFill>
+          <a:ln>
+            <a:noFill/>
+          </a:ln>
+        </p:spPr>
+        <p:style>
+          <a:lnRef idx="1">
+            <a:schemeClr val="accent1"/>
+          </a:lnRef>
+          <a:fillRef idx="3">
+            <a:schemeClr val="accent1"/>
+          </a:fillRef>
+          <a:effectRef idx="2">
+            <a:schemeClr val="accent1"/>
+          </a:effectRef>
+          <a:fontRef idx="minor">
+            <a:schemeClr val="lt1"/>
+          </a:fontRef>
+        </p:style>
+        <p:txBody>
+          <a:bodyPr rtlCol="0" anchor="ctr"/>
+          <a:lstStyle/>
+          <a:p>
+            <a:pPr algn="ctr"/>
+          </a:p>
+        </p:txBody>
+      </p:sp>
+      <p:sp>
+        <p:nvSpPr>
+          <p:cNvPr id="11" name="TextBox 10"/>
+          <p:cNvSpPr txBox="1"/>
+          <p:nvPr/>
+        </p:nvSpPr>
+        <p:spPr>
+          <a:xfrm>
+            <a:off x="6419088" y="2359152"/>
+            <a:ext cx="4892040" cy="466344"/>
+          </a:xfrm>
+          <a:prstGeom prst="rect">
+            <a:avLst/>
+          </a:prstGeom>
+          <a:noFill/>
+        </p:spPr>
+        <p:txBody>
+          <a:bodyPr wrap="square">
+            <a:spAutoFit/>
+          </a:bodyPr>
+          <a:lstStyle/>
+          <a:p>
+            <a:pPr algn="l"/>
+            <a:r>
+              <a:rPr sz="1500" b="1" i="0">
+                <a:solidFill>
+                  <a:srgbClr val="4C1D95"/>
+                </a:solidFill>
+              </a:rPr>
+              <a:t>🔍  No Scanned PDF / OCR</a:t>
+            </a:r>
+          </a:p>
+        </p:txBody>
+      </p:sp>
+      <p:sp>
+        <p:nvSpPr>
+          <p:cNvPr id="12" name="TextBox 11"/>
+          <p:cNvSpPr txBox="1"/>
+          <p:nvPr/>
+        </p:nvSpPr>
+        <p:spPr>
+          <a:xfrm>
+            <a:off x="6419088" y="2962656"/>
+            <a:ext cx="4892040" cy="2414016"/>
+          </a:xfrm>
+          <a:prstGeom prst="rect">
+            <a:avLst/>
+          </a:prstGeom>
+          <a:noFill/>
+        </p:spPr>
+        <p:txBody>
+          <a:bodyPr wrap="square">
+            <a:spAutoFit/>
+          </a:bodyPr>
+          <a:lstStyle/>
+          <a:p>
+            <a:pPr algn="l"/>
+            <a:r>
+              <a:rPr sz="1250" b="0" i="0">
+                <a:solidFill>
+                  <a:srgbClr val="7C3AED"/>
+                </a:solidFill>
+              </a:rPr>
+              <a:t>PyMuPDF extracts text from digital PDFs only. Image-based or scanned pages return empty text — no Tesseract / Vision fallback.</a:t>
+            </a:r>
+          </a:p>
+        </p:txBody>
+      </p:sp>
+      <p:sp>
+        <p:nvSpPr>
+          <p:cNvPr id="13" name="Rectangle 12"/>
+          <p:cNvSpPr/>
+          <p:nvPr/>
+        </p:nvSpPr>
+        <p:spPr>
+          <a:xfrm>
+            <a:off x="11832336" y="2185416"/>
+            <a:ext cx="5303520" cy="3447288"/>
+          </a:xfrm>
+          <a:prstGeom prst="rect">
+            <a:avLst/>
+          </a:prstGeom>
+          <a:solidFill>
+            <a:srgbClr val="FFFFFF"/>
+          </a:solidFill>
+          <a:ln w="6350">
+            <a:solidFill>
+              <a:srgbClr val="E2E8F0"/>
+            </a:solidFill>
+          </a:ln>
+        </p:spPr>
+        <p:style>
+          <a:lnRef idx="1">
+            <a:schemeClr val="accent1"/>
+          </a:lnRef>
+          <a:fillRef idx="3">
+            <a:schemeClr val="accent1"/>
+          </a:fillRef>
+          <a:effectRef idx="2">
+            <a:schemeClr val="accent1"/>
+          </a:effectRef>
+          <a:fontRef idx="minor">
+            <a:schemeClr val="lt1"/>
+          </a:fontRef>
+        </p:style>
+        <p:txBody>
+          <a:bodyPr rtlCol="0" anchor="ctr"/>
+          <a:lstStyle/>
+          <a:p>
+            <a:pPr algn="ctr"/>
+          </a:p>
+        </p:txBody>
+      </p:sp>
+      <p:sp>
+        <p:nvSpPr>
+          <p:cNvPr id="14" name="Rectangle 13"/>
+          <p:cNvSpPr/>
+          <p:nvPr/>
+        </p:nvSpPr>
+        <p:spPr>
+          <a:xfrm>
+            <a:off x="11832336" y="2185416"/>
+            <a:ext cx="5303520" cy="64008"/>
+          </a:xfrm>
+          <a:prstGeom prst="rect">
+            <a:avLst/>
+          </a:prstGeom>
+          <a:solidFill>
+            <a:srgbClr val="EF4444"/>
+          </a:solidFill>
+          <a:ln>
+            <a:noFill/>
+          </a:ln>
+        </p:spPr>
+        <p:style>
+          <a:lnRef idx="1">
+            <a:schemeClr val="accent1"/>
+          </a:lnRef>
+          <a:fillRef idx="3">
+            <a:schemeClr val="accent1"/>
+          </a:fillRef>
+          <a:effectRef idx="2">
+            <a:schemeClr val="accent1"/>
+          </a:effectRef>
+          <a:fontRef idx="minor">
+            <a:schemeClr val="lt1"/>
+          </a:fontRef>
+        </p:style>
+        <p:txBody>
+          <a:bodyPr rtlCol="0" anchor="ctr"/>
+          <a:lstStyle/>
+          <a:p>
+            <a:pPr algn="ctr"/>
+          </a:p>
+        </p:txBody>
+      </p:sp>
+      <p:sp>
+        <p:nvSpPr>
+          <p:cNvPr id="15" name="TextBox 14"/>
+          <p:cNvSpPr txBox="1"/>
+          <p:nvPr/>
+        </p:nvSpPr>
+        <p:spPr>
+          <a:xfrm>
+            <a:off x="12134088" y="2359152"/>
+            <a:ext cx="4892040" cy="466344"/>
+          </a:xfrm>
+          <a:prstGeom prst="rect">
+            <a:avLst/>
+          </a:prstGeom>
+          <a:noFill/>
+        </p:spPr>
+        <p:txBody>
+          <a:bodyPr wrap="square">
+            <a:spAutoFit/>
+          </a:bodyPr>
+          <a:lstStyle/>
+          <a:p>
+            <a:pPr algn="l"/>
+            <a:r>
+              <a:rPr sz="1500" b="1" i="0">
+                <a:solidFill>
+                  <a:srgbClr val="4C1D95"/>
+                </a:solidFill>
+              </a:rPr>
+              <a:t>👤  No Auth / Multi-User</a:t>
+            </a:r>
+          </a:p>
+        </p:txBody>
+      </p:sp>
+      <p:sp>
+        <p:nvSpPr>
+          <p:cNvPr id="16" name="TextBox 15"/>
+          <p:cNvSpPr txBox="1"/>
+          <p:nvPr/>
+        </p:nvSpPr>
+        <p:spPr>
+          <a:xfrm>
+            <a:off x="12134088" y="2962656"/>
+            <a:ext cx="4892040" cy="2414016"/>
+          </a:xfrm>
+          <a:prstGeom prst="rect">
+            <a:avLst/>
+          </a:prstGeom>
+          <a:noFill/>
+        </p:spPr>
+        <p:txBody>
+          <a:bodyPr wrap="square">
+            <a:spAutoFit/>
+          </a:bodyPr>
+          <a:lstStyle/>
+          <a:p>
+            <a:pPr algn="l"/>
+            <a:r>
+              <a:rPr sz="1250" b="0" i="0">
+                <a:solidFill>
+                  <a:srgbClr val="7C3AED"/>
+                </a:solidFill>
+              </a:rPr>
+              <a:t>Single shared server state. No session isolation — concurrent users share the same document with no login or permission model.</a:t>
+            </a:r>
+          </a:p>
+        </p:txBody>
+      </p:sp>
+      <p:sp>
+        <p:nvSpPr>
+          <p:cNvPr id="17" name="Rectangle 16"/>
+          <p:cNvSpPr/>
+          <p:nvPr/>
+        </p:nvSpPr>
+        <p:spPr>
+          <a:xfrm>
+            <a:off x="402336" y="5806440"/>
+            <a:ext cx="5303520" cy="3447288"/>
+          </a:xfrm>
+          <a:prstGeom prst="rect">
+            <a:avLst/>
+          </a:prstGeom>
+          <a:solidFill>
+            <a:srgbClr val="FFFFFF"/>
+          </a:solidFill>
+          <a:ln w="6350">
+            <a:solidFill>
+              <a:srgbClr val="E2E8F0"/>
+            </a:solidFill>
+          </a:ln>
+        </p:spPr>
+        <p:style>
+          <a:lnRef idx="1">
+            <a:schemeClr val="accent1"/>
+          </a:lnRef>
+          <a:fillRef idx="3">
+            <a:schemeClr val="accent1"/>
+          </a:fillRef>
+          <a:effectRef idx="2">
+            <a:schemeClr val="accent1"/>
+          </a:effectRef>
+          <a:fontRef idx="minor">
+            <a:schemeClr val="lt1"/>
+          </a:fontRef>
+        </p:style>
+        <p:txBody>
+          <a:bodyPr rtlCol="0" anchor="ctr"/>
+          <a:lstStyle/>
+          <a:p>
+            <a:pPr algn="ctr"/>
+          </a:p>
+        </p:txBody>
+      </p:sp>
+      <p:sp>
+        <p:nvSpPr>
+          <p:cNvPr id="18" name="Rectangle 17"/>
+          <p:cNvSpPr/>
+          <p:nvPr/>
+        </p:nvSpPr>
+        <p:spPr>
+          <a:xfrm>
+            <a:off x="402336" y="5806440"/>
+            <a:ext cx="5303520" cy="64008"/>
+          </a:xfrm>
+          <a:prstGeom prst="rect">
+            <a:avLst/>
+          </a:prstGeom>
+          <a:solidFill>
+            <a:srgbClr val="F59E0B"/>
+          </a:solidFill>
+          <a:ln>
+            <a:noFill/>
+          </a:ln>
+        </p:spPr>
+        <p:style>
+          <a:lnRef idx="1">
+            <a:schemeClr val="accent1"/>
+          </a:lnRef>
+          <a:fillRef idx="3">
+            <a:schemeClr val="accent1"/>
+          </a:fillRef>
+          <a:effectRef idx="2">
+            <a:schemeClr val="accent1"/>
+          </a:effectRef>
+          <a:fontRef idx="minor">
+            <a:schemeClr val="lt1"/>
+          </a:fontRef>
+        </p:style>
+        <p:txBody>
+          <a:bodyPr rtlCol="0" anchor="ctr"/>
+          <a:lstStyle/>
+          <a:p>
+            <a:pPr algn="ctr"/>
+          </a:p>
+        </p:txBody>
+      </p:sp>
+      <p:sp>
+        <p:nvSpPr>
+          <p:cNvPr id="19" name="TextBox 18"/>
+          <p:cNvSpPr txBox="1"/>
+          <p:nvPr/>
+        </p:nvSpPr>
+        <p:spPr>
+          <a:xfrm>
+            <a:off x="704088" y="5980176"/>
+            <a:ext cx="4892040" cy="466344"/>
+          </a:xfrm>
+          <a:prstGeom prst="rect">
+            <a:avLst/>
+          </a:prstGeom>
+          <a:noFill/>
+        </p:spPr>
+        <p:txBody>
+          <a:bodyPr wrap="square">
+            <a:spAutoFit/>
+          </a:bodyPr>
+          <a:lstStyle/>
+          <a:p>
+            <a:pPr algn="l"/>
+            <a:r>
+              <a:rPr sz="1500" b="1" i="0">
+                <a:solidFill>
+                  <a:srgbClr val="4C1D95"/>
+                </a:solidFill>
+              </a:rPr>
+              <a:t>💬  No Persistent Chat History</a:t>
+            </a:r>
+          </a:p>
+        </p:txBody>
+      </p:sp>
+      <p:sp>
+        <p:nvSpPr>
+          <p:cNvPr id="20" name="TextBox 19"/>
+          <p:cNvSpPr txBox="1"/>
+          <p:nvPr/>
+        </p:nvSpPr>
+        <p:spPr>
+          <a:xfrm>
+            <a:off x="704088" y="6583679"/>
+            <a:ext cx="4892040" cy="2414016"/>
+          </a:xfrm>
+          <a:prstGeom prst="rect">
+            <a:avLst/>
+          </a:prstGeom>
+          <a:noFill/>
+        </p:spPr>
+        <p:txBody>
+          <a:bodyPr wrap="square">
+            <a:spAutoFit/>
+          </a:bodyPr>
+          <a:lstStyle/>
+          <a:p>
+            <a:pPr algn="l"/>
+            <a:r>
+              <a:rPr sz="1250" b="0" i="0">
+                <a:solidFill>
+                  <a:srgbClr val="7C3AED"/>
+                </a:solidFill>
+              </a:rPr>
+              <a:t>Conversation context resets on page reload. Follow-up questions cannot reference answers from a previous browsing session.</a:t>
+            </a:r>
+          </a:p>
+        </p:txBody>
+      </p:sp>
+      <p:sp>
+        <p:nvSpPr>
+          <p:cNvPr id="21" name="Rectangle 20"/>
+          <p:cNvSpPr/>
+          <p:nvPr/>
+        </p:nvSpPr>
+        <p:spPr>
+          <a:xfrm>
+            <a:off x="6117336" y="5806440"/>
+            <a:ext cx="5303520" cy="3447288"/>
+          </a:xfrm>
+          <a:prstGeom prst="rect">
+            <a:avLst/>
+          </a:prstGeom>
+          <a:solidFill>
+            <a:srgbClr val="FFFFFF"/>
+          </a:solidFill>
+          <a:ln w="6350">
+            <a:solidFill>
+              <a:srgbClr val="E2E8F0"/>
+            </a:solidFill>
+          </a:ln>
+        </p:spPr>
+        <p:style>
+          <a:lnRef idx="1">
+            <a:schemeClr val="accent1"/>
+          </a:lnRef>
+          <a:fillRef idx="3">
+            <a:schemeClr val="accent1"/>
+          </a:fillRef>
+          <a:effectRef idx="2">
+            <a:schemeClr val="accent1"/>
+          </a:effectRef>
+          <a:fontRef idx="minor">
+            <a:schemeClr val="lt1"/>
+          </a:fontRef>
+        </p:style>
+        <p:txBody>
+          <a:bodyPr rtlCol="0" anchor="ctr"/>
+          <a:lstStyle/>
+          <a:p>
+            <a:pPr algn="ctr"/>
+          </a:p>
+        </p:txBody>
+      </p:sp>
+      <p:sp>
+        <p:nvSpPr>
+          <p:cNvPr id="22" name="Rectangle 21"/>
+          <p:cNvSpPr/>
+          <p:nvPr/>
+        </p:nvSpPr>
+        <p:spPr>
+          <a:xfrm>
+            <a:off x="6117336" y="5806440"/>
+            <a:ext cx="5303520" cy="64008"/>
+          </a:xfrm>
+          <a:prstGeom prst="rect">
+            <a:avLst/>
+          </a:prstGeom>
+          <a:solidFill>
+            <a:srgbClr val="F59E0B"/>
+          </a:solidFill>
+          <a:ln>
+            <a:noFill/>
+          </a:ln>
+        </p:spPr>
+        <p:style>
+          <a:lnRef idx="1">
+            <a:schemeClr val="accent1"/>
+          </a:lnRef>
+          <a:fillRef idx="3">
+            <a:schemeClr val="accent1"/>
+          </a:fillRef>
+          <a:effectRef idx="2">
+            <a:schemeClr val="accent1"/>
+          </a:effectRef>
+          <a:fontRef idx="minor">
+            <a:schemeClr val="lt1"/>
+          </a:fontRef>
+        </p:style>
+        <p:txBody>
+          <a:bodyPr rtlCol="0" anchor="ctr"/>
+          <a:lstStyle/>
+          <a:p>
+            <a:pPr algn="ctr"/>
+          </a:p>
+        </p:txBody>
+      </p:sp>
+      <p:sp>
+        <p:nvSpPr>
+          <p:cNvPr id="23" name="TextBox 22"/>
+          <p:cNvSpPr txBox="1"/>
+          <p:nvPr/>
+        </p:nvSpPr>
+        <p:spPr>
+          <a:xfrm>
+            <a:off x="6419088" y="5980176"/>
+            <a:ext cx="4892040" cy="466344"/>
+          </a:xfrm>
+          <a:prstGeom prst="rect">
+            <a:avLst/>
+          </a:prstGeom>
+          <a:noFill/>
+        </p:spPr>
+        <p:txBody>
+          <a:bodyPr wrap="square">
+            <a:spAutoFit/>
+          </a:bodyPr>
+          <a:lstStyle/>
+          <a:p>
+            <a:pPr algn="l"/>
+            <a:r>
+              <a:rPr sz="1500" b="1" i="0">
+                <a:solidFill>
+                  <a:srgbClr val="4C1D95"/>
+                </a:solidFill>
+              </a:rPr>
+              <a:t>⚡  Gemini API Rate Limits</a:t>
+            </a:r>
+          </a:p>
+        </p:txBody>
+      </p:sp>
+      <p:sp>
+        <p:nvSpPr>
+          <p:cNvPr id="24" name="TextBox 23"/>
+          <p:cNvSpPr txBox="1"/>
+          <p:nvPr/>
+        </p:nvSpPr>
+        <p:spPr>
+          <a:xfrm>
+            <a:off x="6419088" y="6583679"/>
+            <a:ext cx="4892040" cy="2414016"/>
+          </a:xfrm>
+          <a:prstGeom prst="rect">
+            <a:avLst/>
+          </a:prstGeom>
+          <a:noFill/>
+        </p:spPr>
+        <p:txBody>
+          <a:bodyPr wrap="square">
+            <a:spAutoFit/>
+          </a:bodyPr>
+          <a:lstStyle/>
+          <a:p>
+            <a:pPr algn="l"/>
+            <a:r>
+              <a:rPr sz="1250" b="0" i="0">
+                <a:solidFill>
+                  <a:srgbClr val="7C3AED"/>
+                </a:solidFill>
+              </a:rPr>
+              <a:t>Concurrent embedding calls hit 429 limits on large documents. Exponential backoff adds latency for 100+ page PDFs.</a:t>
+            </a:r>
+          </a:p>
+        </p:txBody>
+      </p:sp>
+      <p:sp>
+        <p:nvSpPr>
+          <p:cNvPr id="25" name="Rectangle 24"/>
+          <p:cNvSpPr/>
+          <p:nvPr/>
+        </p:nvSpPr>
+        <p:spPr>
+          <a:xfrm>
+            <a:off x="11832336" y="5806440"/>
+            <a:ext cx="5303520" cy="3447288"/>
+          </a:xfrm>
+          <a:prstGeom prst="rect">
+            <a:avLst/>
+          </a:prstGeom>
+          <a:solidFill>
+            <a:srgbClr val="FFFFFF"/>
+          </a:solidFill>
+          <a:ln w="6350">
+            <a:solidFill>
+              <a:srgbClr val="E2E8F0"/>
+            </a:solidFill>
+          </a:ln>
+        </p:spPr>
+        <p:style>
+          <a:lnRef idx="1">
+            <a:schemeClr val="accent1"/>
+          </a:lnRef>
+          <a:fillRef idx="3">
+            <a:schemeClr val="accent1"/>
+          </a:fillRef>
+          <a:effectRef idx="2">
+            <a:schemeClr val="accent1"/>
+          </a:effectRef>
+          <a:fontRef idx="minor">
+            <a:schemeClr val="lt1"/>
+          </a:fontRef>
+        </p:style>
+        <p:txBody>
+          <a:bodyPr rtlCol="0" anchor="ctr"/>
+          <a:lstStyle/>
+          <a:p>
+            <a:pPr algn="ctr"/>
+          </a:p>
+        </p:txBody>
+      </p:sp>
+      <p:sp>
+        <p:nvSpPr>
+          <p:cNvPr id="26" name="Rectangle 25"/>
+          <p:cNvSpPr/>
+          <p:nvPr/>
+        </p:nvSpPr>
+        <p:spPr>
+          <a:xfrm>
+            <a:off x="11832336" y="5806440"/>
+            <a:ext cx="5303520" cy="64008"/>
+          </a:xfrm>
+          <a:prstGeom prst="rect">
+            <a:avLst/>
+          </a:prstGeom>
+          <a:solidFill>
+            <a:srgbClr val="F59E0B"/>
+          </a:solidFill>
+          <a:ln>
+            <a:noFill/>
+          </a:ln>
+        </p:spPr>
+        <p:style>
+          <a:lnRef idx="1">
+            <a:schemeClr val="accent1"/>
+          </a:lnRef>
+          <a:fillRef idx="3">
+            <a:schemeClr val="accent1"/>
+          </a:fillRef>
+          <a:effectRef idx="2">
+            <a:schemeClr val="accent1"/>
+          </a:effectRef>
+          <a:fontRef idx="minor">
+            <a:schemeClr val="lt1"/>
+          </a:fontRef>
+        </p:style>
+        <p:txBody>
+          <a:bodyPr rtlCol="0" anchor="ctr"/>
+          <a:lstStyle/>
+          <a:p>
+            <a:pPr algn="ctr"/>
+          </a:p>
+        </p:txBody>
+      </p:sp>
+      <p:sp>
+        <p:nvSpPr>
+          <p:cNvPr id="27" name="TextBox 26"/>
+          <p:cNvSpPr txBox="1"/>
+          <p:nvPr/>
+        </p:nvSpPr>
+        <p:spPr>
+          <a:xfrm>
+            <a:off x="12134088" y="5980176"/>
+            <a:ext cx="4892040" cy="466344"/>
+          </a:xfrm>
+          <a:prstGeom prst="rect">
+            <a:avLst/>
+          </a:prstGeom>
+          <a:noFill/>
+        </p:spPr>
+        <p:txBody>
+          <a:bodyPr wrap="square">
+            <a:spAutoFit/>
+          </a:bodyPr>
+          <a:lstStyle/>
+          <a:p>
+            <a:pPr algn="l"/>
+            <a:r>
+              <a:rPr sz="1500" b="1" i="0">
+                <a:solidFill>
+                  <a:srgbClr val="4C1D95"/>
+                </a:solidFill>
+              </a:rPr>
+              <a:t>🔤  PyMuPDF ≠ PDF.js Extraction</a:t>
+            </a:r>
+          </a:p>
+        </p:txBody>
+      </p:sp>
+      <p:sp>
+        <p:nvSpPr>
+          <p:cNvPr id="28" name="TextBox 27"/>
+          <p:cNvSpPr txBox="1"/>
+          <p:nvPr/>
+        </p:nvSpPr>
+        <p:spPr>
+          <a:xfrm>
+            <a:off x="12134088" y="6583679"/>
+            <a:ext cx="4892040" cy="2414016"/>
+          </a:xfrm>
+          <a:prstGeom prst="rect">
+            <a:avLst/>
+          </a:prstGeom>
+          <a:noFill/>
+        </p:spPr>
+        <p:txBody>
+          <a:bodyPr wrap="square">
+            <a:spAutoFit/>
+          </a:bodyPr>
+          <a:lstStyle/>
+          <a:p>
+            <a:pPr algn="l"/>
+            <a:r>
+              <a:rPr sz="1250" b="0" i="0">
+                <a:solidFill>
+                  <a:srgbClr val="7C3AED"/>
+                </a:solidFill>
+              </a:rPr>
+              <a:t>Math and symbols render differently at ingest (PyMuPDF) and in the viewer (PDF.js), requiring fuzzy word-anchor matching for highlighting.</a:t>
+            </a:r>
+          </a:p>
+        </p:txBody>
+      </p:sp>
+    </p:spTree>
+  </p:cSld>
+  <p:clrMapOvr>
+    <a:masterClrMapping/>
+  </p:clrMapOvr>
+</p:sld>
+</file>
+
+<file path=ppt/slides/slide13.xml><?xml version="1.0" encoding="utf-8"?>
+<p:sld xmlns:a="http://schemas.openxmlformats.org/drawingml/2006/main" xmlns:p="http://schemas.openxmlformats.org/presentationml/2006/main" xmlns:r="http://schemas.openxmlformats.org/officeDocument/2006/relationships">
+  <p:cSld>
+    <p:bg>
+      <p:bgPr>
+        <a:solidFill>
+          <a:srgbClr val="FFFFFF"/>
+        </a:solidFill>
+        <a:effectLst/>
+      </p:bgPr>
+    </p:bg>
+    <p:spTree>
+      <p:nvGrpSpPr>
+        <p:cNvPr id="1" name=""/>
+        <p:cNvGrpSpPr/>
+        <p:nvPr/>
+      </p:nvGrpSpPr>
+      <p:grpSpPr/>
+      <p:sp>
+        <p:nvSpPr>
+          <p:cNvPr id="2" name="TextBox 1"/>
+          <p:cNvSpPr txBox="1"/>
+          <p:nvPr/>
+        </p:nvSpPr>
+        <p:spPr>
+          <a:xfrm>
+            <a:off x="914400" y="484632"/>
+            <a:ext cx="16285463" cy="429768"/>
+          </a:xfrm>
+          <a:prstGeom prst="rect">
+            <a:avLst/>
+          </a:prstGeom>
+          <a:noFill/>
+        </p:spPr>
+        <p:txBody>
+          <a:bodyPr wrap="square">
+            <a:spAutoFit/>
+          </a:bodyPr>
+          <a:lstStyle/>
+          <a:p>
+            <a:pPr algn="l"/>
+            <a:r>
+              <a:rPr sz="1400" b="1" i="0">
+                <a:solidFill>
+                  <a:srgbClr val="7C3AED"/>
+                </a:solidFill>
+              </a:rPr>
+              <a:t>SYSTEM DESIGN</a:t>
+            </a:r>
+          </a:p>
+        </p:txBody>
+      </p:sp>
+      <p:sp>
+        <p:nvSpPr>
+          <p:cNvPr id="3" name="TextBox 2"/>
+          <p:cNvSpPr txBox="1"/>
+          <p:nvPr/>
+        </p:nvSpPr>
+        <p:spPr>
+          <a:xfrm>
+            <a:off x="914400" y="987552"/>
+            <a:ext cx="16285463" cy="502920"/>
+          </a:xfrm>
+          <a:prstGeom prst="rect">
+            <a:avLst/>
+          </a:prstGeom>
+          <a:noFill/>
+        </p:spPr>
+        <p:txBody>
+          <a:bodyPr wrap="square">
+            <a:spAutoFit/>
+          </a:bodyPr>
+          <a:lstStyle/>
+          <a:p>
+            <a:pPr algn="l"/>
+            <a:r>
+              <a:rPr sz="2800" b="1" i="0">
+                <a:solidFill>
+                  <a:srgbClr val="4C1D95"/>
+                </a:solidFill>
+              </a:rPr>
+              <a:t>Component architecture &amp; data flow</a:t>
+            </a:r>
+          </a:p>
+        </p:txBody>
+      </p:sp>
+      <p:sp>
+        <p:nvSpPr>
+          <p:cNvPr id="4" name="Rectangle 3"/>
+          <p:cNvSpPr/>
+          <p:nvPr/>
+        </p:nvSpPr>
+        <p:spPr>
+          <a:xfrm>
+            <a:off x="822960" y="1856231"/>
+            <a:ext cx="16651224" cy="54864"/>
+          </a:xfrm>
+          <a:prstGeom prst="rect">
+            <a:avLst/>
+          </a:prstGeom>
+          <a:solidFill>
+            <a:srgbClr val="7C3AED"/>
+          </a:solidFill>
+          <a:ln>
+            <a:noFill/>
+          </a:ln>
+        </p:spPr>
+        <p:style>
+          <a:lnRef idx="1">
+            <a:schemeClr val="accent1"/>
+          </a:lnRef>
+          <a:fillRef idx="3">
+            <a:schemeClr val="accent1"/>
+          </a:fillRef>
+          <a:effectRef idx="2">
+            <a:schemeClr val="accent1"/>
+          </a:effectRef>
+          <a:fontRef idx="minor">
+            <a:schemeClr val="lt1"/>
+          </a:fontRef>
+        </p:style>
+        <p:txBody>
+          <a:bodyPr rtlCol="0" anchor="ctr"/>
+          <a:lstStyle/>
+          <a:p>
+            <a:pPr algn="ctr"/>
+          </a:p>
+        </p:txBody>
+      </p:sp>
+      <p:sp>
+        <p:nvSpPr>
+          <p:cNvPr id="5" name="Rectangle 4"/>
+          <p:cNvSpPr/>
+          <p:nvPr/>
+        </p:nvSpPr>
+        <p:spPr>
+          <a:xfrm>
+            <a:off x="320040" y="3291840"/>
+            <a:ext cx="3474720" cy="3474720"/>
+          </a:xfrm>
+          <a:prstGeom prst="rect">
+            <a:avLst/>
+          </a:prstGeom>
+          <a:solidFill>
+            <a:srgbClr val="FFFFFF"/>
+          </a:solidFill>
+          <a:ln w="19050">
+            <a:solidFill>
+              <a:srgbClr val="7C3AED"/>
+            </a:solidFill>
+          </a:ln>
+        </p:spPr>
+        <p:style>
+          <a:lnRef idx="1">
+            <a:schemeClr val="accent1"/>
+          </a:lnRef>
+          <a:fillRef idx="3">
+            <a:schemeClr val="accent1"/>
+          </a:fillRef>
+          <a:effectRef idx="2">
+            <a:schemeClr val="accent1"/>
+          </a:effectRef>
+          <a:fontRef idx="minor">
+            <a:schemeClr val="lt1"/>
+          </a:fontRef>
+        </p:style>
+        <p:txBody>
+          <a:bodyPr rtlCol="0" anchor="ctr"/>
+          <a:lstStyle/>
+          <a:p>
+            <a:pPr algn="ctr"/>
+          </a:p>
+        </p:txBody>
+      </p:sp>
+      <p:sp>
+        <p:nvSpPr>
+          <p:cNvPr id="6" name="Rectangle 5"/>
+          <p:cNvSpPr/>
+          <p:nvPr/>
+        </p:nvSpPr>
+        <p:spPr>
+          <a:xfrm>
+            <a:off x="320040" y="3291840"/>
+            <a:ext cx="3474720" cy="54864"/>
+          </a:xfrm>
+          <a:prstGeom prst="rect">
+            <a:avLst/>
+          </a:prstGeom>
+          <a:solidFill>
+            <a:srgbClr val="7C3AED"/>
+          </a:solidFill>
+          <a:ln>
+            <a:noFill/>
+          </a:ln>
+        </p:spPr>
+        <p:style>
+          <a:lnRef idx="1">
+            <a:schemeClr val="accent1"/>
+          </a:lnRef>
+          <a:fillRef idx="3">
+            <a:schemeClr val="accent1"/>
+          </a:fillRef>
+          <a:effectRef idx="2">
+            <a:schemeClr val="accent1"/>
+          </a:effectRef>
+          <a:fontRef idx="minor">
+            <a:schemeClr val="lt1"/>
+          </a:fontRef>
+        </p:style>
+        <p:txBody>
+          <a:bodyPr rtlCol="0" anchor="ctr"/>
+          <a:lstStyle/>
+          <a:p>
+            <a:pPr algn="ctr"/>
+          </a:p>
+        </p:txBody>
+      </p:sp>
+      <p:sp>
+        <p:nvSpPr>
+          <p:cNvPr id="7" name="TextBox 6"/>
+          <p:cNvSpPr txBox="1"/>
+          <p:nvPr/>
+        </p:nvSpPr>
+        <p:spPr>
+          <a:xfrm>
+            <a:off x="548640" y="3456432"/>
+            <a:ext cx="3108960" cy="502920"/>
+          </a:xfrm>
+          <a:prstGeom prst="rect">
+            <a:avLst/>
+          </a:prstGeom>
+          <a:noFill/>
+        </p:spPr>
+        <p:txBody>
+          <a:bodyPr wrap="square">
+            <a:spAutoFit/>
+          </a:bodyPr>
+          <a:lstStyle/>
+          <a:p>
+            <a:pPr algn="l"/>
+            <a:r>
+              <a:rPr sz="2200" b="0" i="0">
+                <a:solidFill>
+                  <a:srgbClr val="4C1D95"/>
+                </a:solidFill>
+              </a:rPr>
+              <a:t>🌐</a:t>
+            </a:r>
+          </a:p>
+        </p:txBody>
+      </p:sp>
+      <p:sp>
+        <p:nvSpPr>
+          <p:cNvPr id="8" name="TextBox 7"/>
+          <p:cNvSpPr txBox="1"/>
+          <p:nvPr/>
+        </p:nvSpPr>
+        <p:spPr>
+          <a:xfrm>
+            <a:off x="548640" y="3977639"/>
+            <a:ext cx="3108960" cy="457200"/>
+          </a:xfrm>
+          <a:prstGeom prst="rect">
+            <a:avLst/>
+          </a:prstGeom>
+          <a:noFill/>
+        </p:spPr>
+        <p:txBody>
+          <a:bodyPr wrap="square">
+            <a:spAutoFit/>
+          </a:bodyPr>
+          <a:lstStyle/>
+          <a:p>
+            <a:pPr algn="l"/>
+            <a:r>
+              <a:rPr sz="1600" b="1" i="0">
+                <a:solidFill>
+                  <a:srgbClr val="4C1D95"/>
+                </a:solidFill>
+              </a:rPr>
+              <a:t>Browser</a:t>
+            </a:r>
+          </a:p>
+        </p:txBody>
+      </p:sp>
+      <p:sp>
+        <p:nvSpPr>
+          <p:cNvPr id="9" name="TextBox 8"/>
+          <p:cNvSpPr txBox="1"/>
+          <p:nvPr/>
+        </p:nvSpPr>
+        <p:spPr>
+          <a:xfrm>
+            <a:off x="548640" y="4480560"/>
+            <a:ext cx="3108960" cy="2103120"/>
+          </a:xfrm>
+          <a:prstGeom prst="rect">
+            <a:avLst/>
+          </a:prstGeom>
+          <a:noFill/>
+        </p:spPr>
+        <p:txBody>
+          <a:bodyPr wrap="square">
+            <a:spAutoFit/>
+          </a:bodyPr>
+          <a:lstStyle/>
+          <a:p>
+            <a:pPr algn="l"/>
+            <a:r>
+              <a:rPr sz="1150" b="0" i="0">
+                <a:solidFill>
+                  <a:srgbClr val="7C3AED"/>
+                </a:solidFill>
+              </a:rPr>
+              <a:t>index.html
+PDF.js viewer
+SSE streaming
+citation pills</a:t>
+            </a:r>
+          </a:p>
+        </p:txBody>
+      </p:sp>
+      <p:sp>
+        <p:nvSpPr>
+          <p:cNvPr id="10" name="Rectangle 9"/>
+          <p:cNvSpPr/>
+          <p:nvPr/>
+        </p:nvSpPr>
+        <p:spPr>
+          <a:xfrm>
+            <a:off x="7406640" y="2194560"/>
+            <a:ext cx="3474720" cy="5120640"/>
+          </a:xfrm>
+          <a:prstGeom prst="rect">
+            <a:avLst/>
+          </a:prstGeom>
+          <a:solidFill>
+            <a:srgbClr val="FFFFFF"/>
+          </a:solidFill>
+          <a:ln w="19050">
+            <a:solidFill>
+              <a:srgbClr val="059669"/>
+            </a:solidFill>
+          </a:ln>
+        </p:spPr>
+        <p:style>
+          <a:lnRef idx="1">
+            <a:schemeClr val="accent1"/>
+          </a:lnRef>
+          <a:fillRef idx="3">
+            <a:schemeClr val="accent1"/>
+          </a:fillRef>
+          <a:effectRef idx="2">
+            <a:schemeClr val="accent1"/>
+          </a:effectRef>
+          <a:fontRef idx="minor">
+            <a:schemeClr val="lt1"/>
+          </a:fontRef>
+        </p:style>
+        <p:txBody>
+          <a:bodyPr rtlCol="0" anchor="ctr"/>
+          <a:lstStyle/>
+          <a:p>
+            <a:pPr algn="ctr"/>
+          </a:p>
+        </p:txBody>
+      </p:sp>
+      <p:sp>
+        <p:nvSpPr>
+          <p:cNvPr id="11" name="Rectangle 10"/>
+          <p:cNvSpPr/>
+          <p:nvPr/>
+        </p:nvSpPr>
+        <p:spPr>
+          <a:xfrm>
+            <a:off x="7406640" y="2194560"/>
+            <a:ext cx="3474720" cy="54864"/>
+          </a:xfrm>
+          <a:prstGeom prst="rect">
+            <a:avLst/>
+          </a:prstGeom>
+          <a:solidFill>
+            <a:srgbClr val="059669"/>
+          </a:solidFill>
+          <a:ln>
+            <a:noFill/>
+          </a:ln>
+        </p:spPr>
+        <p:style>
+          <a:lnRef idx="1">
+            <a:schemeClr val="accent1"/>
+          </a:lnRef>
+          <a:fillRef idx="3">
+            <a:schemeClr val="accent1"/>
+          </a:fillRef>
+          <a:effectRef idx="2">
+            <a:schemeClr val="accent1"/>
+          </a:effectRef>
+          <a:fontRef idx="minor">
+            <a:schemeClr val="lt1"/>
+          </a:fontRef>
+        </p:style>
+        <p:txBody>
+          <a:bodyPr rtlCol="0" anchor="ctr"/>
+          <a:lstStyle/>
+          <a:p>
+            <a:pPr algn="ctr"/>
+          </a:p>
+        </p:txBody>
+      </p:sp>
+      <p:sp>
+        <p:nvSpPr>
+          <p:cNvPr id="12" name="TextBox 11"/>
+          <p:cNvSpPr txBox="1"/>
+          <p:nvPr/>
+        </p:nvSpPr>
+        <p:spPr>
+          <a:xfrm>
+            <a:off x="7635240" y="2359152"/>
+            <a:ext cx="3108960" cy="502920"/>
+          </a:xfrm>
+          <a:prstGeom prst="rect">
+            <a:avLst/>
+          </a:prstGeom>
+          <a:noFill/>
+        </p:spPr>
+        <p:txBody>
+          <a:bodyPr wrap="square">
+            <a:spAutoFit/>
+          </a:bodyPr>
+          <a:lstStyle/>
+          <a:p>
+            <a:pPr algn="l"/>
+            <a:r>
+              <a:rPr sz="2200" b="0" i="0">
+                <a:solidFill>
+                  <a:srgbClr val="4C1D95"/>
+                </a:solidFill>
+              </a:rPr>
+              <a:t>⚙️</a:t>
+            </a:r>
+          </a:p>
+        </p:txBody>
+      </p:sp>
+      <p:sp>
+        <p:nvSpPr>
+          <p:cNvPr id="13" name="TextBox 12"/>
+          <p:cNvSpPr txBox="1"/>
+          <p:nvPr/>
+        </p:nvSpPr>
+        <p:spPr>
+          <a:xfrm>
+            <a:off x="7635240" y="2880360"/>
+            <a:ext cx="3108960" cy="457200"/>
+          </a:xfrm>
+          <a:prstGeom prst="rect">
+            <a:avLst/>
+          </a:prstGeom>
+          <a:noFill/>
+        </p:spPr>
+        <p:txBody>
+          <a:bodyPr wrap="square">
+            <a:spAutoFit/>
+          </a:bodyPr>
+          <a:lstStyle/>
+          <a:p>
+            <a:pPr algn="l"/>
+            <a:r>
+              <a:rPr sz="1600" b="1" i="0">
+                <a:solidFill>
+                  <a:srgbClr val="4C1D95"/>
+                </a:solidFill>
+              </a:rPr>
+              <a:t>FastAPI</a:t>
+            </a:r>
+          </a:p>
+        </p:txBody>
+      </p:sp>
+      <p:sp>
+        <p:nvSpPr>
+          <p:cNvPr id="14" name="TextBox 13"/>
+          <p:cNvSpPr txBox="1"/>
+          <p:nvPr/>
+        </p:nvSpPr>
+        <p:spPr>
+          <a:xfrm>
+            <a:off x="7635240" y="3383280"/>
+            <a:ext cx="3108960" cy="3749039"/>
+          </a:xfrm>
+          <a:prstGeom prst="rect">
+            <a:avLst/>
+          </a:prstGeom>
+          <a:noFill/>
+        </p:spPr>
+        <p:txBody>
+          <a:bodyPr wrap="square">
+            <a:spAutoFit/>
+          </a:bodyPr>
+          <a:lstStyle/>
+          <a:p>
+            <a:pPr algn="l"/>
+            <a:r>
+              <a:rPr sz="1150" b="0" i="0">
+                <a:solidFill>
+                  <a:srgbClr val="7C3AED"/>
+                </a:solidFill>
+              </a:rPr>
+              <a:t>POST /ingest
+POST /query
+DELETE /doc
+GET /doc/info
+GET /health
+asyncpg · uvicorn</a:t>
+            </a:r>
+          </a:p>
+        </p:txBody>
+      </p:sp>
+      <p:sp>
+        <p:nvSpPr>
+          <p:cNvPr id="15" name="Rectangle 14"/>
+          <p:cNvSpPr/>
+          <p:nvPr/>
+        </p:nvSpPr>
+        <p:spPr>
+          <a:xfrm>
+            <a:off x="14493240" y="3291840"/>
+            <a:ext cx="3474720" cy="3474720"/>
+          </a:xfrm>
+          <a:prstGeom prst="rect">
+            <a:avLst/>
+          </a:prstGeom>
+          <a:solidFill>
+            <a:srgbClr val="FFFFFF"/>
+          </a:solidFill>
+          <a:ln w="19050">
+            <a:solidFill>
+              <a:srgbClr val="4285F4"/>
+            </a:solidFill>
+          </a:ln>
+        </p:spPr>
+        <p:style>
+          <a:lnRef idx="1">
+            <a:schemeClr val="accent1"/>
+          </a:lnRef>
+          <a:fillRef idx="3">
+            <a:schemeClr val="accent1"/>
+          </a:fillRef>
+          <a:effectRef idx="2">
+            <a:schemeClr val="accent1"/>
+          </a:effectRef>
+          <a:fontRef idx="minor">
+            <a:schemeClr val="lt1"/>
+          </a:fontRef>
+        </p:style>
+        <p:txBody>
+          <a:bodyPr rtlCol="0" anchor="ctr"/>
+          <a:lstStyle/>
+          <a:p>
+            <a:pPr algn="ctr"/>
+          </a:p>
+        </p:txBody>
+      </p:sp>
+      <p:sp>
+        <p:nvSpPr>
+          <p:cNvPr id="16" name="Rectangle 15"/>
+          <p:cNvSpPr/>
+          <p:nvPr/>
+        </p:nvSpPr>
+        <p:spPr>
+          <a:xfrm>
+            <a:off x="14493240" y="3291840"/>
+            <a:ext cx="3474720" cy="54864"/>
+          </a:xfrm>
+          <a:prstGeom prst="rect">
+            <a:avLst/>
+          </a:prstGeom>
+          <a:solidFill>
+            <a:srgbClr val="4285F4"/>
+          </a:solidFill>
+          <a:ln>
+            <a:noFill/>
+          </a:ln>
+        </p:spPr>
+        <p:style>
+          <a:lnRef idx="1">
+            <a:schemeClr val="accent1"/>
+          </a:lnRef>
+          <a:fillRef idx="3">
+            <a:schemeClr val="accent1"/>
+          </a:fillRef>
+          <a:effectRef idx="2">
+            <a:schemeClr val="accent1"/>
+          </a:effectRef>
+          <a:fontRef idx="minor">
+            <a:schemeClr val="lt1"/>
+          </a:fontRef>
+        </p:style>
+        <p:txBody>
+          <a:bodyPr rtlCol="0" anchor="ctr"/>
+          <a:lstStyle/>
+          <a:p>
+            <a:pPr algn="ctr"/>
+          </a:p>
+        </p:txBody>
+      </p:sp>
+      <p:sp>
+        <p:nvSpPr>
+          <p:cNvPr id="17" name="TextBox 16"/>
+          <p:cNvSpPr txBox="1"/>
+          <p:nvPr/>
+        </p:nvSpPr>
+        <p:spPr>
+          <a:xfrm>
+            <a:off x="14721840" y="3456432"/>
+            <a:ext cx="3108960" cy="502920"/>
+          </a:xfrm>
+          <a:prstGeom prst="rect">
+            <a:avLst/>
+          </a:prstGeom>
+          <a:noFill/>
+        </p:spPr>
+        <p:txBody>
+          <a:bodyPr wrap="square">
+            <a:spAutoFit/>
+          </a:bodyPr>
+          <a:lstStyle/>
+          <a:p>
+            <a:pPr algn="l"/>
+            <a:r>
+              <a:rPr sz="2200" b="0" i="0">
+                <a:solidFill>
+                  <a:srgbClr val="4C1D95"/>
+                </a:solidFill>
+              </a:rPr>
+              <a:t>🧠</a:t>
+            </a:r>
+          </a:p>
+        </p:txBody>
+      </p:sp>
+      <p:sp>
+        <p:nvSpPr>
+          <p:cNvPr id="18" name="TextBox 17"/>
+          <p:cNvSpPr txBox="1"/>
+          <p:nvPr/>
+        </p:nvSpPr>
+        <p:spPr>
+          <a:xfrm>
+            <a:off x="14721840" y="3977639"/>
+            <a:ext cx="3108960" cy="457200"/>
+          </a:xfrm>
+          <a:prstGeom prst="rect">
+            <a:avLst/>
+          </a:prstGeom>
+          <a:noFill/>
+        </p:spPr>
+        <p:txBody>
+          <a:bodyPr wrap="square">
+            <a:spAutoFit/>
+          </a:bodyPr>
+          <a:lstStyle/>
+          <a:p>
+            <a:pPr algn="l"/>
+            <a:r>
+              <a:rPr sz="1600" b="1" i="0">
+                <a:solidFill>
+                  <a:srgbClr val="4C1D95"/>
+                </a:solidFill>
+              </a:rPr>
+              <a:t>Gemini API</a:t>
+            </a:r>
+          </a:p>
+        </p:txBody>
+      </p:sp>
+      <p:sp>
+        <p:nvSpPr>
+          <p:cNvPr id="19" name="TextBox 18"/>
+          <p:cNvSpPr txBox="1"/>
+          <p:nvPr/>
+        </p:nvSpPr>
+        <p:spPr>
+          <a:xfrm>
+            <a:off x="14721840" y="4480560"/>
+            <a:ext cx="3108960" cy="2103120"/>
+          </a:xfrm>
+          <a:prstGeom prst="rect">
+            <a:avLst/>
+          </a:prstGeom>
+          <a:noFill/>
+        </p:spPr>
+        <p:txBody>
+          <a:bodyPr wrap="square">
+            <a:spAutoFit/>
+          </a:bodyPr>
+          <a:lstStyle/>
+          <a:p>
+            <a:pPr algn="l"/>
+            <a:r>
+              <a:rPr sz="1150" b="0" i="0">
+                <a:solidFill>
+                  <a:srgbClr val="7C3AED"/>
+                </a:solidFill>
+              </a:rPr>
+              <a:t/>
+            </a:r>
+          </a:p>
+        </p:txBody>
+      </p:sp>
+      <p:sp>
+        <p:nvSpPr>
+          <p:cNvPr id="20" name="Rectangle 19"/>
+          <p:cNvSpPr/>
+          <p:nvPr/>
+        </p:nvSpPr>
+        <p:spPr>
+          <a:xfrm>
+            <a:off x="7406640" y="7863840"/>
+            <a:ext cx="3474720" cy="2103120"/>
+          </a:xfrm>
+          <a:prstGeom prst="rect">
+            <a:avLst/>
+          </a:prstGeom>
+          <a:solidFill>
+            <a:srgbClr val="FFFFFF"/>
+          </a:solidFill>
+          <a:ln w="19050">
+            <a:solidFill>
+              <a:srgbClr val="336791"/>
+            </a:solidFill>
+          </a:ln>
+        </p:spPr>
+        <p:style>
+          <a:lnRef idx="1">
+            <a:schemeClr val="accent1"/>
+          </a:lnRef>
+          <a:fillRef idx="3">
+            <a:schemeClr val="accent1"/>
+          </a:fillRef>
+          <a:effectRef idx="2">
+            <a:schemeClr val="accent1"/>
+          </a:effectRef>
+          <a:fontRef idx="minor">
+            <a:schemeClr val="lt1"/>
+          </a:fontRef>
+        </p:style>
+        <p:txBody>
+          <a:bodyPr rtlCol="0" anchor="ctr"/>
+          <a:lstStyle/>
+          <a:p>
+            <a:pPr algn="ctr"/>
+          </a:p>
+        </p:txBody>
+      </p:sp>
+      <p:sp>
+        <p:nvSpPr>
+          <p:cNvPr id="21" name="Rectangle 20"/>
+          <p:cNvSpPr/>
+          <p:nvPr/>
+        </p:nvSpPr>
+        <p:spPr>
+          <a:xfrm>
+            <a:off x="7406640" y="7863840"/>
+            <a:ext cx="3474720" cy="54864"/>
+          </a:xfrm>
+          <a:prstGeom prst="rect">
+            <a:avLst/>
+          </a:prstGeom>
+          <a:solidFill>
+            <a:srgbClr val="336791"/>
+          </a:solidFill>
+          <a:ln>
+            <a:noFill/>
+          </a:ln>
+        </p:spPr>
+        <p:style>
+          <a:lnRef idx="1">
+            <a:schemeClr val="accent1"/>
+          </a:lnRef>
+          <a:fillRef idx="3">
+            <a:schemeClr val="accent1"/>
+          </a:fillRef>
+          <a:effectRef idx="2">
+            <a:schemeClr val="accent1"/>
+          </a:effectRef>
+          <a:fontRef idx="minor">
+            <a:schemeClr val="lt1"/>
+          </a:fontRef>
+        </p:style>
+        <p:txBody>
+          <a:bodyPr rtlCol="0" anchor="ctr"/>
+          <a:lstStyle/>
+          <a:p>
+            <a:pPr algn="ctr"/>
+          </a:p>
+        </p:txBody>
+      </p:sp>
+      <p:sp>
+        <p:nvSpPr>
+          <p:cNvPr id="22" name="TextBox 21"/>
+          <p:cNvSpPr txBox="1"/>
+          <p:nvPr/>
+        </p:nvSpPr>
+        <p:spPr>
+          <a:xfrm>
+            <a:off x="7635240" y="8028431"/>
+            <a:ext cx="3108960" cy="502920"/>
+          </a:xfrm>
+          <a:prstGeom prst="rect">
+            <a:avLst/>
+          </a:prstGeom>
+          <a:noFill/>
+        </p:spPr>
+        <p:txBody>
+          <a:bodyPr wrap="square">
+            <a:spAutoFit/>
+          </a:bodyPr>
+          <a:lstStyle/>
+          <a:p>
+            <a:pPr algn="l"/>
+            <a:r>
+              <a:rPr sz="2200" b="0" i="0">
+                <a:solidFill>
+                  <a:srgbClr val="4C1D95"/>
+                </a:solidFill>
+              </a:rPr>
+              <a:t>🗄️</a:t>
+            </a:r>
+          </a:p>
+        </p:txBody>
+      </p:sp>
+      <p:sp>
+        <p:nvSpPr>
+          <p:cNvPr id="23" name="TextBox 22"/>
+          <p:cNvSpPr txBox="1"/>
+          <p:nvPr/>
+        </p:nvSpPr>
+        <p:spPr>
+          <a:xfrm>
+            <a:off x="7635240" y="8549640"/>
+            <a:ext cx="3108960" cy="457200"/>
+          </a:xfrm>
+          <a:prstGeom prst="rect">
+            <a:avLst/>
+          </a:prstGeom>
+          <a:noFill/>
+        </p:spPr>
+        <p:txBody>
+          <a:bodyPr wrap="square">
+            <a:spAutoFit/>
+          </a:bodyPr>
+          <a:lstStyle/>
+          <a:p>
+            <a:pPr algn="l"/>
+            <a:r>
+              <a:rPr sz="1600" b="1" i="0">
+                <a:solidFill>
+                  <a:srgbClr val="4C1D95"/>
+                </a:solidFill>
+              </a:rPr>
+              <a:t>PostgreSQL + pgvector</a:t>
+            </a:r>
+          </a:p>
+        </p:txBody>
+      </p:sp>
+      <p:sp>
+        <p:nvSpPr>
+          <p:cNvPr id="24" name="TextBox 23"/>
+          <p:cNvSpPr txBox="1"/>
+          <p:nvPr/>
+        </p:nvSpPr>
+        <p:spPr>
+          <a:xfrm>
+            <a:off x="7635240" y="9052560"/>
+            <a:ext cx="3108960" cy="731519"/>
+          </a:xfrm>
+          <a:prstGeom prst="rect">
+            <a:avLst/>
+          </a:prstGeom>
+          <a:noFill/>
+        </p:spPr>
+        <p:txBody>
+          <a:bodyPr wrap="square">
+            <a:spAutoFit/>
+          </a:bodyPr>
+          <a:lstStyle/>
+          <a:p>
+            <a:pPr algn="l"/>
+            <a:r>
+              <a:rPr sz="1150" b="0" i="0">
+                <a:solidFill>
+                  <a:srgbClr val="7C3AED"/>
+                </a:solidFill>
+              </a:rPr>
+              <a:t>chunks · doc_meta
+HNSW cosine · tsvector BM25
+RRF fusion</a:t>
+            </a:r>
+          </a:p>
+        </p:txBody>
+      </p:sp>
+      <p:cxnSp>
+        <p:nvCxnSpPr>
+          <p:cNvPr id="25" name="Connector 24"/>
+          <p:cNvCxnSpPr/>
+          <p:nvPr/>
+        </p:nvCxnSpPr>
+        <p:spPr>
+          <a:xfrm>
+            <a:off x="3794759" y="4297680"/>
+            <a:ext cx="3611881" cy="0"/>
+          </a:xfrm>
+          <a:prstGeom prst="line">
+            <a:avLst/>
+          </a:prstGeom>
+          <a:ln w="25400">
+            <a:solidFill>
+              <a:srgbClr val="7C3AED"/>
+            </a:solidFill>
+            <a:tailEnd type="arrow" w="med" len="med"/>
+          </a:ln>
+        </p:spPr>
+        <p:style>
+          <a:lnRef idx="2">
+            <a:schemeClr val="accent1"/>
+          </a:lnRef>
+          <a:fillRef idx="0">
+            <a:schemeClr val="accent1"/>
+          </a:fillRef>
+          <a:effectRef idx="1">
+            <a:schemeClr val="accent1"/>
+          </a:effectRef>
+          <a:fontRef idx="minor">
+            <a:schemeClr val="tx1"/>
+          </a:fontRef>
+        </p:style>
+      </p:cxnSp>
+      <p:sp>
+        <p:nvSpPr>
+          <p:cNvPr id="26" name="TextBox 25"/>
+          <p:cNvSpPr txBox="1"/>
+          <p:nvPr/>
+        </p:nvSpPr>
+        <p:spPr>
+          <a:xfrm>
+            <a:off x="3840479" y="3977640"/>
+            <a:ext cx="3520440" cy="292608"/>
+          </a:xfrm>
+          <a:prstGeom prst="rect">
+            <a:avLst/>
+          </a:prstGeom>
+          <a:noFill/>
+        </p:spPr>
+        <p:txBody>
+          <a:bodyPr wrap="square">
+            <a:spAutoFit/>
+          </a:bodyPr>
+          <a:lstStyle/>
+          <a:p>
+            <a:pPr algn="ctr"/>
+            <a:r>
+              <a:rPr sz="1000" b="0" i="1">
+                <a:solidFill>
+                  <a:srgbClr val="64748B"/>
+                </a:solidFill>
+              </a:rPr>
+              <a:t>upload PDF / query</a:t>
+            </a:r>
+          </a:p>
+        </p:txBody>
+      </p:sp>
+      <p:cxnSp>
+        <p:nvCxnSpPr>
+          <p:cNvPr id="27" name="Connector 26"/>
+          <p:cNvCxnSpPr/>
+          <p:nvPr/>
+        </p:nvCxnSpPr>
+        <p:spPr>
+          <a:xfrm flipH="1">
+            <a:off x="3794759" y="5486400"/>
+            <a:ext cx="3611881" cy="0"/>
+          </a:xfrm>
+          <a:prstGeom prst="line">
+            <a:avLst/>
+          </a:prstGeom>
+          <a:ln w="25400">
+            <a:solidFill>
+              <a:srgbClr val="059669"/>
+            </a:solidFill>
+            <a:tailEnd type="arrow" w="med" len="med"/>
+          </a:ln>
+        </p:spPr>
+        <p:style>
+          <a:lnRef idx="2">
+            <a:schemeClr val="accent1"/>
+          </a:lnRef>
+          <a:fillRef idx="0">
+            <a:schemeClr val="accent1"/>
+          </a:fillRef>
+          <a:effectRef idx="1">
+            <a:schemeClr val="accent1"/>
+          </a:effectRef>
+          <a:fontRef idx="minor">
+            <a:schemeClr val="tx1"/>
+          </a:fontRef>
+        </p:style>
+      </p:cxnSp>
+      <p:sp>
+        <p:nvSpPr>
+          <p:cNvPr id="28" name="TextBox 27"/>
+          <p:cNvSpPr txBox="1"/>
+          <p:nvPr/>
+        </p:nvSpPr>
+        <p:spPr>
+          <a:xfrm>
+            <a:off x="3840479" y="5559552"/>
+            <a:ext cx="3520440" cy="292608"/>
+          </a:xfrm>
+          <a:prstGeom prst="rect">
+            <a:avLst/>
+          </a:prstGeom>
+          <a:noFill/>
+        </p:spPr>
+        <p:txBody>
+          <a:bodyPr wrap="square">
+            <a:spAutoFit/>
+          </a:bodyPr>
+          <a:lstStyle/>
+          <a:p>
+            <a:pPr algn="ctr"/>
+            <a:r>
+              <a:rPr sz="1000" b="0" i="1">
+                <a:solidFill>
+                  <a:srgbClr val="64748B"/>
+                </a:solidFill>
+              </a:rPr>
+              <a:t>SSE stream</a:t>
+            </a:r>
+          </a:p>
+        </p:txBody>
+      </p:sp>
+      <p:cxnSp>
+        <p:nvCxnSpPr>
+          <p:cNvPr id="29" name="Connector 28"/>
+          <p:cNvCxnSpPr/>
+          <p:nvPr/>
+        </p:nvCxnSpPr>
+        <p:spPr>
+          <a:xfrm>
+            <a:off x="10881359" y="4297680"/>
+            <a:ext cx="3611881" cy="0"/>
+          </a:xfrm>
+          <a:prstGeom prst="line">
+            <a:avLst/>
+          </a:prstGeom>
+          <a:ln w="25400">
+            <a:solidFill>
+              <a:srgbClr val="4285F4"/>
+            </a:solidFill>
+            <a:tailEnd type="arrow" w="med" len="med"/>
+          </a:ln>
+        </p:spPr>
+        <p:style>
+          <a:lnRef idx="2">
+            <a:schemeClr val="accent1"/>
+          </a:lnRef>
+          <a:fillRef idx="0">
+            <a:schemeClr val="accent1"/>
+          </a:fillRef>
+          <a:effectRef idx="1">
+            <a:schemeClr val="accent1"/>
+          </a:effectRef>
+          <a:fontRef idx="minor">
+            <a:schemeClr val="tx1"/>
+          </a:fontRef>
+        </p:style>
+      </p:cxnSp>
+      <p:sp>
+        <p:nvSpPr>
+          <p:cNvPr id="30" name="TextBox 29"/>
+          <p:cNvSpPr txBox="1"/>
+          <p:nvPr/>
+        </p:nvSpPr>
+        <p:spPr>
+          <a:xfrm>
+            <a:off x="10927080" y="3977640"/>
+            <a:ext cx="3520440" cy="292608"/>
+          </a:xfrm>
+          <a:prstGeom prst="rect">
+            <a:avLst/>
+          </a:prstGeom>
+          <a:noFill/>
+        </p:spPr>
+        <p:txBody>
+          <a:bodyPr wrap="square">
+            <a:spAutoFit/>
+          </a:bodyPr>
+          <a:lstStyle/>
+          <a:p>
+            <a:pPr algn="ctr"/>
+            <a:r>
+              <a:rPr sz="1000" b="0" i="1">
+                <a:solidFill>
+                  <a:srgbClr val="64748B"/>
+                </a:solidFill>
+              </a:rPr>
+              <a:t>embed / answer</a:t>
+            </a:r>
+          </a:p>
+        </p:txBody>
+      </p:sp>
+      <p:cxnSp>
+        <p:nvCxnSpPr>
+          <p:cNvPr id="31" name="Connector 30"/>
+          <p:cNvCxnSpPr/>
+          <p:nvPr/>
+        </p:nvCxnSpPr>
+        <p:spPr>
+          <a:xfrm flipH="1">
+            <a:off x="10881359" y="5577840"/>
+            <a:ext cx="3611881" cy="0"/>
+          </a:xfrm>
+          <a:prstGeom prst="line">
+            <a:avLst/>
+          </a:prstGeom>
+          <a:ln w="25400">
+            <a:solidFill>
+              <a:srgbClr val="4285F4"/>
+            </a:solidFill>
+            <a:tailEnd type="arrow" w="med" len="med"/>
+          </a:ln>
+        </p:spPr>
+        <p:style>
+          <a:lnRef idx="2">
+            <a:schemeClr val="accent1"/>
+          </a:lnRef>
+          <a:fillRef idx="0">
+            <a:schemeClr val="accent1"/>
+          </a:fillRef>
+          <a:effectRef idx="1">
+            <a:schemeClr val="accent1"/>
+          </a:effectRef>
+          <a:fontRef idx="minor">
+            <a:schemeClr val="tx1"/>
+          </a:fontRef>
+        </p:style>
+      </p:cxnSp>
+      <p:sp>
+        <p:nvSpPr>
+          <p:cNvPr id="32" name="TextBox 31"/>
+          <p:cNvSpPr txBox="1"/>
+          <p:nvPr/>
+        </p:nvSpPr>
+        <p:spPr>
+          <a:xfrm>
+            <a:off x="10927080" y="5650992"/>
+            <a:ext cx="3520440" cy="292608"/>
+          </a:xfrm>
+          <a:prstGeom prst="rect">
+            <a:avLst/>
+          </a:prstGeom>
+          <a:noFill/>
+        </p:spPr>
+        <p:txBody>
+          <a:bodyPr wrap="square">
+            <a:spAutoFit/>
+          </a:bodyPr>
+          <a:lstStyle/>
+          <a:p>
+            <a:pPr algn="ctr"/>
+            <a:r>
+              <a:rPr sz="1000" b="0" i="1">
+                <a:solidFill>
+                  <a:srgbClr val="64748B"/>
+                </a:solidFill>
+              </a:rPr>
+              <a:t>embeddings / tokens</a:t>
+            </a:r>
+          </a:p>
+        </p:txBody>
+      </p:sp>
+      <p:cxnSp>
+        <p:nvCxnSpPr>
+          <p:cNvPr id="33" name="Connector 32"/>
+          <p:cNvCxnSpPr/>
+          <p:nvPr/>
+        </p:nvCxnSpPr>
+        <p:spPr>
+          <a:xfrm>
+            <a:off x="9144000" y="7315200"/>
+            <a:ext cx="0" cy="548640"/>
+          </a:xfrm>
+          <a:prstGeom prst="line">
+            <a:avLst/>
+          </a:prstGeom>
+          <a:ln w="25400">
+            <a:solidFill>
+              <a:srgbClr val="336791"/>
+            </a:solidFill>
+            <a:tailEnd type="arrow" w="med" len="med"/>
+          </a:ln>
+        </p:spPr>
+        <p:style>
+          <a:lnRef idx="2">
+            <a:schemeClr val="accent1"/>
+          </a:lnRef>
+          <a:fillRef idx="0">
+            <a:schemeClr val="accent1"/>
+          </a:fillRef>
+          <a:effectRef idx="1">
+            <a:schemeClr val="accent1"/>
+          </a:effectRef>
+          <a:fontRef idx="minor">
+            <a:schemeClr val="tx1"/>
+          </a:fontRef>
+        </p:style>
+      </p:cxnSp>
+      <p:sp>
+        <p:nvSpPr>
+          <p:cNvPr id="34" name="TextBox 33"/>
+          <p:cNvSpPr txBox="1"/>
+          <p:nvPr/>
+        </p:nvSpPr>
+        <p:spPr>
+          <a:xfrm>
+            <a:off x="9235440" y="7424928"/>
+            <a:ext cx="2011680" cy="329184"/>
+          </a:xfrm>
+          <a:prstGeom prst="rect">
+            <a:avLst/>
+          </a:prstGeom>
+          <a:noFill/>
+        </p:spPr>
+        <p:txBody>
+          <a:bodyPr wrap="square">
+            <a:spAutoFit/>
+          </a:bodyPr>
+          <a:lstStyle/>
+          <a:p>
+            <a:pPr algn="l"/>
+            <a:r>
+              <a:rPr sz="1000" b="0" i="1">
+                <a:solidFill>
+                  <a:srgbClr val="64748B"/>
+                </a:solidFill>
+              </a:rPr>
+              <a:t>store &amp; retrieve</a:t>
+            </a:r>
+          </a:p>
+        </p:txBody>
+      </p:sp>
+      <p:sp>
+        <p:nvSpPr>
+          <p:cNvPr id="35" name="TextBox 34"/>
+          <p:cNvSpPr txBox="1"/>
+          <p:nvPr/>
+        </p:nvSpPr>
+        <p:spPr>
+          <a:xfrm>
+            <a:off x="457200" y="10058400"/>
+            <a:ext cx="17373600" cy="274320"/>
+          </a:xfrm>
+          <a:prstGeom prst="rect">
+            <a:avLst/>
+          </a:prstGeom>
+          <a:noFill/>
+        </p:spPr>
+        <p:txBody>
+          <a:bodyPr wrap="none">
+            <a:spAutoFit/>
+          </a:bodyPr>
+          <a:lstStyle/>
+          <a:p>
+            <a:pPr algn="l"/>
+            <a:r>
+              <a:rPr sz="900" b="0" i="0">
+                <a:solidFill>
+                  <a:srgbClr val="94A3B8"/>
+                </a:solidFill>
+              </a:rPr>
+              <a:t>Ingest flow: Browser → FastAPI → Gemini (embed) → Postgres (store)   Query flow: Browser → FastAPI → Postgres (hybrid search) → Gemini (+answer) → Browser (SSE)</a:t>
+            </a:r>
+          </a:p>
+        </p:txBody>
+      </p:sp>
+    </p:spTree>
+  </p:cSld>
+  <p:clrMapOvr>
+    <a:masterClrMapping/>
+  </p:clrMapOvr>
+</p:sld>
+</file>
+
+<file path=ppt/slides/slide14.xml><?xml version="1.0" encoding="utf-8"?>
 <p:sld xmlns:p="http://schemas.openxmlformats.org/presentationml/2006/main" xmlns:a="http://schemas.openxmlformats.org/drawingml/2006/main">
   <p:cSld>
     <p:spTree>
@@ -7437,2373 +9801,6 @@
 </p:sld>
 </file>
 
-<file path=ppt/slides/slide13.xml><?xml version="1.0" encoding="utf-8"?>
-<p:sld xmlns:a="http://schemas.openxmlformats.org/drawingml/2006/main" xmlns:p="http://schemas.openxmlformats.org/presentationml/2006/main" xmlns:r="http://schemas.openxmlformats.org/officeDocument/2006/relationships">
-  <p:cSld>
-    <p:bg>
-      <p:bgPr>
-        <a:solidFill>
-          <a:srgbClr val="FFFFFF"/>
-        </a:solidFill>
-        <a:effectLst/>
-      </p:bgPr>
-    </p:bg>
-    <p:spTree>
-      <p:nvGrpSpPr>
-        <p:cNvPr id="1" name=""/>
-        <p:cNvGrpSpPr/>
-        <p:nvPr/>
-      </p:nvGrpSpPr>
-      <p:grpSpPr/>
-      <p:sp>
-        <p:nvSpPr>
-          <p:cNvPr id="2" name="TextBox 1"/>
-          <p:cNvSpPr txBox="1"/>
-          <p:nvPr/>
-        </p:nvSpPr>
-        <p:spPr>
-          <a:xfrm>
-            <a:off x="914400" y="484632"/>
-            <a:ext cx="16285463" cy="429768"/>
-          </a:xfrm>
-          <a:prstGeom prst="rect">
-            <a:avLst/>
-          </a:prstGeom>
-          <a:noFill/>
-        </p:spPr>
-        <p:txBody>
-          <a:bodyPr wrap="square">
-            <a:spAutoFit/>
-          </a:bodyPr>
-          <a:lstStyle/>
-          <a:p>
-            <a:pPr algn="l"/>
-            <a:r>
-              <a:rPr sz="1400" b="1" i="0">
-                <a:solidFill>
-                  <a:srgbClr val="7C3AED"/>
-                </a:solidFill>
-              </a:rPr>
-              <a:t>LIMITATIONS</a:t>
-            </a:r>
-          </a:p>
-        </p:txBody>
-      </p:sp>
-      <p:sp>
-        <p:nvSpPr>
-          <p:cNvPr id="3" name="TextBox 2"/>
-          <p:cNvSpPr txBox="1"/>
-          <p:nvPr/>
-        </p:nvSpPr>
-        <p:spPr>
-          <a:xfrm>
-            <a:off x="914400" y="987552"/>
-            <a:ext cx="16285463" cy="502920"/>
-          </a:xfrm>
-          <a:prstGeom prst="rect">
-            <a:avLst/>
-          </a:prstGeom>
-          <a:noFill/>
-        </p:spPr>
-        <p:txBody>
-          <a:bodyPr wrap="square">
-            <a:spAutoFit/>
-          </a:bodyPr>
-          <a:lstStyle/>
-          <a:p>
-            <a:pPr algn="l"/>
-            <a:r>
-              <a:rPr sz="2800" b="1" i="0">
-                <a:solidFill>
-                  <a:srgbClr val="4C1D95"/>
-                </a:solidFill>
-              </a:rPr>
-              <a:t>Current scope — known constraints</a:t>
-            </a:r>
-          </a:p>
-        </p:txBody>
-      </p:sp>
-      <p:sp>
-        <p:nvSpPr>
-          <p:cNvPr id="4" name="Rectangle 3"/>
-          <p:cNvSpPr/>
-          <p:nvPr/>
-        </p:nvSpPr>
-        <p:spPr>
-          <a:xfrm>
-            <a:off x="822960" y="1856231"/>
-            <a:ext cx="16651224" cy="54864"/>
-          </a:xfrm>
-          <a:prstGeom prst="rect">
-            <a:avLst/>
-          </a:prstGeom>
-          <a:solidFill>
-            <a:srgbClr val="EF4444"/>
-          </a:solidFill>
-          <a:ln>
-            <a:noFill/>
-          </a:ln>
-        </p:spPr>
-        <p:style>
-          <a:lnRef idx="1">
-            <a:schemeClr val="accent1"/>
-          </a:lnRef>
-          <a:fillRef idx="3">
-            <a:schemeClr val="accent1"/>
-          </a:fillRef>
-          <a:effectRef idx="2">
-            <a:schemeClr val="accent1"/>
-          </a:effectRef>
-          <a:fontRef idx="minor">
-            <a:schemeClr val="lt1"/>
-          </a:fontRef>
-        </p:style>
-        <p:txBody>
-          <a:bodyPr rtlCol="0" anchor="ctr"/>
-          <a:lstStyle/>
-          <a:p>
-            <a:pPr algn="ctr"/>
-          </a:p>
-        </p:txBody>
-      </p:sp>
-      <p:sp>
-        <p:nvSpPr>
-          <p:cNvPr id="5" name="Rectangle 4"/>
-          <p:cNvSpPr/>
-          <p:nvPr/>
-        </p:nvSpPr>
-        <p:spPr>
-          <a:xfrm>
-            <a:off x="402336" y="2185416"/>
-            <a:ext cx="5303520" cy="3447288"/>
-          </a:xfrm>
-          <a:prstGeom prst="rect">
-            <a:avLst/>
-          </a:prstGeom>
-          <a:solidFill>
-            <a:srgbClr val="FFFFFF"/>
-          </a:solidFill>
-          <a:ln w="6350">
-            <a:solidFill>
-              <a:srgbClr val="E2E8F0"/>
-            </a:solidFill>
-          </a:ln>
-        </p:spPr>
-        <p:style>
-          <a:lnRef idx="1">
-            <a:schemeClr val="accent1"/>
-          </a:lnRef>
-          <a:fillRef idx="3">
-            <a:schemeClr val="accent1"/>
-          </a:fillRef>
-          <a:effectRef idx="2">
-            <a:schemeClr val="accent1"/>
-          </a:effectRef>
-          <a:fontRef idx="minor">
-            <a:schemeClr val="lt1"/>
-          </a:fontRef>
-        </p:style>
-        <p:txBody>
-          <a:bodyPr rtlCol="0" anchor="ctr"/>
-          <a:lstStyle/>
-          <a:p>
-            <a:pPr algn="ctr"/>
-          </a:p>
-        </p:txBody>
-      </p:sp>
-      <p:sp>
-        <p:nvSpPr>
-          <p:cNvPr id="6" name="Rectangle 5"/>
-          <p:cNvSpPr/>
-          <p:nvPr/>
-        </p:nvSpPr>
-        <p:spPr>
-          <a:xfrm>
-            <a:off x="402336" y="2185416"/>
-            <a:ext cx="5303520" cy="64008"/>
-          </a:xfrm>
-          <a:prstGeom prst="rect">
-            <a:avLst/>
-          </a:prstGeom>
-          <a:solidFill>
-            <a:srgbClr val="EF4444"/>
-          </a:solidFill>
-          <a:ln>
-            <a:noFill/>
-          </a:ln>
-        </p:spPr>
-        <p:style>
-          <a:lnRef idx="1">
-            <a:schemeClr val="accent1"/>
-          </a:lnRef>
-          <a:fillRef idx="3">
-            <a:schemeClr val="accent1"/>
-          </a:fillRef>
-          <a:effectRef idx="2">
-            <a:schemeClr val="accent1"/>
-          </a:effectRef>
-          <a:fontRef idx="minor">
-            <a:schemeClr val="lt1"/>
-          </a:fontRef>
-        </p:style>
-        <p:txBody>
-          <a:bodyPr rtlCol="0" anchor="ctr"/>
-          <a:lstStyle/>
-          <a:p>
-            <a:pPr algn="ctr"/>
-          </a:p>
-        </p:txBody>
-      </p:sp>
-      <p:sp>
-        <p:nvSpPr>
-          <p:cNvPr id="7" name="TextBox 6"/>
-          <p:cNvSpPr txBox="1"/>
-          <p:nvPr/>
-        </p:nvSpPr>
-        <p:spPr>
-          <a:xfrm>
-            <a:off x="704088" y="2359152"/>
-            <a:ext cx="4892040" cy="466344"/>
-          </a:xfrm>
-          <a:prstGeom prst="rect">
-            <a:avLst/>
-          </a:prstGeom>
-          <a:noFill/>
-        </p:spPr>
-        <p:txBody>
-          <a:bodyPr wrap="square">
-            <a:spAutoFit/>
-          </a:bodyPr>
-          <a:lstStyle/>
-          <a:p>
-            <a:pPr algn="l"/>
-            <a:r>
-              <a:rPr sz="1500" b="1" i="0">
-                <a:solidFill>
-                  <a:srgbClr val="4C1D95"/>
-                </a:solidFill>
-              </a:rPr>
-              <a:t>🚫  Single Document Only</a:t>
-            </a:r>
-          </a:p>
-        </p:txBody>
-      </p:sp>
-      <p:sp>
-        <p:nvSpPr>
-          <p:cNvPr id="8" name="TextBox 7"/>
-          <p:cNvSpPr txBox="1"/>
-          <p:nvPr/>
-        </p:nvSpPr>
-        <p:spPr>
-          <a:xfrm>
-            <a:off x="704088" y="2962656"/>
-            <a:ext cx="4892040" cy="2414016"/>
-          </a:xfrm>
-          <a:prstGeom prst="rect">
-            <a:avLst/>
-          </a:prstGeom>
-          <a:noFill/>
-        </p:spPr>
-        <p:txBody>
-          <a:bodyPr wrap="square">
-            <a:spAutoFit/>
-          </a:bodyPr>
-          <a:lstStyle/>
-          <a:p>
-            <a:pPr algn="l"/>
-            <a:r>
-              <a:rPr sz="1250" b="0" i="0">
-                <a:solidFill>
-                  <a:srgbClr val="7C3AED"/>
-                </a:solidFill>
-              </a:rPr>
-              <a:t>One PDF at a time. Uploading a new document wipes the previous one — no multi-doc library or cross-document queries.</a:t>
-            </a:r>
-          </a:p>
-        </p:txBody>
-      </p:sp>
-      <p:sp>
-        <p:nvSpPr>
-          <p:cNvPr id="9" name="Rectangle 8"/>
-          <p:cNvSpPr/>
-          <p:nvPr/>
-        </p:nvSpPr>
-        <p:spPr>
-          <a:xfrm>
-            <a:off x="6117336" y="2185416"/>
-            <a:ext cx="5303520" cy="3447288"/>
-          </a:xfrm>
-          <a:prstGeom prst="rect">
-            <a:avLst/>
-          </a:prstGeom>
-          <a:solidFill>
-            <a:srgbClr val="FFFFFF"/>
-          </a:solidFill>
-          <a:ln w="6350">
-            <a:solidFill>
-              <a:srgbClr val="E2E8F0"/>
-            </a:solidFill>
-          </a:ln>
-        </p:spPr>
-        <p:style>
-          <a:lnRef idx="1">
-            <a:schemeClr val="accent1"/>
-          </a:lnRef>
-          <a:fillRef idx="3">
-            <a:schemeClr val="accent1"/>
-          </a:fillRef>
-          <a:effectRef idx="2">
-            <a:schemeClr val="accent1"/>
-          </a:effectRef>
-          <a:fontRef idx="minor">
-            <a:schemeClr val="lt1"/>
-          </a:fontRef>
-        </p:style>
-        <p:txBody>
-          <a:bodyPr rtlCol="0" anchor="ctr"/>
-          <a:lstStyle/>
-          <a:p>
-            <a:pPr algn="ctr"/>
-          </a:p>
-        </p:txBody>
-      </p:sp>
-      <p:sp>
-        <p:nvSpPr>
-          <p:cNvPr id="10" name="Rectangle 9"/>
-          <p:cNvSpPr/>
-          <p:nvPr/>
-        </p:nvSpPr>
-        <p:spPr>
-          <a:xfrm>
-            <a:off x="6117336" y="2185416"/>
-            <a:ext cx="5303520" cy="64008"/>
-          </a:xfrm>
-          <a:prstGeom prst="rect">
-            <a:avLst/>
-          </a:prstGeom>
-          <a:solidFill>
-            <a:srgbClr val="EF4444"/>
-          </a:solidFill>
-          <a:ln>
-            <a:noFill/>
-          </a:ln>
-        </p:spPr>
-        <p:style>
-          <a:lnRef idx="1">
-            <a:schemeClr val="accent1"/>
-          </a:lnRef>
-          <a:fillRef idx="3">
-            <a:schemeClr val="accent1"/>
-          </a:fillRef>
-          <a:effectRef idx="2">
-            <a:schemeClr val="accent1"/>
-          </a:effectRef>
-          <a:fontRef idx="minor">
-            <a:schemeClr val="lt1"/>
-          </a:fontRef>
-        </p:style>
-        <p:txBody>
-          <a:bodyPr rtlCol="0" anchor="ctr"/>
-          <a:lstStyle/>
-          <a:p>
-            <a:pPr algn="ctr"/>
-          </a:p>
-        </p:txBody>
-      </p:sp>
-      <p:sp>
-        <p:nvSpPr>
-          <p:cNvPr id="11" name="TextBox 10"/>
-          <p:cNvSpPr txBox="1"/>
-          <p:nvPr/>
-        </p:nvSpPr>
-        <p:spPr>
-          <a:xfrm>
-            <a:off x="6419088" y="2359152"/>
-            <a:ext cx="4892040" cy="466344"/>
-          </a:xfrm>
-          <a:prstGeom prst="rect">
-            <a:avLst/>
-          </a:prstGeom>
-          <a:noFill/>
-        </p:spPr>
-        <p:txBody>
-          <a:bodyPr wrap="square">
-            <a:spAutoFit/>
-          </a:bodyPr>
-          <a:lstStyle/>
-          <a:p>
-            <a:pPr algn="l"/>
-            <a:r>
-              <a:rPr sz="1500" b="1" i="0">
-                <a:solidFill>
-                  <a:srgbClr val="4C1D95"/>
-                </a:solidFill>
-              </a:rPr>
-              <a:t>🔍  No Scanned PDF / OCR</a:t>
-            </a:r>
-          </a:p>
-        </p:txBody>
-      </p:sp>
-      <p:sp>
-        <p:nvSpPr>
-          <p:cNvPr id="12" name="TextBox 11"/>
-          <p:cNvSpPr txBox="1"/>
-          <p:nvPr/>
-        </p:nvSpPr>
-        <p:spPr>
-          <a:xfrm>
-            <a:off x="6419088" y="2962656"/>
-            <a:ext cx="4892040" cy="2414016"/>
-          </a:xfrm>
-          <a:prstGeom prst="rect">
-            <a:avLst/>
-          </a:prstGeom>
-          <a:noFill/>
-        </p:spPr>
-        <p:txBody>
-          <a:bodyPr wrap="square">
-            <a:spAutoFit/>
-          </a:bodyPr>
-          <a:lstStyle/>
-          <a:p>
-            <a:pPr algn="l"/>
-            <a:r>
-              <a:rPr sz="1250" b="0" i="0">
-                <a:solidFill>
-                  <a:srgbClr val="7C3AED"/>
-                </a:solidFill>
-              </a:rPr>
-              <a:t>PyMuPDF extracts text from digital PDFs only. Image-based or scanned pages return empty text — no Tesseract / Vision fallback.</a:t>
-            </a:r>
-          </a:p>
-        </p:txBody>
-      </p:sp>
-      <p:sp>
-        <p:nvSpPr>
-          <p:cNvPr id="13" name="Rectangle 12"/>
-          <p:cNvSpPr/>
-          <p:nvPr/>
-        </p:nvSpPr>
-        <p:spPr>
-          <a:xfrm>
-            <a:off x="11832336" y="2185416"/>
-            <a:ext cx="5303520" cy="3447288"/>
-          </a:xfrm>
-          <a:prstGeom prst="rect">
-            <a:avLst/>
-          </a:prstGeom>
-          <a:solidFill>
-            <a:srgbClr val="FFFFFF"/>
-          </a:solidFill>
-          <a:ln w="6350">
-            <a:solidFill>
-              <a:srgbClr val="E2E8F0"/>
-            </a:solidFill>
-          </a:ln>
-        </p:spPr>
-        <p:style>
-          <a:lnRef idx="1">
-            <a:schemeClr val="accent1"/>
-          </a:lnRef>
-          <a:fillRef idx="3">
-            <a:schemeClr val="accent1"/>
-          </a:fillRef>
-          <a:effectRef idx="2">
-            <a:schemeClr val="accent1"/>
-          </a:effectRef>
-          <a:fontRef idx="minor">
-            <a:schemeClr val="lt1"/>
-          </a:fontRef>
-        </p:style>
-        <p:txBody>
-          <a:bodyPr rtlCol="0" anchor="ctr"/>
-          <a:lstStyle/>
-          <a:p>
-            <a:pPr algn="ctr"/>
-          </a:p>
-        </p:txBody>
-      </p:sp>
-      <p:sp>
-        <p:nvSpPr>
-          <p:cNvPr id="14" name="Rectangle 13"/>
-          <p:cNvSpPr/>
-          <p:nvPr/>
-        </p:nvSpPr>
-        <p:spPr>
-          <a:xfrm>
-            <a:off x="11832336" y="2185416"/>
-            <a:ext cx="5303520" cy="64008"/>
-          </a:xfrm>
-          <a:prstGeom prst="rect">
-            <a:avLst/>
-          </a:prstGeom>
-          <a:solidFill>
-            <a:srgbClr val="EF4444"/>
-          </a:solidFill>
-          <a:ln>
-            <a:noFill/>
-          </a:ln>
-        </p:spPr>
-        <p:style>
-          <a:lnRef idx="1">
-            <a:schemeClr val="accent1"/>
-          </a:lnRef>
-          <a:fillRef idx="3">
-            <a:schemeClr val="accent1"/>
-          </a:fillRef>
-          <a:effectRef idx="2">
-            <a:schemeClr val="accent1"/>
-          </a:effectRef>
-          <a:fontRef idx="minor">
-            <a:schemeClr val="lt1"/>
-          </a:fontRef>
-        </p:style>
-        <p:txBody>
-          <a:bodyPr rtlCol="0" anchor="ctr"/>
-          <a:lstStyle/>
-          <a:p>
-            <a:pPr algn="ctr"/>
-          </a:p>
-        </p:txBody>
-      </p:sp>
-      <p:sp>
-        <p:nvSpPr>
-          <p:cNvPr id="15" name="TextBox 14"/>
-          <p:cNvSpPr txBox="1"/>
-          <p:nvPr/>
-        </p:nvSpPr>
-        <p:spPr>
-          <a:xfrm>
-            <a:off x="12134088" y="2359152"/>
-            <a:ext cx="4892040" cy="466344"/>
-          </a:xfrm>
-          <a:prstGeom prst="rect">
-            <a:avLst/>
-          </a:prstGeom>
-          <a:noFill/>
-        </p:spPr>
-        <p:txBody>
-          <a:bodyPr wrap="square">
-            <a:spAutoFit/>
-          </a:bodyPr>
-          <a:lstStyle/>
-          <a:p>
-            <a:pPr algn="l"/>
-            <a:r>
-              <a:rPr sz="1500" b="1" i="0">
-                <a:solidFill>
-                  <a:srgbClr val="4C1D95"/>
-                </a:solidFill>
-              </a:rPr>
-              <a:t>👤  No Auth / Multi-User</a:t>
-            </a:r>
-          </a:p>
-        </p:txBody>
-      </p:sp>
-      <p:sp>
-        <p:nvSpPr>
-          <p:cNvPr id="16" name="TextBox 15"/>
-          <p:cNvSpPr txBox="1"/>
-          <p:nvPr/>
-        </p:nvSpPr>
-        <p:spPr>
-          <a:xfrm>
-            <a:off x="12134088" y="2962656"/>
-            <a:ext cx="4892040" cy="2414016"/>
-          </a:xfrm>
-          <a:prstGeom prst="rect">
-            <a:avLst/>
-          </a:prstGeom>
-          <a:noFill/>
-        </p:spPr>
-        <p:txBody>
-          <a:bodyPr wrap="square">
-            <a:spAutoFit/>
-          </a:bodyPr>
-          <a:lstStyle/>
-          <a:p>
-            <a:pPr algn="l"/>
-            <a:r>
-              <a:rPr sz="1250" b="0" i="0">
-                <a:solidFill>
-                  <a:srgbClr val="7C3AED"/>
-                </a:solidFill>
-              </a:rPr>
-              <a:t>Single shared server state. No session isolation — concurrent users share the same document with no login or permission model.</a:t>
-            </a:r>
-          </a:p>
-        </p:txBody>
-      </p:sp>
-      <p:sp>
-        <p:nvSpPr>
-          <p:cNvPr id="17" name="Rectangle 16"/>
-          <p:cNvSpPr/>
-          <p:nvPr/>
-        </p:nvSpPr>
-        <p:spPr>
-          <a:xfrm>
-            <a:off x="402336" y="5806440"/>
-            <a:ext cx="5303520" cy="3447288"/>
-          </a:xfrm>
-          <a:prstGeom prst="rect">
-            <a:avLst/>
-          </a:prstGeom>
-          <a:solidFill>
-            <a:srgbClr val="FFFFFF"/>
-          </a:solidFill>
-          <a:ln w="6350">
-            <a:solidFill>
-              <a:srgbClr val="E2E8F0"/>
-            </a:solidFill>
-          </a:ln>
-        </p:spPr>
-        <p:style>
-          <a:lnRef idx="1">
-            <a:schemeClr val="accent1"/>
-          </a:lnRef>
-          <a:fillRef idx="3">
-            <a:schemeClr val="accent1"/>
-          </a:fillRef>
-          <a:effectRef idx="2">
-            <a:schemeClr val="accent1"/>
-          </a:effectRef>
-          <a:fontRef idx="minor">
-            <a:schemeClr val="lt1"/>
-          </a:fontRef>
-        </p:style>
-        <p:txBody>
-          <a:bodyPr rtlCol="0" anchor="ctr"/>
-          <a:lstStyle/>
-          <a:p>
-            <a:pPr algn="ctr"/>
-          </a:p>
-        </p:txBody>
-      </p:sp>
-      <p:sp>
-        <p:nvSpPr>
-          <p:cNvPr id="18" name="Rectangle 17"/>
-          <p:cNvSpPr/>
-          <p:nvPr/>
-        </p:nvSpPr>
-        <p:spPr>
-          <a:xfrm>
-            <a:off x="402336" y="5806440"/>
-            <a:ext cx="5303520" cy="64008"/>
-          </a:xfrm>
-          <a:prstGeom prst="rect">
-            <a:avLst/>
-          </a:prstGeom>
-          <a:solidFill>
-            <a:srgbClr val="F59E0B"/>
-          </a:solidFill>
-          <a:ln>
-            <a:noFill/>
-          </a:ln>
-        </p:spPr>
-        <p:style>
-          <a:lnRef idx="1">
-            <a:schemeClr val="accent1"/>
-          </a:lnRef>
-          <a:fillRef idx="3">
-            <a:schemeClr val="accent1"/>
-          </a:fillRef>
-          <a:effectRef idx="2">
-            <a:schemeClr val="accent1"/>
-          </a:effectRef>
-          <a:fontRef idx="minor">
-            <a:schemeClr val="lt1"/>
-          </a:fontRef>
-        </p:style>
-        <p:txBody>
-          <a:bodyPr rtlCol="0" anchor="ctr"/>
-          <a:lstStyle/>
-          <a:p>
-            <a:pPr algn="ctr"/>
-          </a:p>
-        </p:txBody>
-      </p:sp>
-      <p:sp>
-        <p:nvSpPr>
-          <p:cNvPr id="19" name="TextBox 18"/>
-          <p:cNvSpPr txBox="1"/>
-          <p:nvPr/>
-        </p:nvSpPr>
-        <p:spPr>
-          <a:xfrm>
-            <a:off x="704088" y="5980176"/>
-            <a:ext cx="4892040" cy="466344"/>
-          </a:xfrm>
-          <a:prstGeom prst="rect">
-            <a:avLst/>
-          </a:prstGeom>
-          <a:noFill/>
-        </p:spPr>
-        <p:txBody>
-          <a:bodyPr wrap="square">
-            <a:spAutoFit/>
-          </a:bodyPr>
-          <a:lstStyle/>
-          <a:p>
-            <a:pPr algn="l"/>
-            <a:r>
-              <a:rPr sz="1500" b="1" i="0">
-                <a:solidFill>
-                  <a:srgbClr val="4C1D95"/>
-                </a:solidFill>
-              </a:rPr>
-              <a:t>💬  No Persistent Chat History</a:t>
-            </a:r>
-          </a:p>
-        </p:txBody>
-      </p:sp>
-      <p:sp>
-        <p:nvSpPr>
-          <p:cNvPr id="20" name="TextBox 19"/>
-          <p:cNvSpPr txBox="1"/>
-          <p:nvPr/>
-        </p:nvSpPr>
-        <p:spPr>
-          <a:xfrm>
-            <a:off x="704088" y="6583679"/>
-            <a:ext cx="4892040" cy="2414016"/>
-          </a:xfrm>
-          <a:prstGeom prst="rect">
-            <a:avLst/>
-          </a:prstGeom>
-          <a:noFill/>
-        </p:spPr>
-        <p:txBody>
-          <a:bodyPr wrap="square">
-            <a:spAutoFit/>
-          </a:bodyPr>
-          <a:lstStyle/>
-          <a:p>
-            <a:pPr algn="l"/>
-            <a:r>
-              <a:rPr sz="1250" b="0" i="0">
-                <a:solidFill>
-                  <a:srgbClr val="7C3AED"/>
-                </a:solidFill>
-              </a:rPr>
-              <a:t>Conversation context resets on page reload. Follow-up questions cannot reference answers from a previous browsing session.</a:t>
-            </a:r>
-          </a:p>
-        </p:txBody>
-      </p:sp>
-      <p:sp>
-        <p:nvSpPr>
-          <p:cNvPr id="21" name="Rectangle 20"/>
-          <p:cNvSpPr/>
-          <p:nvPr/>
-        </p:nvSpPr>
-        <p:spPr>
-          <a:xfrm>
-            <a:off x="6117336" y="5806440"/>
-            <a:ext cx="5303520" cy="3447288"/>
-          </a:xfrm>
-          <a:prstGeom prst="rect">
-            <a:avLst/>
-          </a:prstGeom>
-          <a:solidFill>
-            <a:srgbClr val="FFFFFF"/>
-          </a:solidFill>
-          <a:ln w="6350">
-            <a:solidFill>
-              <a:srgbClr val="E2E8F0"/>
-            </a:solidFill>
-          </a:ln>
-        </p:spPr>
-        <p:style>
-          <a:lnRef idx="1">
-            <a:schemeClr val="accent1"/>
-          </a:lnRef>
-          <a:fillRef idx="3">
-            <a:schemeClr val="accent1"/>
-          </a:fillRef>
-          <a:effectRef idx="2">
-            <a:schemeClr val="accent1"/>
-          </a:effectRef>
-          <a:fontRef idx="minor">
-            <a:schemeClr val="lt1"/>
-          </a:fontRef>
-        </p:style>
-        <p:txBody>
-          <a:bodyPr rtlCol="0" anchor="ctr"/>
-          <a:lstStyle/>
-          <a:p>
-            <a:pPr algn="ctr"/>
-          </a:p>
-        </p:txBody>
-      </p:sp>
-      <p:sp>
-        <p:nvSpPr>
-          <p:cNvPr id="22" name="Rectangle 21"/>
-          <p:cNvSpPr/>
-          <p:nvPr/>
-        </p:nvSpPr>
-        <p:spPr>
-          <a:xfrm>
-            <a:off x="6117336" y="5806440"/>
-            <a:ext cx="5303520" cy="64008"/>
-          </a:xfrm>
-          <a:prstGeom prst="rect">
-            <a:avLst/>
-          </a:prstGeom>
-          <a:solidFill>
-            <a:srgbClr val="F59E0B"/>
-          </a:solidFill>
-          <a:ln>
-            <a:noFill/>
-          </a:ln>
-        </p:spPr>
-        <p:style>
-          <a:lnRef idx="1">
-            <a:schemeClr val="accent1"/>
-          </a:lnRef>
-          <a:fillRef idx="3">
-            <a:schemeClr val="accent1"/>
-          </a:fillRef>
-          <a:effectRef idx="2">
-            <a:schemeClr val="accent1"/>
-          </a:effectRef>
-          <a:fontRef idx="minor">
-            <a:schemeClr val="lt1"/>
-          </a:fontRef>
-        </p:style>
-        <p:txBody>
-          <a:bodyPr rtlCol="0" anchor="ctr"/>
-          <a:lstStyle/>
-          <a:p>
-            <a:pPr algn="ctr"/>
-          </a:p>
-        </p:txBody>
-      </p:sp>
-      <p:sp>
-        <p:nvSpPr>
-          <p:cNvPr id="23" name="TextBox 22"/>
-          <p:cNvSpPr txBox="1"/>
-          <p:nvPr/>
-        </p:nvSpPr>
-        <p:spPr>
-          <a:xfrm>
-            <a:off x="6419088" y="5980176"/>
-            <a:ext cx="4892040" cy="466344"/>
-          </a:xfrm>
-          <a:prstGeom prst="rect">
-            <a:avLst/>
-          </a:prstGeom>
-          <a:noFill/>
-        </p:spPr>
-        <p:txBody>
-          <a:bodyPr wrap="square">
-            <a:spAutoFit/>
-          </a:bodyPr>
-          <a:lstStyle/>
-          <a:p>
-            <a:pPr algn="l"/>
-            <a:r>
-              <a:rPr sz="1500" b="1" i="0">
-                <a:solidFill>
-                  <a:srgbClr val="4C1D95"/>
-                </a:solidFill>
-              </a:rPr>
-              <a:t>⚡  Gemini API Rate Limits</a:t>
-            </a:r>
-          </a:p>
-        </p:txBody>
-      </p:sp>
-      <p:sp>
-        <p:nvSpPr>
-          <p:cNvPr id="24" name="TextBox 23"/>
-          <p:cNvSpPr txBox="1"/>
-          <p:nvPr/>
-        </p:nvSpPr>
-        <p:spPr>
-          <a:xfrm>
-            <a:off x="6419088" y="6583679"/>
-            <a:ext cx="4892040" cy="2414016"/>
-          </a:xfrm>
-          <a:prstGeom prst="rect">
-            <a:avLst/>
-          </a:prstGeom>
-          <a:noFill/>
-        </p:spPr>
-        <p:txBody>
-          <a:bodyPr wrap="square">
-            <a:spAutoFit/>
-          </a:bodyPr>
-          <a:lstStyle/>
-          <a:p>
-            <a:pPr algn="l"/>
-            <a:r>
-              <a:rPr sz="1250" b="0" i="0">
-                <a:solidFill>
-                  <a:srgbClr val="7C3AED"/>
-                </a:solidFill>
-              </a:rPr>
-              <a:t>Concurrent embedding calls hit 429 limits on large documents. Exponential backoff adds latency for 100+ page PDFs.</a:t>
-            </a:r>
-          </a:p>
-        </p:txBody>
-      </p:sp>
-      <p:sp>
-        <p:nvSpPr>
-          <p:cNvPr id="25" name="Rectangle 24"/>
-          <p:cNvSpPr/>
-          <p:nvPr/>
-        </p:nvSpPr>
-        <p:spPr>
-          <a:xfrm>
-            <a:off x="11832336" y="5806440"/>
-            <a:ext cx="5303520" cy="3447288"/>
-          </a:xfrm>
-          <a:prstGeom prst="rect">
-            <a:avLst/>
-          </a:prstGeom>
-          <a:solidFill>
-            <a:srgbClr val="FFFFFF"/>
-          </a:solidFill>
-          <a:ln w="6350">
-            <a:solidFill>
-              <a:srgbClr val="E2E8F0"/>
-            </a:solidFill>
-          </a:ln>
-        </p:spPr>
-        <p:style>
-          <a:lnRef idx="1">
-            <a:schemeClr val="accent1"/>
-          </a:lnRef>
-          <a:fillRef idx="3">
-            <a:schemeClr val="accent1"/>
-          </a:fillRef>
-          <a:effectRef idx="2">
-            <a:schemeClr val="accent1"/>
-          </a:effectRef>
-          <a:fontRef idx="minor">
-            <a:schemeClr val="lt1"/>
-          </a:fontRef>
-        </p:style>
-        <p:txBody>
-          <a:bodyPr rtlCol="0" anchor="ctr"/>
-          <a:lstStyle/>
-          <a:p>
-            <a:pPr algn="ctr"/>
-          </a:p>
-        </p:txBody>
-      </p:sp>
-      <p:sp>
-        <p:nvSpPr>
-          <p:cNvPr id="26" name="Rectangle 25"/>
-          <p:cNvSpPr/>
-          <p:nvPr/>
-        </p:nvSpPr>
-        <p:spPr>
-          <a:xfrm>
-            <a:off x="11832336" y="5806440"/>
-            <a:ext cx="5303520" cy="64008"/>
-          </a:xfrm>
-          <a:prstGeom prst="rect">
-            <a:avLst/>
-          </a:prstGeom>
-          <a:solidFill>
-            <a:srgbClr val="F59E0B"/>
-          </a:solidFill>
-          <a:ln>
-            <a:noFill/>
-          </a:ln>
-        </p:spPr>
-        <p:style>
-          <a:lnRef idx="1">
-            <a:schemeClr val="accent1"/>
-          </a:lnRef>
-          <a:fillRef idx="3">
-            <a:schemeClr val="accent1"/>
-          </a:fillRef>
-          <a:effectRef idx="2">
-            <a:schemeClr val="accent1"/>
-          </a:effectRef>
-          <a:fontRef idx="minor">
-            <a:schemeClr val="lt1"/>
-          </a:fontRef>
-        </p:style>
-        <p:txBody>
-          <a:bodyPr rtlCol="0" anchor="ctr"/>
-          <a:lstStyle/>
-          <a:p>
-            <a:pPr algn="ctr"/>
-          </a:p>
-        </p:txBody>
-      </p:sp>
-      <p:sp>
-        <p:nvSpPr>
-          <p:cNvPr id="27" name="TextBox 26"/>
-          <p:cNvSpPr txBox="1"/>
-          <p:nvPr/>
-        </p:nvSpPr>
-        <p:spPr>
-          <a:xfrm>
-            <a:off x="12134088" y="5980176"/>
-            <a:ext cx="4892040" cy="466344"/>
-          </a:xfrm>
-          <a:prstGeom prst="rect">
-            <a:avLst/>
-          </a:prstGeom>
-          <a:noFill/>
-        </p:spPr>
-        <p:txBody>
-          <a:bodyPr wrap="square">
-            <a:spAutoFit/>
-          </a:bodyPr>
-          <a:lstStyle/>
-          <a:p>
-            <a:pPr algn="l"/>
-            <a:r>
-              <a:rPr sz="1500" b="1" i="0">
-                <a:solidFill>
-                  <a:srgbClr val="4C1D95"/>
-                </a:solidFill>
-              </a:rPr>
-              <a:t>🔤  PyMuPDF ≠ PDF.js Extraction</a:t>
-            </a:r>
-          </a:p>
-        </p:txBody>
-      </p:sp>
-      <p:sp>
-        <p:nvSpPr>
-          <p:cNvPr id="28" name="TextBox 27"/>
-          <p:cNvSpPr txBox="1"/>
-          <p:nvPr/>
-        </p:nvSpPr>
-        <p:spPr>
-          <a:xfrm>
-            <a:off x="12134088" y="6583679"/>
-            <a:ext cx="4892040" cy="2414016"/>
-          </a:xfrm>
-          <a:prstGeom prst="rect">
-            <a:avLst/>
-          </a:prstGeom>
-          <a:noFill/>
-        </p:spPr>
-        <p:txBody>
-          <a:bodyPr wrap="square">
-            <a:spAutoFit/>
-          </a:bodyPr>
-          <a:lstStyle/>
-          <a:p>
-            <a:pPr algn="l"/>
-            <a:r>
-              <a:rPr sz="1250" b="0" i="0">
-                <a:solidFill>
-                  <a:srgbClr val="7C3AED"/>
-                </a:solidFill>
-              </a:rPr>
-              <a:t>Math and symbols render differently at ingest (PyMuPDF) and in the viewer (PDF.js), requiring fuzzy word-anchor matching for highlighting.</a:t>
-            </a:r>
-          </a:p>
-        </p:txBody>
-      </p:sp>
-    </p:spTree>
-  </p:cSld>
-  <p:clrMapOvr>
-    <a:masterClrMapping/>
-  </p:clrMapOvr>
-</p:sld>
-</file>
-
-<file path=ppt/slides/slide14.xml><?xml version="1.0" encoding="utf-8"?>
-<p:sld xmlns:a="http://schemas.openxmlformats.org/drawingml/2006/main" xmlns:p="http://schemas.openxmlformats.org/presentationml/2006/main" xmlns:r="http://schemas.openxmlformats.org/officeDocument/2006/relationships">
-  <p:cSld>
-    <p:bg>
-      <p:bgPr>
-        <a:solidFill>
-          <a:srgbClr val="FFFFFF"/>
-        </a:solidFill>
-        <a:effectLst/>
-      </p:bgPr>
-    </p:bg>
-    <p:spTree>
-      <p:nvGrpSpPr>
-        <p:cNvPr id="1" name=""/>
-        <p:cNvGrpSpPr/>
-        <p:nvPr/>
-      </p:nvGrpSpPr>
-      <p:grpSpPr/>
-      <p:sp>
-        <p:nvSpPr>
-          <p:cNvPr id="2" name="TextBox 1"/>
-          <p:cNvSpPr txBox="1"/>
-          <p:nvPr/>
-        </p:nvSpPr>
-        <p:spPr>
-          <a:xfrm>
-            <a:off x="914400" y="484632"/>
-            <a:ext cx="16285463" cy="429768"/>
-          </a:xfrm>
-          <a:prstGeom prst="rect">
-            <a:avLst/>
-          </a:prstGeom>
-          <a:noFill/>
-        </p:spPr>
-        <p:txBody>
-          <a:bodyPr wrap="square">
-            <a:spAutoFit/>
-          </a:bodyPr>
-          <a:lstStyle/>
-          <a:p>
-            <a:pPr algn="l"/>
-            <a:r>
-              <a:rPr sz="1400" b="1" i="0">
-                <a:solidFill>
-                  <a:srgbClr val="7C3AED"/>
-                </a:solidFill>
-              </a:rPr>
-              <a:t>SYSTEM DESIGN</a:t>
-            </a:r>
-          </a:p>
-        </p:txBody>
-      </p:sp>
-      <p:sp>
-        <p:nvSpPr>
-          <p:cNvPr id="3" name="TextBox 2"/>
-          <p:cNvSpPr txBox="1"/>
-          <p:nvPr/>
-        </p:nvSpPr>
-        <p:spPr>
-          <a:xfrm>
-            <a:off x="914400" y="987552"/>
-            <a:ext cx="16285463" cy="502920"/>
-          </a:xfrm>
-          <a:prstGeom prst="rect">
-            <a:avLst/>
-          </a:prstGeom>
-          <a:noFill/>
-        </p:spPr>
-        <p:txBody>
-          <a:bodyPr wrap="square">
-            <a:spAutoFit/>
-          </a:bodyPr>
-          <a:lstStyle/>
-          <a:p>
-            <a:pPr algn="l"/>
-            <a:r>
-              <a:rPr sz="2800" b="1" i="0">
-                <a:solidFill>
-                  <a:srgbClr val="4C1D95"/>
-                </a:solidFill>
-              </a:rPr>
-              <a:t>Component architecture &amp; data flow</a:t>
-            </a:r>
-          </a:p>
-        </p:txBody>
-      </p:sp>
-      <p:sp>
-        <p:nvSpPr>
-          <p:cNvPr id="4" name="Rectangle 3"/>
-          <p:cNvSpPr/>
-          <p:nvPr/>
-        </p:nvSpPr>
-        <p:spPr>
-          <a:xfrm>
-            <a:off x="822960" y="1856231"/>
-            <a:ext cx="16651224" cy="54864"/>
-          </a:xfrm>
-          <a:prstGeom prst="rect">
-            <a:avLst/>
-          </a:prstGeom>
-          <a:solidFill>
-            <a:srgbClr val="7C3AED"/>
-          </a:solidFill>
-          <a:ln>
-            <a:noFill/>
-          </a:ln>
-        </p:spPr>
-        <p:style>
-          <a:lnRef idx="1">
-            <a:schemeClr val="accent1"/>
-          </a:lnRef>
-          <a:fillRef idx="3">
-            <a:schemeClr val="accent1"/>
-          </a:fillRef>
-          <a:effectRef idx="2">
-            <a:schemeClr val="accent1"/>
-          </a:effectRef>
-          <a:fontRef idx="minor">
-            <a:schemeClr val="lt1"/>
-          </a:fontRef>
-        </p:style>
-        <p:txBody>
-          <a:bodyPr rtlCol="0" anchor="ctr"/>
-          <a:lstStyle/>
-          <a:p>
-            <a:pPr algn="ctr"/>
-          </a:p>
-        </p:txBody>
-      </p:sp>
-      <p:sp>
-        <p:nvSpPr>
-          <p:cNvPr id="5" name="Rectangle 4"/>
-          <p:cNvSpPr/>
-          <p:nvPr/>
-        </p:nvSpPr>
-        <p:spPr>
-          <a:xfrm>
-            <a:off x="320040" y="3291840"/>
-            <a:ext cx="3474720" cy="3474720"/>
-          </a:xfrm>
-          <a:prstGeom prst="rect">
-            <a:avLst/>
-          </a:prstGeom>
-          <a:solidFill>
-            <a:srgbClr val="FFFFFF"/>
-          </a:solidFill>
-          <a:ln w="19050">
-            <a:solidFill>
-              <a:srgbClr val="7C3AED"/>
-            </a:solidFill>
-          </a:ln>
-        </p:spPr>
-        <p:style>
-          <a:lnRef idx="1">
-            <a:schemeClr val="accent1"/>
-          </a:lnRef>
-          <a:fillRef idx="3">
-            <a:schemeClr val="accent1"/>
-          </a:fillRef>
-          <a:effectRef idx="2">
-            <a:schemeClr val="accent1"/>
-          </a:effectRef>
-          <a:fontRef idx="minor">
-            <a:schemeClr val="lt1"/>
-          </a:fontRef>
-        </p:style>
-        <p:txBody>
-          <a:bodyPr rtlCol="0" anchor="ctr"/>
-          <a:lstStyle/>
-          <a:p>
-            <a:pPr algn="ctr"/>
-          </a:p>
-        </p:txBody>
-      </p:sp>
-      <p:sp>
-        <p:nvSpPr>
-          <p:cNvPr id="6" name="Rectangle 5"/>
-          <p:cNvSpPr/>
-          <p:nvPr/>
-        </p:nvSpPr>
-        <p:spPr>
-          <a:xfrm>
-            <a:off x="320040" y="3291840"/>
-            <a:ext cx="3474720" cy="54864"/>
-          </a:xfrm>
-          <a:prstGeom prst="rect">
-            <a:avLst/>
-          </a:prstGeom>
-          <a:solidFill>
-            <a:srgbClr val="7C3AED"/>
-          </a:solidFill>
-          <a:ln>
-            <a:noFill/>
-          </a:ln>
-        </p:spPr>
-        <p:style>
-          <a:lnRef idx="1">
-            <a:schemeClr val="accent1"/>
-          </a:lnRef>
-          <a:fillRef idx="3">
-            <a:schemeClr val="accent1"/>
-          </a:fillRef>
-          <a:effectRef idx="2">
-            <a:schemeClr val="accent1"/>
-          </a:effectRef>
-          <a:fontRef idx="minor">
-            <a:schemeClr val="lt1"/>
-          </a:fontRef>
-        </p:style>
-        <p:txBody>
-          <a:bodyPr rtlCol="0" anchor="ctr"/>
-          <a:lstStyle/>
-          <a:p>
-            <a:pPr algn="ctr"/>
-          </a:p>
-        </p:txBody>
-      </p:sp>
-      <p:sp>
-        <p:nvSpPr>
-          <p:cNvPr id="7" name="TextBox 6"/>
-          <p:cNvSpPr txBox="1"/>
-          <p:nvPr/>
-        </p:nvSpPr>
-        <p:spPr>
-          <a:xfrm>
-            <a:off x="548640" y="3456432"/>
-            <a:ext cx="3108960" cy="502920"/>
-          </a:xfrm>
-          <a:prstGeom prst="rect">
-            <a:avLst/>
-          </a:prstGeom>
-          <a:noFill/>
-        </p:spPr>
-        <p:txBody>
-          <a:bodyPr wrap="square">
-            <a:spAutoFit/>
-          </a:bodyPr>
-          <a:lstStyle/>
-          <a:p>
-            <a:pPr algn="l"/>
-            <a:r>
-              <a:rPr sz="2200" b="0" i="0">
-                <a:solidFill>
-                  <a:srgbClr val="4C1D95"/>
-                </a:solidFill>
-              </a:rPr>
-              <a:t>🌐</a:t>
-            </a:r>
-          </a:p>
-        </p:txBody>
-      </p:sp>
-      <p:sp>
-        <p:nvSpPr>
-          <p:cNvPr id="8" name="TextBox 7"/>
-          <p:cNvSpPr txBox="1"/>
-          <p:nvPr/>
-        </p:nvSpPr>
-        <p:spPr>
-          <a:xfrm>
-            <a:off x="548640" y="3977639"/>
-            <a:ext cx="3108960" cy="457200"/>
-          </a:xfrm>
-          <a:prstGeom prst="rect">
-            <a:avLst/>
-          </a:prstGeom>
-          <a:noFill/>
-        </p:spPr>
-        <p:txBody>
-          <a:bodyPr wrap="square">
-            <a:spAutoFit/>
-          </a:bodyPr>
-          <a:lstStyle/>
-          <a:p>
-            <a:pPr algn="l"/>
-            <a:r>
-              <a:rPr sz="1600" b="1" i="0">
-                <a:solidFill>
-                  <a:srgbClr val="4C1D95"/>
-                </a:solidFill>
-              </a:rPr>
-              <a:t>Browser</a:t>
-            </a:r>
-          </a:p>
-        </p:txBody>
-      </p:sp>
-      <p:sp>
-        <p:nvSpPr>
-          <p:cNvPr id="9" name="TextBox 8"/>
-          <p:cNvSpPr txBox="1"/>
-          <p:nvPr/>
-        </p:nvSpPr>
-        <p:spPr>
-          <a:xfrm>
-            <a:off x="548640" y="4480560"/>
-            <a:ext cx="3108960" cy="2103120"/>
-          </a:xfrm>
-          <a:prstGeom prst="rect">
-            <a:avLst/>
-          </a:prstGeom>
-          <a:noFill/>
-        </p:spPr>
-        <p:txBody>
-          <a:bodyPr wrap="square">
-            <a:spAutoFit/>
-          </a:bodyPr>
-          <a:lstStyle/>
-          <a:p>
-            <a:pPr algn="l"/>
-            <a:r>
-              <a:rPr sz="1150" b="0" i="0">
-                <a:solidFill>
-                  <a:srgbClr val="7C3AED"/>
-                </a:solidFill>
-              </a:rPr>
-              <a:t>index.html
-PDF.js viewer
-SSE streaming
-citation pills</a:t>
-            </a:r>
-          </a:p>
-        </p:txBody>
-      </p:sp>
-      <p:sp>
-        <p:nvSpPr>
-          <p:cNvPr id="10" name="Rectangle 9"/>
-          <p:cNvSpPr/>
-          <p:nvPr/>
-        </p:nvSpPr>
-        <p:spPr>
-          <a:xfrm>
-            <a:off x="7406640" y="2194560"/>
-            <a:ext cx="3474720" cy="5120640"/>
-          </a:xfrm>
-          <a:prstGeom prst="rect">
-            <a:avLst/>
-          </a:prstGeom>
-          <a:solidFill>
-            <a:srgbClr val="FFFFFF"/>
-          </a:solidFill>
-          <a:ln w="19050">
-            <a:solidFill>
-              <a:srgbClr val="059669"/>
-            </a:solidFill>
-          </a:ln>
-        </p:spPr>
-        <p:style>
-          <a:lnRef idx="1">
-            <a:schemeClr val="accent1"/>
-          </a:lnRef>
-          <a:fillRef idx="3">
-            <a:schemeClr val="accent1"/>
-          </a:fillRef>
-          <a:effectRef idx="2">
-            <a:schemeClr val="accent1"/>
-          </a:effectRef>
-          <a:fontRef idx="minor">
-            <a:schemeClr val="lt1"/>
-          </a:fontRef>
-        </p:style>
-        <p:txBody>
-          <a:bodyPr rtlCol="0" anchor="ctr"/>
-          <a:lstStyle/>
-          <a:p>
-            <a:pPr algn="ctr"/>
-          </a:p>
-        </p:txBody>
-      </p:sp>
-      <p:sp>
-        <p:nvSpPr>
-          <p:cNvPr id="11" name="Rectangle 10"/>
-          <p:cNvSpPr/>
-          <p:nvPr/>
-        </p:nvSpPr>
-        <p:spPr>
-          <a:xfrm>
-            <a:off x="7406640" y="2194560"/>
-            <a:ext cx="3474720" cy="54864"/>
-          </a:xfrm>
-          <a:prstGeom prst="rect">
-            <a:avLst/>
-          </a:prstGeom>
-          <a:solidFill>
-            <a:srgbClr val="059669"/>
-          </a:solidFill>
-          <a:ln>
-            <a:noFill/>
-          </a:ln>
-        </p:spPr>
-        <p:style>
-          <a:lnRef idx="1">
-            <a:schemeClr val="accent1"/>
-          </a:lnRef>
-          <a:fillRef idx="3">
-            <a:schemeClr val="accent1"/>
-          </a:fillRef>
-          <a:effectRef idx="2">
-            <a:schemeClr val="accent1"/>
-          </a:effectRef>
-          <a:fontRef idx="minor">
-            <a:schemeClr val="lt1"/>
-          </a:fontRef>
-        </p:style>
-        <p:txBody>
-          <a:bodyPr rtlCol="0" anchor="ctr"/>
-          <a:lstStyle/>
-          <a:p>
-            <a:pPr algn="ctr"/>
-          </a:p>
-        </p:txBody>
-      </p:sp>
-      <p:sp>
-        <p:nvSpPr>
-          <p:cNvPr id="12" name="TextBox 11"/>
-          <p:cNvSpPr txBox="1"/>
-          <p:nvPr/>
-        </p:nvSpPr>
-        <p:spPr>
-          <a:xfrm>
-            <a:off x="7635240" y="2359152"/>
-            <a:ext cx="3108960" cy="502920"/>
-          </a:xfrm>
-          <a:prstGeom prst="rect">
-            <a:avLst/>
-          </a:prstGeom>
-          <a:noFill/>
-        </p:spPr>
-        <p:txBody>
-          <a:bodyPr wrap="square">
-            <a:spAutoFit/>
-          </a:bodyPr>
-          <a:lstStyle/>
-          <a:p>
-            <a:pPr algn="l"/>
-            <a:r>
-              <a:rPr sz="2200" b="0" i="0">
-                <a:solidFill>
-                  <a:srgbClr val="4C1D95"/>
-                </a:solidFill>
-              </a:rPr>
-              <a:t>⚙️</a:t>
-            </a:r>
-          </a:p>
-        </p:txBody>
-      </p:sp>
-      <p:sp>
-        <p:nvSpPr>
-          <p:cNvPr id="13" name="TextBox 12"/>
-          <p:cNvSpPr txBox="1"/>
-          <p:nvPr/>
-        </p:nvSpPr>
-        <p:spPr>
-          <a:xfrm>
-            <a:off x="7635240" y="2880360"/>
-            <a:ext cx="3108960" cy="457200"/>
-          </a:xfrm>
-          <a:prstGeom prst="rect">
-            <a:avLst/>
-          </a:prstGeom>
-          <a:noFill/>
-        </p:spPr>
-        <p:txBody>
-          <a:bodyPr wrap="square">
-            <a:spAutoFit/>
-          </a:bodyPr>
-          <a:lstStyle/>
-          <a:p>
-            <a:pPr algn="l"/>
-            <a:r>
-              <a:rPr sz="1600" b="1" i="0">
-                <a:solidFill>
-                  <a:srgbClr val="4C1D95"/>
-                </a:solidFill>
-              </a:rPr>
-              <a:t>FastAPI</a:t>
-            </a:r>
-          </a:p>
-        </p:txBody>
-      </p:sp>
-      <p:sp>
-        <p:nvSpPr>
-          <p:cNvPr id="14" name="TextBox 13"/>
-          <p:cNvSpPr txBox="1"/>
-          <p:nvPr/>
-        </p:nvSpPr>
-        <p:spPr>
-          <a:xfrm>
-            <a:off x="7635240" y="3383280"/>
-            <a:ext cx="3108960" cy="3749039"/>
-          </a:xfrm>
-          <a:prstGeom prst="rect">
-            <a:avLst/>
-          </a:prstGeom>
-          <a:noFill/>
-        </p:spPr>
-        <p:txBody>
-          <a:bodyPr wrap="square">
-            <a:spAutoFit/>
-          </a:bodyPr>
-          <a:lstStyle/>
-          <a:p>
-            <a:pPr algn="l"/>
-            <a:r>
-              <a:rPr sz="1150" b="0" i="0">
-                <a:solidFill>
-                  <a:srgbClr val="7C3AED"/>
-                </a:solidFill>
-              </a:rPr>
-              <a:t>POST /ingest
-POST /query
-DELETE /doc
-GET /doc/info
-GET /health
-asyncpg · uvicorn</a:t>
-            </a:r>
-          </a:p>
-        </p:txBody>
-      </p:sp>
-      <p:sp>
-        <p:nvSpPr>
-          <p:cNvPr id="15" name="Rectangle 14"/>
-          <p:cNvSpPr/>
-          <p:nvPr/>
-        </p:nvSpPr>
-        <p:spPr>
-          <a:xfrm>
-            <a:off x="14493240" y="3291840"/>
-            <a:ext cx="3474720" cy="3474720"/>
-          </a:xfrm>
-          <a:prstGeom prst="rect">
-            <a:avLst/>
-          </a:prstGeom>
-          <a:solidFill>
-            <a:srgbClr val="FFFFFF"/>
-          </a:solidFill>
-          <a:ln w="19050">
-            <a:solidFill>
-              <a:srgbClr val="4285F4"/>
-            </a:solidFill>
-          </a:ln>
-        </p:spPr>
-        <p:style>
-          <a:lnRef idx="1">
-            <a:schemeClr val="accent1"/>
-          </a:lnRef>
-          <a:fillRef idx="3">
-            <a:schemeClr val="accent1"/>
-          </a:fillRef>
-          <a:effectRef idx="2">
-            <a:schemeClr val="accent1"/>
-          </a:effectRef>
-          <a:fontRef idx="minor">
-            <a:schemeClr val="lt1"/>
-          </a:fontRef>
-        </p:style>
-        <p:txBody>
-          <a:bodyPr rtlCol="0" anchor="ctr"/>
-          <a:lstStyle/>
-          <a:p>
-            <a:pPr algn="ctr"/>
-          </a:p>
-        </p:txBody>
-      </p:sp>
-      <p:sp>
-        <p:nvSpPr>
-          <p:cNvPr id="16" name="Rectangle 15"/>
-          <p:cNvSpPr/>
-          <p:nvPr/>
-        </p:nvSpPr>
-        <p:spPr>
-          <a:xfrm>
-            <a:off x="14493240" y="3291840"/>
-            <a:ext cx="3474720" cy="54864"/>
-          </a:xfrm>
-          <a:prstGeom prst="rect">
-            <a:avLst/>
-          </a:prstGeom>
-          <a:solidFill>
-            <a:srgbClr val="4285F4"/>
-          </a:solidFill>
-          <a:ln>
-            <a:noFill/>
-          </a:ln>
-        </p:spPr>
-        <p:style>
-          <a:lnRef idx="1">
-            <a:schemeClr val="accent1"/>
-          </a:lnRef>
-          <a:fillRef idx="3">
-            <a:schemeClr val="accent1"/>
-          </a:fillRef>
-          <a:effectRef idx="2">
-            <a:schemeClr val="accent1"/>
-          </a:effectRef>
-          <a:fontRef idx="minor">
-            <a:schemeClr val="lt1"/>
-          </a:fontRef>
-        </p:style>
-        <p:txBody>
-          <a:bodyPr rtlCol="0" anchor="ctr"/>
-          <a:lstStyle/>
-          <a:p>
-            <a:pPr algn="ctr"/>
-          </a:p>
-        </p:txBody>
-      </p:sp>
-      <p:sp>
-        <p:nvSpPr>
-          <p:cNvPr id="17" name="TextBox 16"/>
-          <p:cNvSpPr txBox="1"/>
-          <p:nvPr/>
-        </p:nvSpPr>
-        <p:spPr>
-          <a:xfrm>
-            <a:off x="14721840" y="3456432"/>
-            <a:ext cx="3108960" cy="502920"/>
-          </a:xfrm>
-          <a:prstGeom prst="rect">
-            <a:avLst/>
-          </a:prstGeom>
-          <a:noFill/>
-        </p:spPr>
-        <p:txBody>
-          <a:bodyPr wrap="square">
-            <a:spAutoFit/>
-          </a:bodyPr>
-          <a:lstStyle/>
-          <a:p>
-            <a:pPr algn="l"/>
-            <a:r>
-              <a:rPr sz="2200" b="0" i="0">
-                <a:solidFill>
-                  <a:srgbClr val="4C1D95"/>
-                </a:solidFill>
-              </a:rPr>
-              <a:t>🧠</a:t>
-            </a:r>
-          </a:p>
-        </p:txBody>
-      </p:sp>
-      <p:sp>
-        <p:nvSpPr>
-          <p:cNvPr id="18" name="TextBox 17"/>
-          <p:cNvSpPr txBox="1"/>
-          <p:nvPr/>
-        </p:nvSpPr>
-        <p:spPr>
-          <a:xfrm>
-            <a:off x="14721840" y="3977639"/>
-            <a:ext cx="3108960" cy="457200"/>
-          </a:xfrm>
-          <a:prstGeom prst="rect">
-            <a:avLst/>
-          </a:prstGeom>
-          <a:noFill/>
-        </p:spPr>
-        <p:txBody>
-          <a:bodyPr wrap="square">
-            <a:spAutoFit/>
-          </a:bodyPr>
-          <a:lstStyle/>
-          <a:p>
-            <a:pPr algn="l"/>
-            <a:r>
-              <a:rPr sz="1600" b="1" i="0">
-                <a:solidFill>
-                  <a:srgbClr val="4C1D95"/>
-                </a:solidFill>
-              </a:rPr>
-              <a:t>Gemini API</a:t>
-            </a:r>
-          </a:p>
-        </p:txBody>
-      </p:sp>
-      <p:sp>
-        <p:nvSpPr>
-          <p:cNvPr id="19" name="TextBox 18"/>
-          <p:cNvSpPr txBox="1"/>
-          <p:nvPr/>
-        </p:nvSpPr>
-        <p:spPr>
-          <a:xfrm>
-            <a:off x="14721840" y="4480560"/>
-            <a:ext cx="3108960" cy="2103120"/>
-          </a:xfrm>
-          <a:prstGeom prst="rect">
-            <a:avLst/>
-          </a:prstGeom>
-          <a:noFill/>
-        </p:spPr>
-        <p:txBody>
-          <a:bodyPr wrap="square">
-            <a:spAutoFit/>
-          </a:bodyPr>
-          <a:lstStyle/>
-          <a:p>
-            <a:pPr algn="l"/>
-            <a:r>
-              <a:rPr sz="1150" b="0" i="0">
-                <a:solidFill>
-                  <a:srgbClr val="7C3AED"/>
-                </a:solidFill>
-              </a:rPr>
-              <a:t>embedding-2 (768-dim)
-RETRIEVAL_DOCUMENT/QUERY
-2.5-flash rerank
-2.5-flash answer (SSE)</a:t>
-            </a:r>
-          </a:p>
-        </p:txBody>
-      </p:sp>
-      <p:sp>
-        <p:nvSpPr>
-          <p:cNvPr id="20" name="Rectangle 19"/>
-          <p:cNvSpPr/>
-          <p:nvPr/>
-        </p:nvSpPr>
-        <p:spPr>
-          <a:xfrm>
-            <a:off x="7406640" y="7863840"/>
-            <a:ext cx="3474720" cy="2103120"/>
-          </a:xfrm>
-          <a:prstGeom prst="rect">
-            <a:avLst/>
-          </a:prstGeom>
-          <a:solidFill>
-            <a:srgbClr val="FFFFFF"/>
-          </a:solidFill>
-          <a:ln w="19050">
-            <a:solidFill>
-              <a:srgbClr val="336791"/>
-            </a:solidFill>
-          </a:ln>
-        </p:spPr>
-        <p:style>
-          <a:lnRef idx="1">
-            <a:schemeClr val="accent1"/>
-          </a:lnRef>
-          <a:fillRef idx="3">
-            <a:schemeClr val="accent1"/>
-          </a:fillRef>
-          <a:effectRef idx="2">
-            <a:schemeClr val="accent1"/>
-          </a:effectRef>
-          <a:fontRef idx="minor">
-            <a:schemeClr val="lt1"/>
-          </a:fontRef>
-        </p:style>
-        <p:txBody>
-          <a:bodyPr rtlCol="0" anchor="ctr"/>
-          <a:lstStyle/>
-          <a:p>
-            <a:pPr algn="ctr"/>
-          </a:p>
-        </p:txBody>
-      </p:sp>
-      <p:sp>
-        <p:nvSpPr>
-          <p:cNvPr id="21" name="Rectangle 20"/>
-          <p:cNvSpPr/>
-          <p:nvPr/>
-        </p:nvSpPr>
-        <p:spPr>
-          <a:xfrm>
-            <a:off x="7406640" y="7863840"/>
-            <a:ext cx="3474720" cy="54864"/>
-          </a:xfrm>
-          <a:prstGeom prst="rect">
-            <a:avLst/>
-          </a:prstGeom>
-          <a:solidFill>
-            <a:srgbClr val="336791"/>
-          </a:solidFill>
-          <a:ln>
-            <a:noFill/>
-          </a:ln>
-        </p:spPr>
-        <p:style>
-          <a:lnRef idx="1">
-            <a:schemeClr val="accent1"/>
-          </a:lnRef>
-          <a:fillRef idx="3">
-            <a:schemeClr val="accent1"/>
-          </a:fillRef>
-          <a:effectRef idx="2">
-            <a:schemeClr val="accent1"/>
-          </a:effectRef>
-          <a:fontRef idx="minor">
-            <a:schemeClr val="lt1"/>
-          </a:fontRef>
-        </p:style>
-        <p:txBody>
-          <a:bodyPr rtlCol="0" anchor="ctr"/>
-          <a:lstStyle/>
-          <a:p>
-            <a:pPr algn="ctr"/>
-          </a:p>
-        </p:txBody>
-      </p:sp>
-      <p:sp>
-        <p:nvSpPr>
-          <p:cNvPr id="22" name="TextBox 21"/>
-          <p:cNvSpPr txBox="1"/>
-          <p:nvPr/>
-        </p:nvSpPr>
-        <p:spPr>
-          <a:xfrm>
-            <a:off x="7635240" y="8028431"/>
-            <a:ext cx="3108960" cy="502920"/>
-          </a:xfrm>
-          <a:prstGeom prst="rect">
-            <a:avLst/>
-          </a:prstGeom>
-          <a:noFill/>
-        </p:spPr>
-        <p:txBody>
-          <a:bodyPr wrap="square">
-            <a:spAutoFit/>
-          </a:bodyPr>
-          <a:lstStyle/>
-          <a:p>
-            <a:pPr algn="l"/>
-            <a:r>
-              <a:rPr sz="2200" b="0" i="0">
-                <a:solidFill>
-                  <a:srgbClr val="4C1D95"/>
-                </a:solidFill>
-              </a:rPr>
-              <a:t>🗄️</a:t>
-            </a:r>
-          </a:p>
-        </p:txBody>
-      </p:sp>
-      <p:sp>
-        <p:nvSpPr>
-          <p:cNvPr id="23" name="TextBox 22"/>
-          <p:cNvSpPr txBox="1"/>
-          <p:nvPr/>
-        </p:nvSpPr>
-        <p:spPr>
-          <a:xfrm>
-            <a:off x="7635240" y="8549640"/>
-            <a:ext cx="3108960" cy="457200"/>
-          </a:xfrm>
-          <a:prstGeom prst="rect">
-            <a:avLst/>
-          </a:prstGeom>
-          <a:noFill/>
-        </p:spPr>
-        <p:txBody>
-          <a:bodyPr wrap="square">
-            <a:spAutoFit/>
-          </a:bodyPr>
-          <a:lstStyle/>
-          <a:p>
-            <a:pPr algn="l"/>
-            <a:r>
-              <a:rPr sz="1600" b="1" i="0">
-                <a:solidFill>
-                  <a:srgbClr val="4C1D95"/>
-                </a:solidFill>
-              </a:rPr>
-              <a:t>PostgreSQL + pgvector</a:t>
-            </a:r>
-          </a:p>
-        </p:txBody>
-      </p:sp>
-      <p:sp>
-        <p:nvSpPr>
-          <p:cNvPr id="24" name="TextBox 23"/>
-          <p:cNvSpPr txBox="1"/>
-          <p:nvPr/>
-        </p:nvSpPr>
-        <p:spPr>
-          <a:xfrm>
-            <a:off x="7635240" y="9052560"/>
-            <a:ext cx="3108960" cy="731519"/>
-          </a:xfrm>
-          <a:prstGeom prst="rect">
-            <a:avLst/>
-          </a:prstGeom>
-          <a:noFill/>
-        </p:spPr>
-        <p:txBody>
-          <a:bodyPr wrap="square">
-            <a:spAutoFit/>
-          </a:bodyPr>
-          <a:lstStyle/>
-          <a:p>
-            <a:pPr algn="l"/>
-            <a:r>
-              <a:rPr sz="1150" b="0" i="0">
-                <a:solidFill>
-                  <a:srgbClr val="7C3AED"/>
-                </a:solidFill>
-              </a:rPr>
-              <a:t>chunks · doc_meta
-HNSW cosine · tsvector BM25
-RRF fusion</a:t>
-            </a:r>
-          </a:p>
-        </p:txBody>
-      </p:sp>
-      <p:cxnSp>
-        <p:nvCxnSpPr>
-          <p:cNvPr id="25" name="Connector 24"/>
-          <p:cNvCxnSpPr/>
-          <p:nvPr/>
-        </p:nvCxnSpPr>
-        <p:spPr>
-          <a:xfrm>
-            <a:off x="3794759" y="4297680"/>
-            <a:ext cx="3611881" cy="0"/>
-          </a:xfrm>
-          <a:prstGeom prst="line">
-            <a:avLst/>
-          </a:prstGeom>
-          <a:ln w="25400">
-            <a:solidFill>
-              <a:srgbClr val="7C3AED"/>
-            </a:solidFill>
-            <a:tailEnd type="arrow" w="med" len="med"/>
-          </a:ln>
-        </p:spPr>
-        <p:style>
-          <a:lnRef idx="2">
-            <a:schemeClr val="accent1"/>
-          </a:lnRef>
-          <a:fillRef idx="0">
-            <a:schemeClr val="accent1"/>
-          </a:fillRef>
-          <a:effectRef idx="1">
-            <a:schemeClr val="accent1"/>
-          </a:effectRef>
-          <a:fontRef idx="minor">
-            <a:schemeClr val="tx1"/>
-          </a:fontRef>
-        </p:style>
-      </p:cxnSp>
-      <p:sp>
-        <p:nvSpPr>
-          <p:cNvPr id="26" name="TextBox 25"/>
-          <p:cNvSpPr txBox="1"/>
-          <p:nvPr/>
-        </p:nvSpPr>
-        <p:spPr>
-          <a:xfrm>
-            <a:off x="3840479" y="3977640"/>
-            <a:ext cx="3520440" cy="292608"/>
-          </a:xfrm>
-          <a:prstGeom prst="rect">
-            <a:avLst/>
-          </a:prstGeom>
-          <a:noFill/>
-        </p:spPr>
-        <p:txBody>
-          <a:bodyPr wrap="square">
-            <a:spAutoFit/>
-          </a:bodyPr>
-          <a:lstStyle/>
-          <a:p>
-            <a:pPr algn="ctr"/>
-            <a:r>
-              <a:rPr sz="1000" b="0" i="1">
-                <a:solidFill>
-                  <a:srgbClr val="64748B"/>
-                </a:solidFill>
-              </a:rPr>
-              <a:t>upload PDF / query</a:t>
-            </a:r>
-          </a:p>
-        </p:txBody>
-      </p:sp>
-      <p:cxnSp>
-        <p:nvCxnSpPr>
-          <p:cNvPr id="27" name="Connector 26"/>
-          <p:cNvCxnSpPr/>
-          <p:nvPr/>
-        </p:nvCxnSpPr>
-        <p:spPr>
-          <a:xfrm flipH="1">
-            <a:off x="3794759" y="5486400"/>
-            <a:ext cx="3611881" cy="0"/>
-          </a:xfrm>
-          <a:prstGeom prst="line">
-            <a:avLst/>
-          </a:prstGeom>
-          <a:ln w="25400">
-            <a:solidFill>
-              <a:srgbClr val="059669"/>
-            </a:solidFill>
-            <a:tailEnd type="arrow" w="med" len="med"/>
-          </a:ln>
-        </p:spPr>
-        <p:style>
-          <a:lnRef idx="2">
-            <a:schemeClr val="accent1"/>
-          </a:lnRef>
-          <a:fillRef idx="0">
-            <a:schemeClr val="accent1"/>
-          </a:fillRef>
-          <a:effectRef idx="1">
-            <a:schemeClr val="accent1"/>
-          </a:effectRef>
-          <a:fontRef idx="minor">
-            <a:schemeClr val="tx1"/>
-          </a:fontRef>
-        </p:style>
-      </p:cxnSp>
-      <p:sp>
-        <p:nvSpPr>
-          <p:cNvPr id="28" name="TextBox 27"/>
-          <p:cNvSpPr txBox="1"/>
-          <p:nvPr/>
-        </p:nvSpPr>
-        <p:spPr>
-          <a:xfrm>
-            <a:off x="3840479" y="5559552"/>
-            <a:ext cx="3520440" cy="292608"/>
-          </a:xfrm>
-          <a:prstGeom prst="rect">
-            <a:avLst/>
-          </a:prstGeom>
-          <a:noFill/>
-        </p:spPr>
-        <p:txBody>
-          <a:bodyPr wrap="square">
-            <a:spAutoFit/>
-          </a:bodyPr>
-          <a:lstStyle/>
-          <a:p>
-            <a:pPr algn="ctr"/>
-            <a:r>
-              <a:rPr sz="1000" b="0" i="1">
-                <a:solidFill>
-                  <a:srgbClr val="64748B"/>
-                </a:solidFill>
-              </a:rPr>
-              <a:t>SSE stream</a:t>
-            </a:r>
-          </a:p>
-        </p:txBody>
-      </p:sp>
-      <p:cxnSp>
-        <p:nvCxnSpPr>
-          <p:cNvPr id="29" name="Connector 28"/>
-          <p:cNvCxnSpPr/>
-          <p:nvPr/>
-        </p:nvCxnSpPr>
-        <p:spPr>
-          <a:xfrm>
-            <a:off x="10881359" y="4297680"/>
-            <a:ext cx="3611881" cy="0"/>
-          </a:xfrm>
-          <a:prstGeom prst="line">
-            <a:avLst/>
-          </a:prstGeom>
-          <a:ln w="25400">
-            <a:solidFill>
-              <a:srgbClr val="4285F4"/>
-            </a:solidFill>
-            <a:tailEnd type="arrow" w="med" len="med"/>
-          </a:ln>
-        </p:spPr>
-        <p:style>
-          <a:lnRef idx="2">
-            <a:schemeClr val="accent1"/>
-          </a:lnRef>
-          <a:fillRef idx="0">
-            <a:schemeClr val="accent1"/>
-          </a:fillRef>
-          <a:effectRef idx="1">
-            <a:schemeClr val="accent1"/>
-          </a:effectRef>
-          <a:fontRef idx="minor">
-            <a:schemeClr val="tx1"/>
-          </a:fontRef>
-        </p:style>
-      </p:cxnSp>
-      <p:sp>
-        <p:nvSpPr>
-          <p:cNvPr id="30" name="TextBox 29"/>
-          <p:cNvSpPr txBox="1"/>
-          <p:nvPr/>
-        </p:nvSpPr>
-        <p:spPr>
-          <a:xfrm>
-            <a:off x="10927080" y="3977640"/>
-            <a:ext cx="3520440" cy="292608"/>
-          </a:xfrm>
-          <a:prstGeom prst="rect">
-            <a:avLst/>
-          </a:prstGeom>
-          <a:noFill/>
-        </p:spPr>
-        <p:txBody>
-          <a:bodyPr wrap="square">
-            <a:spAutoFit/>
-          </a:bodyPr>
-          <a:lstStyle/>
-          <a:p>
-            <a:pPr algn="ctr"/>
-            <a:r>
-              <a:rPr sz="1000" b="0" i="1">
-                <a:solidFill>
-                  <a:srgbClr val="64748B"/>
-                </a:solidFill>
-              </a:rPr>
-              <a:t>embed / rerank / answer</a:t>
-            </a:r>
-          </a:p>
-        </p:txBody>
-      </p:sp>
-      <p:cxnSp>
-        <p:nvCxnSpPr>
-          <p:cNvPr id="31" name="Connector 30"/>
-          <p:cNvCxnSpPr/>
-          <p:nvPr/>
-        </p:nvCxnSpPr>
-        <p:spPr>
-          <a:xfrm flipH="1">
-            <a:off x="10881359" y="5577840"/>
-            <a:ext cx="3611881" cy="0"/>
-          </a:xfrm>
-          <a:prstGeom prst="line">
-            <a:avLst/>
-          </a:prstGeom>
-          <a:ln w="25400">
-            <a:solidFill>
-              <a:srgbClr val="4285F4"/>
-            </a:solidFill>
-            <a:tailEnd type="arrow" w="med" len="med"/>
-          </a:ln>
-        </p:spPr>
-        <p:style>
-          <a:lnRef idx="2">
-            <a:schemeClr val="accent1"/>
-          </a:lnRef>
-          <a:fillRef idx="0">
-            <a:schemeClr val="accent1"/>
-          </a:fillRef>
-          <a:effectRef idx="1">
-            <a:schemeClr val="accent1"/>
-          </a:effectRef>
-          <a:fontRef idx="minor">
-            <a:schemeClr val="tx1"/>
-          </a:fontRef>
-        </p:style>
-      </p:cxnSp>
-      <p:sp>
-        <p:nvSpPr>
-          <p:cNvPr id="32" name="TextBox 31"/>
-          <p:cNvSpPr txBox="1"/>
-          <p:nvPr/>
-        </p:nvSpPr>
-        <p:spPr>
-          <a:xfrm>
-            <a:off x="10927080" y="5650992"/>
-            <a:ext cx="3520440" cy="292608"/>
-          </a:xfrm>
-          <a:prstGeom prst="rect">
-            <a:avLst/>
-          </a:prstGeom>
-          <a:noFill/>
-        </p:spPr>
-        <p:txBody>
-          <a:bodyPr wrap="square">
-            <a:spAutoFit/>
-          </a:bodyPr>
-          <a:lstStyle/>
-          <a:p>
-            <a:pPr algn="ctr"/>
-            <a:r>
-              <a:rPr sz="1000" b="0" i="1">
-                <a:solidFill>
-                  <a:srgbClr val="64748B"/>
-                </a:solidFill>
-              </a:rPr>
-              <a:t>vectors / rankings / tokens</a:t>
-            </a:r>
-          </a:p>
-        </p:txBody>
-      </p:sp>
-      <p:cxnSp>
-        <p:nvCxnSpPr>
-          <p:cNvPr id="33" name="Connector 32"/>
-          <p:cNvCxnSpPr/>
-          <p:nvPr/>
-        </p:nvCxnSpPr>
-        <p:spPr>
-          <a:xfrm>
-            <a:off x="9144000" y="7315200"/>
-            <a:ext cx="0" cy="548640"/>
-          </a:xfrm>
-          <a:prstGeom prst="line">
-            <a:avLst/>
-          </a:prstGeom>
-          <a:ln w="25400">
-            <a:solidFill>
-              <a:srgbClr val="336791"/>
-            </a:solidFill>
-            <a:tailEnd type="arrow" w="med" len="med"/>
-          </a:ln>
-        </p:spPr>
-        <p:style>
-          <a:lnRef idx="2">
-            <a:schemeClr val="accent1"/>
-          </a:lnRef>
-          <a:fillRef idx="0">
-            <a:schemeClr val="accent1"/>
-          </a:fillRef>
-          <a:effectRef idx="1">
-            <a:schemeClr val="accent1"/>
-          </a:effectRef>
-          <a:fontRef idx="minor">
-            <a:schemeClr val="tx1"/>
-          </a:fontRef>
-        </p:style>
-      </p:cxnSp>
-      <p:sp>
-        <p:nvSpPr>
-          <p:cNvPr id="34" name="TextBox 33"/>
-          <p:cNvSpPr txBox="1"/>
-          <p:nvPr/>
-        </p:nvSpPr>
-        <p:spPr>
-          <a:xfrm>
-            <a:off x="9235440" y="7424928"/>
-            <a:ext cx="2011680" cy="329184"/>
-          </a:xfrm>
-          <a:prstGeom prst="rect">
-            <a:avLst/>
-          </a:prstGeom>
-          <a:noFill/>
-        </p:spPr>
-        <p:txBody>
-          <a:bodyPr wrap="square">
-            <a:spAutoFit/>
-          </a:bodyPr>
-          <a:lstStyle/>
-          <a:p>
-            <a:pPr algn="l"/>
-            <a:r>
-              <a:rPr sz="1000" b="0" i="1">
-                <a:solidFill>
-                  <a:srgbClr val="64748B"/>
-                </a:solidFill>
-              </a:rPr>
-              <a:t>store &amp; retrieve</a:t>
-            </a:r>
-          </a:p>
-        </p:txBody>
-      </p:sp>
-      <p:sp>
-        <p:nvSpPr>
-          <p:cNvPr id="35" name="TextBox 34"/>
-          <p:cNvSpPr txBox="1"/>
-          <p:nvPr/>
-        </p:nvSpPr>
-        <p:spPr>
-          <a:xfrm>
-            <a:off x="457200" y="10058400"/>
-            <a:ext cx="17373600" cy="274320"/>
-          </a:xfrm>
-          <a:prstGeom prst="rect">
-            <a:avLst/>
-          </a:prstGeom>
-          <a:noFill/>
-        </p:spPr>
-        <p:txBody>
-          <a:bodyPr wrap="none">
-            <a:spAutoFit/>
-          </a:bodyPr>
-          <a:lstStyle/>
-          <a:p>
-            <a:pPr algn="l"/>
-            <a:r>
-              <a:rPr sz="900" b="0" i="0">
-                <a:solidFill>
-                  <a:srgbClr val="94A3B8"/>
-                </a:solidFill>
-              </a:rPr>
-              <a:t>Ingest flow: Browser → FastAPI → Gemini (embed) → Postgres (store)     Query flow: Browser → FastAPI → Postgres (hybrid search) → Gemini (rerank+answer) → Browser (SSE)</a:t>
-            </a:r>
-          </a:p>
-        </p:txBody>
-      </p:sp>
-    </p:spTree>
-  </p:cSld>
-  <p:clrMapOvr>
-    <a:masterClrMapping/>
-  </p:clrMapOvr>
-</p:sld>
-</file>
-
 <file path=ppt/slides/slide2.xml><?xml version="1.0" encoding="utf-8"?>
 <p:sld xmlns:p="http://schemas.openxmlformats.org/presentationml/2006/main" xmlns:a="http://schemas.openxmlformats.org/drawingml/2006/main">
   <p:cSld>
@@ -16123,7 +16120,7 @@
                 <a:cs typeface="Calibri (MS)"/>
                 <a:sym typeface="Calibri (MS)"/>
               </a:rPr>
-              <a:t>🔃</a:t>
+              <a:t>💬</a:t>
             </a:r>
           </a:p>
         </p:txBody>
@@ -16164,7 +16161,7 @@
                 <a:cs typeface="Calibri (MS) Bold"/>
                 <a:sym typeface="Calibri (MS) Bold"/>
               </a:rPr>
-              <a:t>Re-rank</a:t>
+              <a:t>Generate</a:t>
             </a:r>
           </a:p>
         </p:txBody>
@@ -16205,7 +16202,7 @@
                 <a:cs typeface="Calibri (MS)"/>
                 <a:sym typeface="Calibri (MS)"/>
               </a:rPr>
-              <a:t>Gemini ranks</a:t>
+              <a:t>Gemini 2.5 Flash</a:t>
             </a:r>
           </a:p>
           <a:p>
@@ -16224,7 +16221,7 @@
                 <a:cs typeface="Calibri (MS)"/>
                 <a:sym typeface="Calibri (MS)"/>
               </a:rPr>
-              <a:t>top k/2</a:t>
+              <a:t>streamed SSE</a:t>
             </a:r>
           </a:p>
         </p:txBody>

--- a/NYMBL-DOCRAG.pptx
+++ b/NYMBL-DOCRAG.pptx
@@ -7329,7 +7329,7 @@
                   <a:srgbClr val="4C1D95"/>
                 </a:solidFill>
               </a:rPr>
-              <a:t>🔍  No Scanned PDF / OCR</a:t>
+              <a:t>🔍  Limited OCR Support</a:t>
             </a:r>
           </a:p>
         </p:txBody>
@@ -7363,7 +7363,7 @@
                   <a:srgbClr val="7C3AED"/>
                 </a:solidFill>
               </a:rPr>
-              <a:t>PyMuPDF extracts text from digital PDFs only. Image-based or scanned pages return empty text — no Tesseract / Vision fallback.</a:t>
+              <a:t>Embedded images are extracted and captioned by Gemini Vision, so figures and diagrams are queryable. But full-page scanned PDFs (e.g. scanned books) aren't OCR'd to text — only the page-as-image caption is indexed.</a:t>
             </a:r>
           </a:p>
         </p:txBody>
@@ -8697,12 +8697,45 @@
           <a:p>
             <a:pPr algn="l"/>
             <a:r>
-              <a:rPr sz="1150" b="0" i="0">
+              <a:rPr sz="1150">
                 <a:solidFill>
                   <a:srgbClr val="7C3AED"/>
                 </a:solidFill>
               </a:rPr>
-              <a:t/>
+              <a:t>embedding-2 (768-dim)</a:t>
+            </a:r>
+          </a:p>
+          <a:p>
+            <a:pPr algn="l"/>
+            <a:r>
+              <a:rPr sz="1150">
+                <a:solidFill>
+                  <a:srgbClr val="7C3AED"/>
+                </a:solidFill>
+              </a:rPr>
+              <a:t>RETRIEVAL_DOCUMENT/QUERY</a:t>
+            </a:r>
+          </a:p>
+          <a:p>
+            <a:pPr algn="l"/>
+            <a:r>
+              <a:rPr sz="1150">
+                <a:solidFill>
+                  <a:srgbClr val="7C3AED"/>
+                </a:solidFill>
+              </a:rPr>
+              <a:t>2.5-flash vision (image captions)</a:t>
+            </a:r>
+          </a:p>
+          <a:p>
+            <a:pPr algn="l"/>
+            <a:r>
+              <a:rPr sz="1150">
+                <a:solidFill>
+                  <a:srgbClr val="7C3AED"/>
+                </a:solidFill>
+              </a:rPr>
+              <a:t>2.5-flash answer (SSE)</a:t>
             </a:r>
           </a:p>
         </p:txBody>

--- a/NYMBL-DOCRAG.pptx
+++ b/NYMBL-DOCRAG.pptx
@@ -9739,7 +9739,7 @@
                 <a:cs typeface="Calibri (MS)"/>
                 <a:sym typeface="Calibri (MS)"/>
               </a:rPr>
-              <a:t>🔃 Gemini re-ranking</a:t>
+              <a:t>🖼 Image retrieval + linking</a:t>
             </a:r>
           </a:p>
         </p:txBody>
@@ -24998,7 +24998,7 @@
                 <a:cs typeface="Calibri (MS) Bold"/>
                 <a:sym typeface="Calibri (MS) Bold"/>
               </a:rPr>
-              <a:t>🔃  Gemini Re-ranking</a:t>
+              <a:t>🖼  Multimodal Image Retrieval</a:t>
             </a:r>
           </a:p>
         </p:txBody>
@@ -25039,7 +25039,7 @@
                 <a:cs typeface="Calibri (MS)"/>
                 <a:sym typeface="Calibri (MS)"/>
               </a:rPr>
-              <a:t>After hybrid retrieval returns k chunks, Gemini ranks them by relevance to the question and keeps the top k/2. Filters out chunks that are semantically close but topically irrelevant before they reach the LLM context window.</a:t>
+              <a:t>Opt-in at upload: extract embedded images with PyMuPDF, caption each with Gemini Vision (downsized + bounded concurrency), embed captions into the same hybrid space, and store image bytes in BYTEA. At answer time, image chunks are passed as multimodal Parts so Gemini reasons over the picture itself. Bold painting/figure names in the answer become clickable hyperlinks via fuzzy match against caption + adjacent page text.</a:t>
             </a:r>
           </a:p>
         </p:txBody>

--- a/NYMBL-DOCRAG.pptx
+++ b/NYMBL-DOCRAG.pptx
@@ -5711,7 +5711,7 @@
                 <a:cs typeface="Calibri (MS) Bold"/>
                 <a:sym typeface="Calibri (MS) Bold"/>
               </a:rPr>
-              <a:t>• OCR for scanned PDFs</a:t>
+              <a:t>✅ OCR for scanned PDFs (shipped)</a:t>
             </a:r>
           </a:p>
         </p:txBody>
@@ -5752,7 +5752,7 @@
                 <a:cs typeface="Calibri (MS)"/>
                 <a:sym typeface="Calibri (MS)"/>
               </a:rPr>
-              <a:t>Tesseract or Google Vision fallback when PyMuPDF returns empty text — currently image-based PDFs produce no chunks.</a:t>
+              <a:t>Gemini 2.5 Flash with structured JSON output: empty-text pages render at 200 DPI, get transcribed, and per-line bboxes power yellow overlay highlights in the viewer.</a:t>
             </a:r>
           </a:p>
         </p:txBody>
@@ -7329,7 +7329,7 @@
                   <a:srgbClr val="4C1D95"/>
                 </a:solidFill>
               </a:rPr>
-              <a:t>🔍  Limited OCR Support</a:t>
+              <a:t>🔍  OCR opt-in only</a:t>
             </a:r>
           </a:p>
         </p:txBody>
@@ -7363,7 +7363,7 @@
                   <a:srgbClr val="7C3AED"/>
                 </a:solidFill>
               </a:rPr>
-              <a:t>Embedded images are extracted and captioned by Gemini Vision, so figures and diagrams are queryable. But full-page scanned PDFs (e.g. scanned books) aren't OCR'd to text — only the page-as-image caption is indexed.</a:t>
+              <a:t>OCR for scanned/handwritten pages is supported via Gemini Vision but must be enabled at upload — every empty-text page (≤ 50 chars from PyMuPDF) becomes a Vision call. No automatic detection: the user toggles it per upload.</a:t>
             </a:r>
           </a:p>
         </p:txBody>

--- a/NYMBL-DOCRAG.pptx
+++ b/NYMBL-DOCRAG.pptx
@@ -5752,7 +5752,7 @@
                 <a:cs typeface="Calibri (MS)"/>
                 <a:sym typeface="Calibri (MS)"/>
               </a:rPr>
-              <a:t>Gemini 2.5 Flash with structured JSON output: empty-text pages render at 200 DPI, get transcribed, and per-line bboxes power yellow overlay highlights in the viewer.</a:t>
+              <a:t>Empty-text pages render at 200 DPI and Gemini Vision returns the verbatim transcription; the text flows into the normal chunker/embedder/retriever.</a:t>
             </a:r>
           </a:p>
         </p:txBody>

--- a/NYMBL-DOCRAG.pptx
+++ b/NYMBL-DOCRAG.pptx
@@ -7363,7 +7363,7 @@
                   <a:srgbClr val="7C3AED"/>
                 </a:solidFill>
               </a:rPr>
-              <a:t>OCR for scanned/handwritten pages is supported via Gemini Vision but must be enabled at upload — every empty-text page (≤ 50 chars from PyMuPDF) becomes a Vision call. No automatic detection: the user toggles it per upload.</a:t>
+              <a:t>Per-page detection: pages with typed content above 50 chars skip OCR (so a typed page with a handwritten margin note is missed). The transcription is plain text only — color metadata is not preserved, so red vs blue ink reads the same.</a:t>
             </a:r>
           </a:p>
         </p:txBody>

--- a/NYMBL-DOCRAG.pptx
+++ b/NYMBL-DOCRAG.pptx
@@ -7363,7 +7363,7 @@
                   <a:srgbClr val="7C3AED"/>
                 </a:solidFill>
               </a:rPr>
-              <a:t>Per-page detection: pages with typed content above 50 chars skip OCR (so a typed page with a handwritten margin note is missed). The transcription is plain text only — color metadata is not preserved, so red vs blue ink reads the same.</a:t>
+              <a:t>Per-page detection: typed pages above 50 chars skip OCR (handwritten margin notes missed). Transcription is plain text only — no ink-color metadata. Scans with a pre-existing embedded OCR layer (Acrobat, Preview) read as typed PDFs; the viewer's text-layer highlighter then misaligns yellow rectangles over the actual handwriting glyphs.</a:t>
             </a:r>
           </a:p>
         </p:txBody>

--- a/NYMBL-DOCRAG.pptx
+++ b/NYMBL-DOCRAG.pptx
@@ -5752,7 +5752,7 @@
                 <a:cs typeface="Calibri (MS)"/>
                 <a:sym typeface="Calibri (MS)"/>
               </a:rPr>
-              <a:t>Empty-text pages render at 200 DPI and Gemini Vision returns the verbatim transcription; the text flows into the normal chunker/embedder/retriever.</a:t>
+              <a:t>Shipped: Vision OCR on empty/sparse pages, plus PDF annotation enrichment — highlights, underlines, sticky notes and free-text comments are pulled into the page text at ingest. Future: scanned-and-printed handwriting (rasterised ink with no annotation objects) and flattened-ink PDFs from iPad exports — both need a per-page Vision pass.</a:t>
             </a:r>
           </a:p>
         </p:txBody>

--- a/NYMBL-DOCRAG.pptx
+++ b/NYMBL-DOCRAG.pptx
@@ -5752,7 +5752,7 @@
                 <a:cs typeface="Calibri (MS)"/>
                 <a:sym typeface="Calibri (MS)"/>
               </a:rPr>
-              <a:t>Shipped: Vision OCR on empty/sparse pages, plus PDF annotation enrichment — highlights, underlines, sticky notes and free-text comments are pulled into the page text at ingest. Future: scanned-and-printed handwriting (rasterised ink with no annotation objects) and flattened-ink PDFs from iPad exports — both need a per-page Vision pass.</a:t>
+              <a:t>Shipped: (1) Vision OCR on empty/sparse pages so handwritten/scanned content becomes searchable; (2) PDF annotation reader pulls Acrobat/Preview highlights, underlines, sticky notes into chunk context; (3) Vision visual-markup pass detects hand-drawn underlines/highlights flattened into the page raster — the same toggle covers all three.</a:t>
             </a:r>
           </a:p>
         </p:txBody>

--- a/NYMBL-DOCRAG.pptx
+++ b/NYMBL-DOCRAG.pptx
@@ -5752,7 +5752,7 @@
                 <a:cs typeface="Calibri (MS)"/>
                 <a:sym typeface="Calibri (MS)"/>
               </a:rPr>
-              <a:t>Shipped: (1) Vision OCR on empty/sparse pages so handwritten/scanned content becomes searchable; (2) PDF annotation reader pulls Acrobat/Preview highlights, underlines, sticky notes into chunk context; (3) Vision visual-markup pass detects hand-drawn underlines/highlights flattened into the page raster — the same toggle covers all three.</a:t>
+              <a:t>Shipped: (1) Vision OCR on empty/sparse pages so handwritten/scanned content becomes searchable; (2) PDF annotation reader pulls Acrobat/Preview highlights, underlines and sticky notes into chunk context; (3) Vision visual-markup pass detects hand-drawn underlines/highlights flattened into the page raster. OCR is bundled with the 'Hand Written?' toggle (cheap); markup detection is a separate opt-in (one Vision call per page — slow on long PDFs).</a:t>
             </a:r>
           </a:p>
         </p:txBody>

--- a/NYMBL-DOCRAG.pptx
+++ b/NYMBL-DOCRAG.pptx
@@ -4845,7 +4845,7 @@
                 <a:cs typeface="Calibri (MS)"/>
                 <a:sym typeface="Calibri (MS)"/>
               </a:rPr>
-              <a:t>Drag &amp; drop — watch ingest progress: extract → chunk → embed → done</a:t>
+              <a:t>Drag &amp; drop, then pick toggles for the PDF: Hand Written? for scans / image-only PDFs (fills empty text), Detect hand-drawn markup for hand-drawn underlines/highlights baked into the page raster (slow — use the page-range input on long docs).</a:t>
             </a:r>
           </a:p>
         </p:txBody>
@@ -5752,7 +5752,7 @@
                 <a:cs typeface="Calibri (MS)"/>
                 <a:sym typeface="Calibri (MS)"/>
               </a:rPr>
-              <a:t>Shipped: (1) Vision OCR on empty/sparse pages so handwritten/scanned content becomes searchable; (2) PDF annotation reader pulls Acrobat/Preview highlights, underlines and sticky notes into chunk context; (3) Vision visual-markup pass detects hand-drawn underlines/highlights flattened into the page raster. OCR is bundled with the 'Hand Written?' toggle (cheap); markup detection is a separate opt-in (one Vision call per page — slow on long PDFs).</a:t>
+              <a:t>Shipped: (1) Vision OCR on empty/sparse pages so handwritten/scanned content becomes searchable; (2) PDF annotation reader pulls Acrobat/Preview highlights, underlines and sticky notes into chunk context; (3) Vision visual-markup pass detects hand-drawn underlines/highlights flattened into the page raster. Toggle guide: typed PDF + hand-marked → markup only; image-only scan → both; pre-OCR'd scan → markup only; fully handwritten notebook → both. Markup pass takes one Vision call per page — page-range input scopes long docs.</a:t>
             </a:r>
           </a:p>
         </p:txBody>

--- a/NYMBL-DOCRAG.pptx
+++ b/NYMBL-DOCRAG.pptx
@@ -4845,7 +4845,7 @@
                 <a:cs typeface="Calibri (MS)"/>
                 <a:sym typeface="Calibri (MS)"/>
               </a:rPr>
-              <a:t>Drag &amp; drop, then pick toggles for the PDF: Hand Written? for scans / image-only PDFs (fills empty text), Detect hand-drawn markup for hand-drawn underlines/highlights baked into the page raster (slow — use the page-range input on long docs).</a:t>
+              <a:t>Drag &amp; drop, then pick toggles for the PDF: Hand Written? for scans / image-only PDFs (fills empty text), Markings? for hand-drawn underlines/highlights baked into the page raster (slow — use the page-range input on long docs).</a:t>
             </a:r>
           </a:p>
         </p:txBody>

--- a/NYMBL-DOCRAG.pptx
+++ b/NYMBL-DOCRAG.pptx
@@ -4280,7 +4280,7 @@
                 <a:cs typeface="Calibri (MS)"/>
                 <a:sym typeface="Calibri (MS)"/>
               </a:rPr>
-              <a:t>🔃  Gemini re-ranking</a:t>
+              <a:t>🖼  Multimodal image retrieval (opt-in)</a:t>
             </a:r>
           </a:p>
         </p:txBody>
@@ -19423,7 +19423,7 @@
       </p:sp>
       <p:sp>
         <p:nvSpPr>
-          <p:cNvPr name="TextBox 18" id="18"/>
+          <p:cNvPr name="TextBox 21" id="21"/>
           <p:cNvSpPr txBox="true"/>
           <p:nvPr/>
         </p:nvSpPr>
@@ -19457,14 +19457,14 @@
                 <a:cs typeface="Calibri (MS)"/>
                 <a:sym typeface="Calibri (MS)"/>
               </a:rPr>
-              <a:t>🔃</a:t>
-            </a:r>
-          </a:p>
-        </p:txBody>
-      </p:sp>
-      <p:sp>
-        <p:nvSpPr>
-          <p:cNvPr name="TextBox 19" id="19"/>
+              <a:t>📎</a:t>
+            </a:r>
+          </a:p>
+        </p:txBody>
+      </p:sp>
+      <p:sp>
+        <p:nvSpPr>
+          <p:cNvPr name="TextBox 22" id="22"/>
           <p:cNvSpPr txBox="true"/>
           <p:nvPr/>
         </p:nvSpPr>
@@ -19498,129 +19498,6 @@
                 <a:cs typeface="Calibri (MS) Bold"/>
                 <a:sym typeface="Calibri (MS) Bold"/>
               </a:rPr>
-              <a:t>Re-rank</a:t>
-            </a:r>
-          </a:p>
-        </p:txBody>
-      </p:sp>
-      <p:sp>
-        <p:nvSpPr>
-          <p:cNvPr name="TextBox 20" id="20"/>
-          <p:cNvSpPr txBox="true"/>
-          <p:nvPr/>
-        </p:nvSpPr>
-        <p:spPr>
-          <a:xfrm rot="0">
-            <a:off x="10304126" y="3380194"/>
-            <a:ext cx="2974267" cy="280302"/>
-          </a:xfrm>
-          <a:prstGeom prst="rect">
-            <a:avLst/>
-          </a:prstGeom>
-        </p:spPr>
-        <p:txBody>
-          <a:bodyPr anchor="t" rtlCol="false" tIns="0" lIns="0" bIns="0" rIns="0">
-            <a:spAutoFit/>
-          </a:bodyPr>
-          <a:lstStyle/>
-          <a:p>
-            <a:pPr algn="ctr">
-              <a:lnSpc>
-                <a:spcPts val="1621"/>
-              </a:lnSpc>
-            </a:pPr>
-            <a:r>
-              <a:rPr lang="en-US" sz="1351">
-                <a:solidFill>
-                  <a:srgbClr val="7C3AED"/>
-                </a:solidFill>
-                <a:latin typeface="Calibri (MS)"/>
-                <a:ea typeface="Calibri (MS)"/>
-                <a:cs typeface="Calibri (MS)"/>
-                <a:sym typeface="Calibri (MS)"/>
-              </a:rPr>
-              <a:t>Gemini · top k/2</a:t>
-            </a:r>
-          </a:p>
-        </p:txBody>
-      </p:sp>
-      <p:sp>
-        <p:nvSpPr>
-          <p:cNvPr name="TextBox 21" id="21"/>
-          <p:cNvSpPr txBox="true"/>
-          <p:nvPr/>
-        </p:nvSpPr>
-        <p:spPr>
-          <a:xfrm rot="0">
-            <a:off x="13571087" y="2349570"/>
-            <a:ext cx="2974267" cy="583416"/>
-          </a:xfrm>
-          <a:prstGeom prst="rect">
-            <a:avLst/>
-          </a:prstGeom>
-        </p:spPr>
-        <p:txBody>
-          <a:bodyPr anchor="t" rtlCol="false" tIns="0" lIns="0" bIns="0" rIns="0">
-            <a:spAutoFit/>
-          </a:bodyPr>
-          <a:lstStyle/>
-          <a:p>
-            <a:pPr algn="ctr">
-              <a:lnSpc>
-                <a:spcPts val="3242"/>
-              </a:lnSpc>
-            </a:pPr>
-            <a:r>
-              <a:rPr lang="en-US" sz="2702">
-                <a:solidFill>
-                  <a:srgbClr val="4C1D95"/>
-                </a:solidFill>
-                <a:latin typeface="Calibri (MS)"/>
-                <a:ea typeface="Calibri (MS)"/>
-                <a:cs typeface="Calibri (MS)"/>
-                <a:sym typeface="Calibri (MS)"/>
-              </a:rPr>
-              <a:t>📎</a:t>
-            </a:r>
-          </a:p>
-        </p:txBody>
-      </p:sp>
-      <p:sp>
-        <p:nvSpPr>
-          <p:cNvPr name="TextBox 22" id="22"/>
-          <p:cNvSpPr txBox="true"/>
-          <p:nvPr/>
-        </p:nvSpPr>
-        <p:spPr>
-          <a:xfrm rot="0">
-            <a:off x="13571087" y="2968390"/>
-            <a:ext cx="2974267" cy="348939"/>
-          </a:xfrm>
-          <a:prstGeom prst="rect">
-            <a:avLst/>
-          </a:prstGeom>
-        </p:spPr>
-        <p:txBody>
-          <a:bodyPr anchor="t" rtlCol="false" tIns="0" lIns="0" bIns="0" rIns="0">
-            <a:spAutoFit/>
-          </a:bodyPr>
-          <a:lstStyle/>
-          <a:p>
-            <a:pPr algn="ctr">
-              <a:lnSpc>
-                <a:spcPts val="1981"/>
-              </a:lnSpc>
-            </a:pPr>
-            <a:r>
-              <a:rPr lang="en-US" sz="1651" b="true">
-                <a:solidFill>
-                  <a:srgbClr val="4C1D95"/>
-                </a:solidFill>
-                <a:latin typeface="Calibri (MS) Bold"/>
-                <a:ea typeface="Calibri (MS) Bold"/>
-                <a:cs typeface="Calibri (MS) Bold"/>
-                <a:sym typeface="Calibri (MS) Bold"/>
-              </a:rPr>
               <a:t>Stream answer</a:t>
             </a:r>
           </a:p>
@@ -19634,7 +19511,7 @@
         </p:nvSpPr>
         <p:spPr>
           <a:xfrm rot="0">
-            <a:off x="13571087" y="3380194"/>
+            <a:off x="10304126" y="3380194"/>
             <a:ext cx="2974267" cy="280302"/>
           </a:xfrm>
           <a:prstGeom prst="rect">
@@ -22828,7 +22705,7 @@
                 <a:cs typeface="Calibri (MS)"/>
                 <a:sym typeface="Calibri (MS)"/>
               </a:rPr>
-              <a:t>Fast, cost-effective, streamed output via SSE for a responsive UX. Also used for re-ranking.</a:t>
+              <a:t>Fast, cost-effective, streamed output via SSE for a responsive UX.</a:t>
             </a:r>
           </a:p>
         </p:txBody>
